--- a/ML_A_B_Split_Test.pptx
+++ b/ML_A_B_Split_Test.pptx
@@ -5,17 +5,18 @@
     <p:sldMasterId id="2147483648" r:id="rId1"/>
   </p:sldMasterIdLst>
   <p:notesMasterIdLst>
-    <p:notesMasterId r:id="rId10"/>
+    <p:notesMasterId r:id="rId11"/>
   </p:notesMasterIdLst>
   <p:sldIdLst>
     <p:sldId id="334" r:id="rId2"/>
     <p:sldId id="340" r:id="rId3"/>
     <p:sldId id="335" r:id="rId4"/>
-    <p:sldId id="341" r:id="rId5"/>
-    <p:sldId id="339" r:id="rId6"/>
-    <p:sldId id="336" r:id="rId7"/>
-    <p:sldId id="337" r:id="rId8"/>
-    <p:sldId id="338" r:id="rId9"/>
+    <p:sldId id="312" r:id="rId5"/>
+    <p:sldId id="341" r:id="rId6"/>
+    <p:sldId id="339" r:id="rId7"/>
+    <p:sldId id="336" r:id="rId8"/>
+    <p:sldId id="337" r:id="rId9"/>
+    <p:sldId id="338" r:id="rId10"/>
   </p:sldIdLst>
   <p:sldSz cx="12192000" cy="6858000"/>
   <p:notesSz cx="6858000" cy="9144000"/>
@@ -204,7 +205,7 @@
           <a:p>
             <a:fld id="{C2E15B94-D9E4-E149-8081-23A720D1EE5F}" type="datetimeFigureOut">
               <a:rPr lang="en-US" smtClean="0"/>
-              <a:t>4/15/21</a:t>
+              <a:t>6/21/21</a:t>
             </a:fld>
             <a:endParaRPr lang="en-US"/>
           </a:p>
@@ -618,7 +619,7 @@
           <a:p>
             <a:fld id="{FBD852D7-E694-214E-8A12-510E0A0329D2}" type="datetimeFigureOut">
               <a:rPr lang="en-US" smtClean="0"/>
-              <a:t>4/15/21</a:t>
+              <a:t>6/21/21</a:t>
             </a:fld>
             <a:endParaRPr lang="en-US"/>
           </a:p>
@@ -816,7 +817,7 @@
           <a:p>
             <a:fld id="{FBD852D7-E694-214E-8A12-510E0A0329D2}" type="datetimeFigureOut">
               <a:rPr lang="en-US" smtClean="0"/>
-              <a:t>4/15/21</a:t>
+              <a:t>6/21/21</a:t>
             </a:fld>
             <a:endParaRPr lang="en-US"/>
           </a:p>
@@ -1024,7 +1025,7 @@
           <a:p>
             <a:fld id="{FBD852D7-E694-214E-8A12-510E0A0329D2}" type="datetimeFigureOut">
               <a:rPr lang="en-US" smtClean="0"/>
-              <a:t>4/15/21</a:t>
+              <a:t>6/21/21</a:t>
             </a:fld>
             <a:endParaRPr lang="en-US"/>
           </a:p>
@@ -1222,7 +1223,7 @@
           <a:p>
             <a:fld id="{FBD852D7-E694-214E-8A12-510E0A0329D2}" type="datetimeFigureOut">
               <a:rPr lang="en-US" smtClean="0"/>
-              <a:t>4/15/21</a:t>
+              <a:t>6/21/21</a:t>
             </a:fld>
             <a:endParaRPr lang="en-US"/>
           </a:p>
@@ -1497,7 +1498,7 @@
           <a:p>
             <a:fld id="{FBD852D7-E694-214E-8A12-510E0A0329D2}" type="datetimeFigureOut">
               <a:rPr lang="en-US" smtClean="0"/>
-              <a:t>4/15/21</a:t>
+              <a:t>6/21/21</a:t>
             </a:fld>
             <a:endParaRPr lang="en-US"/>
           </a:p>
@@ -1762,7 +1763,7 @@
           <a:p>
             <a:fld id="{FBD852D7-E694-214E-8A12-510E0A0329D2}" type="datetimeFigureOut">
               <a:rPr lang="en-US" smtClean="0"/>
-              <a:t>4/15/21</a:t>
+              <a:t>6/21/21</a:t>
             </a:fld>
             <a:endParaRPr lang="en-US"/>
           </a:p>
@@ -2174,7 +2175,7 @@
           <a:p>
             <a:fld id="{FBD852D7-E694-214E-8A12-510E0A0329D2}" type="datetimeFigureOut">
               <a:rPr lang="en-US" smtClean="0"/>
-              <a:t>4/15/21</a:t>
+              <a:t>6/21/21</a:t>
             </a:fld>
             <a:endParaRPr lang="en-US"/>
           </a:p>
@@ -2315,7 +2316,7 @@
           <a:p>
             <a:fld id="{FBD852D7-E694-214E-8A12-510E0A0329D2}" type="datetimeFigureOut">
               <a:rPr lang="en-US" smtClean="0"/>
-              <a:t>4/15/21</a:t>
+              <a:t>6/21/21</a:t>
             </a:fld>
             <a:endParaRPr lang="en-US"/>
           </a:p>
@@ -2428,7 +2429,7 @@
           <a:p>
             <a:fld id="{FBD852D7-E694-214E-8A12-510E0A0329D2}" type="datetimeFigureOut">
               <a:rPr lang="en-US" smtClean="0"/>
-              <a:t>4/15/21</a:t>
+              <a:t>6/21/21</a:t>
             </a:fld>
             <a:endParaRPr lang="en-US"/>
           </a:p>
@@ -2739,7 +2740,7 @@
           <a:p>
             <a:fld id="{FBD852D7-E694-214E-8A12-510E0A0329D2}" type="datetimeFigureOut">
               <a:rPr lang="en-US" smtClean="0"/>
-              <a:t>4/15/21</a:t>
+              <a:t>6/21/21</a:t>
             </a:fld>
             <a:endParaRPr lang="en-US"/>
           </a:p>
@@ -3027,7 +3028,7 @@
           <a:p>
             <a:fld id="{FBD852D7-E694-214E-8A12-510E0A0329D2}" type="datetimeFigureOut">
               <a:rPr lang="en-US" smtClean="0"/>
-              <a:t>4/15/21</a:t>
+              <a:t>6/21/21</a:t>
             </a:fld>
             <a:endParaRPr lang="en-US"/>
           </a:p>
@@ -3268,7 +3269,7 @@
           <a:p>
             <a:fld id="{FBD852D7-E694-214E-8A12-510E0A0329D2}" type="datetimeFigureOut">
               <a:rPr lang="en-US" smtClean="0"/>
-              <a:t>4/15/21</a:t>
+              <a:t>6/21/21</a:t>
             </a:fld>
             <a:endParaRPr lang="en-US"/>
           </a:p>
@@ -8248,7 +8249,7 @@
           <p:cNvPr id="2" name="TextBox 1">
             <a:extLst>
               <a:ext uri="{FF2B5EF4-FFF2-40B4-BE49-F238E27FC236}">
-                <a16:creationId xmlns:a16="http://schemas.microsoft.com/office/drawing/2014/main" id="{E3BE1FBD-C5C8-E14F-8F2D-9F5BCABFDD7C}"/>
+                <a16:creationId xmlns:a16="http://schemas.microsoft.com/office/drawing/2014/main" id="{FFF755FE-9EC5-2243-8B9B-E4A9E7CEC3D9}"/>
               </a:ext>
             </a:extLst>
           </p:cNvPr>
@@ -8257,8 +8258,8 @@
         </p:nvSpPr>
         <p:spPr>
           <a:xfrm>
-            <a:off x="605642" y="1459230"/>
-            <a:ext cx="7445828" cy="3939540"/>
+            <a:off x="0" y="0"/>
+            <a:ext cx="5833241" cy="830997"/>
           </a:xfrm>
           <a:prstGeom prst="rect">
             <a:avLst/>
@@ -8271,142 +8272,16 @@
           </a:bodyPr>
           <a:lstStyle/>
           <a:p>
-            <a:pPr marL="342900" indent="-342900">
-              <a:buFont typeface="+mj-lt"/>
-              <a:buAutoNum type="arabicPeriod"/>
-            </a:pPr>
-            <a:r>
-              <a:rPr lang="en-US" sz="1600" dirty="0"/>
-              <a:t>Ending the experiment prematurely (not getting enough data points)</a:t>
-            </a:r>
-          </a:p>
-          <a:p>
-            <a:pPr marL="342900" indent="-342900">
-              <a:buFont typeface="+mj-lt"/>
-              <a:buAutoNum type="arabicPeriod"/>
-            </a:pPr>
-            <a:r>
-              <a:rPr lang="en-US" sz="1600" dirty="0"/>
-              <a:t>Non-consistent (not truly random) cluster assignment</a:t>
-            </a:r>
-          </a:p>
-          <a:p>
-            <a:pPr marL="342900" indent="-342900">
-              <a:buFont typeface="+mj-lt"/>
-              <a:buAutoNum type="arabicPeriod"/>
-            </a:pPr>
-            <a:r>
-              <a:rPr lang="en-US" sz="1600" dirty="0"/>
-              <a:t>A random assignment fails to distribute heavy users equally. </a:t>
+            <a:r>
+              <a:rPr lang="en-US" sz="2400" b="1" dirty="0"/>
+              <a:t>If A/B difference statistically significant?</a:t>
             </a:r>
             <a:br>
-              <a:rPr lang="en-US" sz="1600" dirty="0"/>
+              <a:rPr lang="en-US" sz="2400" b="1" dirty="0"/>
             </a:br>
             <a:r>
-              <a:rPr lang="en-US" sz="1600" dirty="0"/>
-              <a:t>A/A test to check consistency</a:t>
-            </a:r>
-          </a:p>
-          <a:p>
-            <a:pPr marL="342900" indent="-342900">
-              <a:buFont typeface="+mj-lt"/>
-              <a:buAutoNum type="arabicPeriod"/>
-            </a:pPr>
-            <a:r>
-              <a:rPr lang="en-US" sz="1600" dirty="0"/>
-              <a:t>Fail to check the Ceteris Paribus assumption ("all other things being equal" – Latin)</a:t>
-            </a:r>
-          </a:p>
-          <a:p>
-            <a:pPr marL="342900" indent="-342900">
-              <a:buFont typeface="+mj-lt"/>
-              <a:buAutoNum type="arabicPeriod"/>
-            </a:pPr>
-            <a:r>
-              <a:rPr lang="en-US" sz="1600" dirty="0"/>
-              <a:t>Cross-contamination between the treatment and control groups</a:t>
-            </a:r>
-          </a:p>
-          <a:p>
-            <a:pPr marL="342900" indent="-342900">
-              <a:buFont typeface="+mj-lt"/>
-              <a:buAutoNum type="arabicPeriod"/>
-            </a:pPr>
-            <a:r>
-              <a:rPr lang="en-US" sz="1600" dirty="0"/>
-              <a:t>Get fouled by False Positives while making multiple comparisons </a:t>
-            </a:r>
-            <a:br>
-              <a:rPr lang="en-US" sz="1600" dirty="0"/>
-            </a:br>
-            <a:r>
-              <a:rPr lang="en-US" sz="1600" dirty="0"/>
-              <a:t>(use the Bonferroni correction to correct)</a:t>
-            </a:r>
-          </a:p>
-          <a:p>
-            <a:pPr marL="342900" indent="-342900">
-              <a:buFont typeface="+mj-lt"/>
-              <a:buAutoNum type="arabicPeriod"/>
-            </a:pPr>
-            <a:r>
-              <a:rPr lang="en-US" sz="1600" dirty="0"/>
-              <a:t>Individual and aggregated patterns look different for ramp-up experiments</a:t>
-            </a:r>
-            <a:br>
-              <a:rPr lang="en-US" sz="1600" dirty="0"/>
-            </a:br>
-            <a:r>
-              <a:rPr lang="en-US" sz="1600" dirty="0"/>
-              <a:t>(</a:t>
-            </a:r>
-            <a:r>
-              <a:rPr lang="en-US" sz="1600" b="1" dirty="0">
-                <a:solidFill>
-                  <a:srgbClr val="FF0000"/>
-                </a:solidFill>
-              </a:rPr>
-              <a:t>Simpson's paradox</a:t>
-            </a:r>
-            <a:r>
-              <a:rPr lang="en-US" sz="1600" dirty="0"/>
-              <a:t>). Three solutions: (1) use paired t-tests (test before and after); (2) use the weighted sum to adjust for the different ratios; (3) throw away the data from the ramp-up period. </a:t>
-            </a:r>
-          </a:p>
-          <a:p>
-            <a:pPr marL="342900" indent="-342900">
-              <a:buFont typeface="+mj-lt"/>
-              <a:buAutoNum type="arabicPeriod"/>
-            </a:pPr>
-            <a:r>
-              <a:rPr lang="en-US" sz="1600" dirty="0"/>
-              <a:t>Fail to check the primacy and novelty effects</a:t>
-            </a:r>
-          </a:p>
-          <a:p>
-            <a:pPr marL="342900" indent="-342900">
-              <a:buFont typeface="+mj-lt"/>
-              <a:buAutoNum type="arabicPeriod"/>
-            </a:pPr>
-            <a:endParaRPr lang="en-US" dirty="0"/>
-          </a:p>
-          <a:p>
-            <a:pPr marL="342900" indent="-342900">
-              <a:buFont typeface="+mj-lt"/>
-              <a:buAutoNum type="arabicPeriod"/>
-            </a:pPr>
-            <a:endParaRPr lang="en-US" sz="1200" dirty="0"/>
-          </a:p>
-          <a:p>
-            <a:r>
-              <a:rPr lang="en-US" sz="1200" dirty="0">
-                <a:hlinkClick r:id="rId2"/>
-              </a:rPr>
-              <a:t>https://towardsdatascience.com/online-controlled-experiment-8-common-pitfalls-and-solutions-ea4488e5a82e</a:t>
-            </a:r>
-            <a:r>
-              <a:rPr lang="en-US" sz="1200" dirty="0"/>
-              <a:t> </a:t>
+              <a:rPr lang="en-US" sz="2400" b="1" dirty="0"/>
+              <a:t>Answer Using Shuffling (hacking !!)</a:t>
             </a:r>
           </a:p>
         </p:txBody>
@@ -8416,7 +8291,7 @@
           <p:cNvPr id="3" name="TextBox 2">
             <a:extLst>
               <a:ext uri="{FF2B5EF4-FFF2-40B4-BE49-F238E27FC236}">
-                <a16:creationId xmlns:a16="http://schemas.microsoft.com/office/drawing/2014/main" id="{9D2F077A-2E03-EB49-8EF9-9D436252504D}"/>
+                <a16:creationId xmlns:a16="http://schemas.microsoft.com/office/drawing/2014/main" id="{B4214305-FB5A-AA42-89E0-5393ADEB579E}"/>
               </a:ext>
             </a:extLst>
           </p:cNvPr>
@@ -8425,8 +8300,8 @@
         </p:nvSpPr>
         <p:spPr>
           <a:xfrm>
-            <a:off x="0" y="119559"/>
-            <a:ext cx="5985164" cy="523220"/>
+            <a:off x="31775" y="922609"/>
+            <a:ext cx="8417282" cy="738664"/>
           </a:xfrm>
           <a:prstGeom prst="rect">
             <a:avLst/>
@@ -8439,66 +8314,64 @@
           </a:bodyPr>
           <a:lstStyle/>
           <a:p>
-            <a:r>
-              <a:rPr lang="en-US" sz="2800" b="1" dirty="0"/>
-              <a:t>8 Common Pitfalls of A/B Split Testing</a:t>
+            <a:pPr marL="285750" indent="-285750">
+              <a:buFont typeface="Arial" panose="020B0604020202020204" pitchFamily="34" charset="0"/>
+              <a:buChar char="•"/>
+            </a:pPr>
+            <a:r>
+              <a:rPr lang="en-US" sz="1400" dirty="0">
+                <a:solidFill>
+                  <a:srgbClr val="00B050"/>
+                </a:solidFill>
+                <a:latin typeface="Menlo" panose="020B0609030804020204" pitchFamily="49" charset="0"/>
+                <a:ea typeface="Menlo" panose="020B0609030804020204" pitchFamily="49" charset="0"/>
+                <a:cs typeface="Menlo" panose="020B0609030804020204" pitchFamily="49" charset="0"/>
+              </a:rPr>
+              <a:t>Shuffling works when the Null Hypothesis assumes two groups are equivalent</a:t>
+            </a:r>
+          </a:p>
+          <a:p>
+            <a:pPr marL="285750" indent="-285750">
+              <a:buFont typeface="Arial" panose="020B0604020202020204" pitchFamily="34" charset="0"/>
+              <a:buChar char="•"/>
+            </a:pPr>
+            <a:r>
+              <a:rPr lang="en-US" sz="1400" dirty="0">
+                <a:solidFill>
+                  <a:srgbClr val="00B050"/>
+                </a:solidFill>
+                <a:latin typeface="Menlo" panose="020B0609030804020204" pitchFamily="49" charset="0"/>
+                <a:ea typeface="Menlo" panose="020B0609030804020204" pitchFamily="49" charset="0"/>
+                <a:cs typeface="Menlo" panose="020B0609030804020204" pitchFamily="49" charset="0"/>
+              </a:rPr>
+              <a:t>Only works when there is no selection biases</a:t>
+            </a:r>
+          </a:p>
+          <a:p>
+            <a:pPr marL="285750" indent="-285750">
+              <a:buFont typeface="Arial" panose="020B0604020202020204" pitchFamily="34" charset="0"/>
+              <a:buChar char="•"/>
+            </a:pPr>
+            <a:r>
+              <a:rPr lang="en-US" sz="1400" dirty="0">
+                <a:solidFill>
+                  <a:srgbClr val="00B050"/>
+                </a:solidFill>
+                <a:latin typeface="Menlo" panose="020B0609030804020204" pitchFamily="49" charset="0"/>
+                <a:ea typeface="Menlo" panose="020B0609030804020204" pitchFamily="49" charset="0"/>
+                <a:cs typeface="Menlo" panose="020B0609030804020204" pitchFamily="49" charset="0"/>
+              </a:rPr>
+              <a:t>The trials must be independent (!)</a:t>
             </a:r>
           </a:p>
         </p:txBody>
       </p:sp>
-      <p:pic>
-        <p:nvPicPr>
-          <p:cNvPr id="2050" name="Picture 2">
-            <a:extLst>
-              <a:ext uri="{FF2B5EF4-FFF2-40B4-BE49-F238E27FC236}">
-                <a16:creationId xmlns:a16="http://schemas.microsoft.com/office/drawing/2014/main" id="{5F9B9272-7B54-3945-AAF1-0264787029C6}"/>
-              </a:ext>
-            </a:extLst>
-          </p:cNvPr>
-          <p:cNvPicPr>
-            <a:picLocks noChangeAspect="1" noChangeArrowheads="1"/>
-          </p:cNvPicPr>
-          <p:nvPr/>
-        </p:nvPicPr>
-        <p:blipFill>
-          <a:blip r:embed="rId3">
-            <a:extLst>
-              <a:ext uri="{28A0092B-C50C-407E-A947-70E740481C1C}">
-                <a14:useLocalDpi xmlns:a14="http://schemas.microsoft.com/office/drawing/2010/main"/>
-              </a:ext>
-            </a:extLst>
-          </a:blip>
-          <a:srcRect/>
-          <a:stretch>
-            <a:fillRect/>
-          </a:stretch>
-        </p:blipFill>
-        <p:spPr bwMode="auto">
-          <a:xfrm>
-            <a:off x="9092869" y="1339438"/>
-            <a:ext cx="2794000" cy="1866900"/>
-          </a:xfrm>
-          <a:prstGeom prst="rect">
-            <a:avLst/>
-          </a:prstGeom>
-          <a:noFill/>
-          <a:extLst>
-            <a:ext uri="{909E8E84-426E-40DD-AFC4-6F175D3DCCD1}">
-              <a14:hiddenFill xmlns:a14="http://schemas.microsoft.com/office/drawing/2010/main">
-                <a:solidFill>
-                  <a:srgbClr val="FFFFFF"/>
-                </a:solidFill>
-              </a14:hiddenFill>
-            </a:ext>
-          </a:extLst>
-        </p:spPr>
-      </p:pic>
       <p:sp>
         <p:nvSpPr>
           <p:cNvPr id="4" name="TextBox 3">
             <a:extLst>
               <a:ext uri="{FF2B5EF4-FFF2-40B4-BE49-F238E27FC236}">
-                <a16:creationId xmlns:a16="http://schemas.microsoft.com/office/drawing/2014/main" id="{68BA55EB-04A6-594B-B052-252EF52A6171}"/>
+                <a16:creationId xmlns:a16="http://schemas.microsoft.com/office/drawing/2014/main" id="{70E595A3-403F-6749-95B4-96B9355C9FC4}"/>
               </a:ext>
             </a:extLst>
           </p:cNvPr>
@@ -8507,8 +8380,8 @@
         </p:nvSpPr>
         <p:spPr>
           <a:xfrm>
-            <a:off x="9429008" y="3206338"/>
-            <a:ext cx="2624116" cy="1569660"/>
+            <a:off x="1160734" y="1769600"/>
+            <a:ext cx="3566009" cy="369332"/>
           </a:xfrm>
           <a:prstGeom prst="rect">
             <a:avLst/>
@@ -8522,16 +8395,1909 @@
           <a:lstStyle/>
           <a:p>
             <a:r>
-              <a:rPr lang="en-US" sz="1600" b="1" dirty="0">
-                <a:solidFill>
-                  <a:srgbClr val="FF0000"/>
-                </a:solidFill>
-              </a:rPr>
-              <a:t>Simpson's paradox</a:t>
-            </a:r>
-            <a:r>
-              <a:rPr lang="en-US" sz="1600" dirty="0"/>
-              <a:t>: a positive trend appears for two separate groups, whereas a negative trend appears when the groups are combined.</a:t>
+              <a:rPr lang="en-US" sz="1600" dirty="0">
+                <a:solidFill>
+                  <a:srgbClr val="0070C0"/>
+                </a:solidFill>
+                <a:latin typeface="Menlo" panose="020B0609030804020204" pitchFamily="49" charset="0"/>
+                <a:ea typeface="Menlo" panose="020B0609030804020204" pitchFamily="49" charset="0"/>
+                <a:cs typeface="Menlo" panose="020B0609030804020204" pitchFamily="49" charset="0"/>
+              </a:rPr>
+              <a:t>Example</a:t>
+            </a:r>
+            <a:r>
+              <a:rPr lang="en-US" sz="1800" dirty="0">
+                <a:solidFill>
+                  <a:srgbClr val="0070C0"/>
+                </a:solidFill>
+                <a:latin typeface="Menlo" panose="020B0609030804020204" pitchFamily="49" charset="0"/>
+                <a:ea typeface="Menlo" panose="020B0609030804020204" pitchFamily="49" charset="0"/>
+                <a:cs typeface="Menlo" panose="020B0609030804020204" pitchFamily="49" charset="0"/>
+              </a:rPr>
+              <a:t>: A/B Split Test</a:t>
+            </a:r>
+          </a:p>
+        </p:txBody>
+      </p:sp>
+      <p:pic>
+        <p:nvPicPr>
+          <p:cNvPr id="5" name="Picture 4">
+            <a:extLst>
+              <a:ext uri="{FF2B5EF4-FFF2-40B4-BE49-F238E27FC236}">
+                <a16:creationId xmlns:a16="http://schemas.microsoft.com/office/drawing/2014/main" id="{44670FF3-E80B-EB4A-8B34-22B9059C788F}"/>
+              </a:ext>
+            </a:extLst>
+          </p:cNvPr>
+          <p:cNvPicPr>
+            <a:picLocks noChangeAspect="1"/>
+          </p:cNvPicPr>
+          <p:nvPr/>
+        </p:nvPicPr>
+        <p:blipFill>
+          <a:blip r:embed="rId2" cstate="email">
+            <a:extLst>
+              <a:ext uri="{28A0092B-C50C-407E-A947-70E740481C1C}">
+                <a14:useLocalDpi xmlns:a14="http://schemas.microsoft.com/office/drawing/2010/main"/>
+              </a:ext>
+            </a:extLst>
+          </a:blip>
+          <a:stretch>
+            <a:fillRect/>
+          </a:stretch>
+        </p:blipFill>
+        <p:spPr>
+          <a:xfrm>
+            <a:off x="592857" y="2166917"/>
+            <a:ext cx="2079355" cy="1046718"/>
+          </a:xfrm>
+          <a:prstGeom prst="rect">
+            <a:avLst/>
+          </a:prstGeom>
+        </p:spPr>
+      </p:pic>
+      <p:pic>
+        <p:nvPicPr>
+          <p:cNvPr id="6" name="Picture 5">
+            <a:extLst>
+              <a:ext uri="{FF2B5EF4-FFF2-40B4-BE49-F238E27FC236}">
+                <a16:creationId xmlns:a16="http://schemas.microsoft.com/office/drawing/2014/main" id="{5996D345-1AD7-C44B-A5D5-921040892604}"/>
+              </a:ext>
+            </a:extLst>
+          </p:cNvPr>
+          <p:cNvPicPr>
+            <a:picLocks noChangeAspect="1"/>
+          </p:cNvPicPr>
+          <p:nvPr/>
+        </p:nvPicPr>
+        <p:blipFill>
+          <a:blip r:embed="rId3" cstate="email">
+            <a:extLst>
+              <a:ext uri="{28A0092B-C50C-407E-A947-70E740481C1C}">
+                <a14:useLocalDpi xmlns:a14="http://schemas.microsoft.com/office/drawing/2010/main"/>
+              </a:ext>
+            </a:extLst>
+          </a:blip>
+          <a:stretch>
+            <a:fillRect/>
+          </a:stretch>
+        </p:blipFill>
+        <p:spPr>
+          <a:xfrm>
+            <a:off x="2773051" y="2166917"/>
+            <a:ext cx="2079355" cy="1046718"/>
+          </a:xfrm>
+          <a:prstGeom prst="rect">
+            <a:avLst/>
+          </a:prstGeom>
+        </p:spPr>
+      </p:pic>
+      <p:sp>
+        <p:nvSpPr>
+          <p:cNvPr id="7" name="TextBox 6">
+            <a:extLst>
+              <a:ext uri="{FF2B5EF4-FFF2-40B4-BE49-F238E27FC236}">
+                <a16:creationId xmlns:a16="http://schemas.microsoft.com/office/drawing/2014/main" id="{BA7671ED-AC2B-434A-B53F-6906D1E2DAB3}"/>
+              </a:ext>
+            </a:extLst>
+          </p:cNvPr>
+          <p:cNvSpPr txBox="1"/>
+          <p:nvPr/>
+        </p:nvSpPr>
+        <p:spPr>
+          <a:xfrm>
+            <a:off x="153198" y="2492287"/>
+            <a:ext cx="411405" cy="369332"/>
+          </a:xfrm>
+          <a:prstGeom prst="rect">
+            <a:avLst/>
+          </a:prstGeom>
+          <a:noFill/>
+        </p:spPr>
+        <p:txBody>
+          <a:bodyPr wrap="square" rtlCol="0">
+            <a:spAutoFit/>
+          </a:bodyPr>
+          <a:lstStyle/>
+          <a:p>
+            <a:r>
+              <a:rPr lang="en-US" sz="1800" b="1" dirty="0">
+                <a:solidFill>
+                  <a:srgbClr val="00B050"/>
+                </a:solidFill>
+                <a:latin typeface="Menlo" panose="020B0609030804020204" pitchFamily="49" charset="0"/>
+                <a:ea typeface="Menlo" panose="020B0609030804020204" pitchFamily="49" charset="0"/>
+                <a:cs typeface="Menlo" panose="020B0609030804020204" pitchFamily="49" charset="0"/>
+              </a:rPr>
+              <a:t>A</a:t>
+            </a:r>
+          </a:p>
+        </p:txBody>
+      </p:sp>
+      <p:sp>
+        <p:nvSpPr>
+          <p:cNvPr id="8" name="TextBox 7">
+            <a:extLst>
+              <a:ext uri="{FF2B5EF4-FFF2-40B4-BE49-F238E27FC236}">
+                <a16:creationId xmlns:a16="http://schemas.microsoft.com/office/drawing/2014/main" id="{FEEB07CE-582A-044D-9FC6-EF4B1DC52B88}"/>
+              </a:ext>
+            </a:extLst>
+          </p:cNvPr>
+          <p:cNvSpPr txBox="1"/>
+          <p:nvPr/>
+        </p:nvSpPr>
+        <p:spPr>
+          <a:xfrm>
+            <a:off x="4962134" y="2492287"/>
+            <a:ext cx="411405" cy="369332"/>
+          </a:xfrm>
+          <a:prstGeom prst="rect">
+            <a:avLst/>
+          </a:prstGeom>
+          <a:noFill/>
+        </p:spPr>
+        <p:txBody>
+          <a:bodyPr wrap="square" rtlCol="0">
+            <a:spAutoFit/>
+          </a:bodyPr>
+          <a:lstStyle/>
+          <a:p>
+            <a:r>
+              <a:rPr lang="en-US" sz="1800" b="1" dirty="0">
+                <a:solidFill>
+                  <a:srgbClr val="00B050"/>
+                </a:solidFill>
+                <a:latin typeface="Menlo" panose="020B0609030804020204" pitchFamily="49" charset="0"/>
+                <a:ea typeface="Menlo" panose="020B0609030804020204" pitchFamily="49" charset="0"/>
+                <a:cs typeface="Menlo" panose="020B0609030804020204" pitchFamily="49" charset="0"/>
+              </a:rPr>
+              <a:t>B</a:t>
+            </a:r>
+          </a:p>
+        </p:txBody>
+      </p:sp>
+      <p:sp>
+        <p:nvSpPr>
+          <p:cNvPr id="10" name="Rectangle 9">
+            <a:extLst>
+              <a:ext uri="{FF2B5EF4-FFF2-40B4-BE49-F238E27FC236}">
+                <a16:creationId xmlns:a16="http://schemas.microsoft.com/office/drawing/2014/main" id="{9CD7ACBE-9D26-1F4C-A0EA-9DEA5B58888A}"/>
+              </a:ext>
+            </a:extLst>
+          </p:cNvPr>
+          <p:cNvSpPr/>
+          <p:nvPr/>
+        </p:nvSpPr>
+        <p:spPr>
+          <a:xfrm>
+            <a:off x="7074665" y="1675006"/>
+            <a:ext cx="5158912" cy="5170646"/>
+          </a:xfrm>
+          <a:prstGeom prst="rect">
+            <a:avLst/>
+          </a:prstGeom>
+        </p:spPr>
+        <p:txBody>
+          <a:bodyPr wrap="square">
+            <a:spAutoFit/>
+          </a:bodyPr>
+          <a:lstStyle/>
+          <a:p>
+            <a:r>
+              <a:rPr lang="en-US" sz="1100" dirty="0">
+                <a:solidFill>
+                  <a:srgbClr val="0070C0"/>
+                </a:solidFill>
+                <a:latin typeface="Menlo" panose="020B0609030804020204" pitchFamily="49" charset="0"/>
+                <a:ea typeface="Menlo" panose="020B0609030804020204" pitchFamily="49" charset="0"/>
+                <a:cs typeface="Menlo" panose="020B0609030804020204" pitchFamily="49" charset="0"/>
+              </a:rPr>
+              <a:t>N=10000</a:t>
+            </a:r>
+          </a:p>
+          <a:p>
+            <a:r>
+              <a:rPr lang="en-US" sz="1100" dirty="0">
+                <a:solidFill>
+                  <a:srgbClr val="0070C0"/>
+                </a:solidFill>
+                <a:latin typeface="Menlo" panose="020B0609030804020204" pitchFamily="49" charset="0"/>
+                <a:ea typeface="Menlo" panose="020B0609030804020204" pitchFamily="49" charset="0"/>
+                <a:cs typeface="Menlo" panose="020B0609030804020204" pitchFamily="49" charset="0"/>
+              </a:rPr>
+              <a:t>A = </a:t>
+            </a:r>
+            <a:r>
+              <a:rPr lang="en-US" sz="1100" dirty="0" err="1">
+                <a:solidFill>
+                  <a:srgbClr val="0070C0"/>
+                </a:solidFill>
+                <a:latin typeface="Menlo" panose="020B0609030804020204" pitchFamily="49" charset="0"/>
+                <a:ea typeface="Menlo" panose="020B0609030804020204" pitchFamily="49" charset="0"/>
+                <a:cs typeface="Menlo" panose="020B0609030804020204" pitchFamily="49" charset="0"/>
+              </a:rPr>
+              <a:t>np.random.exponential</a:t>
+            </a:r>
+            <a:r>
+              <a:rPr lang="en-US" sz="1100" dirty="0">
+                <a:solidFill>
+                  <a:srgbClr val="0070C0"/>
+                </a:solidFill>
+                <a:latin typeface="Menlo" panose="020B0609030804020204" pitchFamily="49" charset="0"/>
+                <a:ea typeface="Menlo" panose="020B0609030804020204" pitchFamily="49" charset="0"/>
+                <a:cs typeface="Menlo" panose="020B0609030804020204" pitchFamily="49" charset="0"/>
+              </a:rPr>
+              <a:t>(scale=2.0, size=N)</a:t>
+            </a:r>
+          </a:p>
+          <a:p>
+            <a:r>
+              <a:rPr lang="en-US" sz="1100" dirty="0">
+                <a:solidFill>
+                  <a:srgbClr val="0070C0"/>
+                </a:solidFill>
+                <a:latin typeface="Menlo" panose="020B0609030804020204" pitchFamily="49" charset="0"/>
+                <a:ea typeface="Menlo" panose="020B0609030804020204" pitchFamily="49" charset="0"/>
+                <a:cs typeface="Menlo" panose="020B0609030804020204" pitchFamily="49" charset="0"/>
+              </a:rPr>
+              <a:t>B = </a:t>
+            </a:r>
+            <a:r>
+              <a:rPr lang="en-US" sz="1100" dirty="0" err="1">
+                <a:solidFill>
+                  <a:srgbClr val="0070C0"/>
+                </a:solidFill>
+                <a:latin typeface="Menlo" panose="020B0609030804020204" pitchFamily="49" charset="0"/>
+                <a:ea typeface="Menlo" panose="020B0609030804020204" pitchFamily="49" charset="0"/>
+                <a:cs typeface="Menlo" panose="020B0609030804020204" pitchFamily="49" charset="0"/>
+              </a:rPr>
+              <a:t>np.random.exponential</a:t>
+            </a:r>
+            <a:r>
+              <a:rPr lang="en-US" sz="1100" dirty="0">
+                <a:solidFill>
+                  <a:srgbClr val="0070C0"/>
+                </a:solidFill>
+                <a:latin typeface="Menlo" panose="020B0609030804020204" pitchFamily="49" charset="0"/>
+                <a:ea typeface="Menlo" panose="020B0609030804020204" pitchFamily="49" charset="0"/>
+                <a:cs typeface="Menlo" panose="020B0609030804020204" pitchFamily="49" charset="0"/>
+              </a:rPr>
+              <a:t>(scale=2.4, size=N)</a:t>
+            </a:r>
+          </a:p>
+          <a:p>
+            <a:r>
+              <a:rPr lang="en-US" sz="1100" dirty="0">
+                <a:solidFill>
+                  <a:srgbClr val="0070C0"/>
+                </a:solidFill>
+                <a:latin typeface="Menlo" panose="020B0609030804020204" pitchFamily="49" charset="0"/>
+                <a:ea typeface="Menlo" panose="020B0609030804020204" pitchFamily="49" charset="0"/>
+                <a:cs typeface="Menlo" panose="020B0609030804020204" pitchFamily="49" charset="0"/>
+              </a:rPr>
+              <a:t>C = </a:t>
+            </a:r>
+            <a:r>
+              <a:rPr lang="en-US" sz="1100" dirty="0" err="1">
+                <a:solidFill>
+                  <a:srgbClr val="0070C0"/>
+                </a:solidFill>
+                <a:latin typeface="Menlo" panose="020B0609030804020204" pitchFamily="49" charset="0"/>
+                <a:ea typeface="Menlo" panose="020B0609030804020204" pitchFamily="49" charset="0"/>
+                <a:cs typeface="Menlo" panose="020B0609030804020204" pitchFamily="49" charset="0"/>
+              </a:rPr>
+              <a:t>np.concatenate</a:t>
+            </a:r>
+            <a:r>
+              <a:rPr lang="en-US" sz="1100" dirty="0">
+                <a:solidFill>
+                  <a:srgbClr val="0070C0"/>
+                </a:solidFill>
+                <a:latin typeface="Menlo" panose="020B0609030804020204" pitchFamily="49" charset="0"/>
+                <a:ea typeface="Menlo" panose="020B0609030804020204" pitchFamily="49" charset="0"/>
+                <a:cs typeface="Menlo" panose="020B0609030804020204" pitchFamily="49" charset="0"/>
+              </a:rPr>
+              <a:t>((A,B))</a:t>
+            </a:r>
+            <a:r>
+              <a:rPr lang="en-US" sz="1100" dirty="0">
+                <a:solidFill>
+                  <a:srgbClr val="00B050"/>
+                </a:solidFill>
+                <a:latin typeface="Menlo" panose="020B0609030804020204" pitchFamily="49" charset="0"/>
+                <a:ea typeface="Menlo" panose="020B0609030804020204" pitchFamily="49" charset="0"/>
+                <a:cs typeface="Menlo" panose="020B0609030804020204" pitchFamily="49" charset="0"/>
+              </a:rPr>
+              <a:t> # Combined</a:t>
+            </a:r>
+          </a:p>
+          <a:p>
+            <a:r>
+              <a:rPr lang="en-US" sz="1100" dirty="0" err="1">
+                <a:solidFill>
+                  <a:srgbClr val="0070C0"/>
+                </a:solidFill>
+                <a:latin typeface="Menlo" panose="020B0609030804020204" pitchFamily="49" charset="0"/>
+                <a:ea typeface="Menlo" panose="020B0609030804020204" pitchFamily="49" charset="0"/>
+                <a:cs typeface="Menlo" panose="020B0609030804020204" pitchFamily="49" charset="0"/>
+              </a:rPr>
+              <a:t>diff_AB</a:t>
+            </a:r>
+            <a:r>
+              <a:rPr lang="en-US" sz="1100" dirty="0">
+                <a:solidFill>
+                  <a:srgbClr val="0070C0"/>
+                </a:solidFill>
+                <a:latin typeface="Menlo" panose="020B0609030804020204" pitchFamily="49" charset="0"/>
+                <a:ea typeface="Menlo" panose="020B0609030804020204" pitchFamily="49" charset="0"/>
+                <a:cs typeface="Menlo" panose="020B0609030804020204" pitchFamily="49" charset="0"/>
+              </a:rPr>
+              <a:t> = </a:t>
+            </a:r>
+            <a:r>
+              <a:rPr lang="en-US" sz="1100" dirty="0" err="1">
+                <a:solidFill>
+                  <a:srgbClr val="0070C0"/>
+                </a:solidFill>
+                <a:latin typeface="Menlo" panose="020B0609030804020204" pitchFamily="49" charset="0"/>
+                <a:ea typeface="Menlo" panose="020B0609030804020204" pitchFamily="49" charset="0"/>
+                <a:cs typeface="Menlo" panose="020B0609030804020204" pitchFamily="49" charset="0"/>
+              </a:rPr>
+              <a:t>np.mean</a:t>
+            </a:r>
+            <a:r>
+              <a:rPr lang="en-US" sz="1100" dirty="0">
+                <a:solidFill>
+                  <a:srgbClr val="0070C0"/>
+                </a:solidFill>
+                <a:latin typeface="Menlo" panose="020B0609030804020204" pitchFamily="49" charset="0"/>
+                <a:ea typeface="Menlo" panose="020B0609030804020204" pitchFamily="49" charset="0"/>
+                <a:cs typeface="Menlo" panose="020B0609030804020204" pitchFamily="49" charset="0"/>
+              </a:rPr>
+              <a:t>(A) - </a:t>
+            </a:r>
+            <a:r>
+              <a:rPr lang="en-US" sz="1100" dirty="0" err="1">
+                <a:solidFill>
+                  <a:srgbClr val="0070C0"/>
+                </a:solidFill>
+                <a:latin typeface="Menlo" panose="020B0609030804020204" pitchFamily="49" charset="0"/>
+                <a:ea typeface="Menlo" panose="020B0609030804020204" pitchFamily="49" charset="0"/>
+                <a:cs typeface="Menlo" panose="020B0609030804020204" pitchFamily="49" charset="0"/>
+              </a:rPr>
+              <a:t>np.mean</a:t>
+            </a:r>
+            <a:r>
+              <a:rPr lang="en-US" sz="1100" dirty="0">
+                <a:solidFill>
+                  <a:srgbClr val="0070C0"/>
+                </a:solidFill>
+                <a:latin typeface="Menlo" panose="020B0609030804020204" pitchFamily="49" charset="0"/>
+                <a:ea typeface="Menlo" panose="020B0609030804020204" pitchFamily="49" charset="0"/>
+                <a:cs typeface="Menlo" panose="020B0609030804020204" pitchFamily="49" charset="0"/>
+              </a:rPr>
+              <a:t>(B)</a:t>
+            </a:r>
+          </a:p>
+          <a:p>
+            <a:endParaRPr lang="en-US" sz="1100" dirty="0">
+              <a:solidFill>
+                <a:srgbClr val="0070C0"/>
+              </a:solidFill>
+              <a:latin typeface="Menlo" panose="020B0609030804020204" pitchFamily="49" charset="0"/>
+              <a:ea typeface="Menlo" panose="020B0609030804020204" pitchFamily="49" charset="0"/>
+              <a:cs typeface="Menlo" panose="020B0609030804020204" pitchFamily="49" charset="0"/>
+            </a:endParaRPr>
+          </a:p>
+          <a:p>
+            <a:r>
+              <a:rPr lang="en-US" sz="1100" dirty="0" err="1">
+                <a:solidFill>
+                  <a:srgbClr val="0070C0"/>
+                </a:solidFill>
+                <a:latin typeface="Menlo" panose="020B0609030804020204" pitchFamily="49" charset="0"/>
+                <a:ea typeface="Menlo" panose="020B0609030804020204" pitchFamily="49" charset="0"/>
+                <a:cs typeface="Menlo" panose="020B0609030804020204" pitchFamily="49" charset="0"/>
+              </a:rPr>
+              <a:t>N_shuf</a:t>
+            </a:r>
+            <a:r>
+              <a:rPr lang="en-US" sz="1100" dirty="0">
+                <a:solidFill>
+                  <a:srgbClr val="0070C0"/>
+                </a:solidFill>
+                <a:latin typeface="Menlo" panose="020B0609030804020204" pitchFamily="49" charset="0"/>
+                <a:ea typeface="Menlo" panose="020B0609030804020204" pitchFamily="49" charset="0"/>
+                <a:cs typeface="Menlo" panose="020B0609030804020204" pitchFamily="49" charset="0"/>
+              </a:rPr>
+              <a:t> = 5000</a:t>
+            </a:r>
+          </a:p>
+          <a:p>
+            <a:r>
+              <a:rPr lang="en-US" sz="1100" dirty="0">
+                <a:solidFill>
+                  <a:srgbClr val="0070C0"/>
+                </a:solidFill>
+                <a:latin typeface="Menlo" panose="020B0609030804020204" pitchFamily="49" charset="0"/>
+                <a:ea typeface="Menlo" panose="020B0609030804020204" pitchFamily="49" charset="0"/>
+                <a:cs typeface="Menlo" panose="020B0609030804020204" pitchFamily="49" charset="0"/>
+              </a:rPr>
+              <a:t>counter = 1</a:t>
+            </a:r>
+          </a:p>
+          <a:p>
+            <a:r>
+              <a:rPr lang="en-US" sz="1100" dirty="0">
+                <a:solidFill>
+                  <a:srgbClr val="0070C0"/>
+                </a:solidFill>
+                <a:latin typeface="Menlo" panose="020B0609030804020204" pitchFamily="49" charset="0"/>
+                <a:ea typeface="Menlo" panose="020B0609030804020204" pitchFamily="49" charset="0"/>
+                <a:cs typeface="Menlo" panose="020B0609030804020204" pitchFamily="49" charset="0"/>
+              </a:rPr>
+              <a:t>diffs = </a:t>
+            </a:r>
+            <a:r>
+              <a:rPr lang="en-US" sz="1100" dirty="0" err="1">
+                <a:solidFill>
+                  <a:srgbClr val="0070C0"/>
+                </a:solidFill>
+                <a:latin typeface="Menlo" panose="020B0609030804020204" pitchFamily="49" charset="0"/>
+                <a:ea typeface="Menlo" panose="020B0609030804020204" pitchFamily="49" charset="0"/>
+                <a:cs typeface="Menlo" panose="020B0609030804020204" pitchFamily="49" charset="0"/>
+              </a:rPr>
+              <a:t>np.zeros</a:t>
+            </a:r>
+            <a:r>
+              <a:rPr lang="en-US" sz="1100" dirty="0">
+                <a:solidFill>
+                  <a:srgbClr val="0070C0"/>
+                </a:solidFill>
+                <a:latin typeface="Menlo" panose="020B0609030804020204" pitchFamily="49" charset="0"/>
+                <a:ea typeface="Menlo" panose="020B0609030804020204" pitchFamily="49" charset="0"/>
+                <a:cs typeface="Menlo" panose="020B0609030804020204" pitchFamily="49" charset="0"/>
+              </a:rPr>
+              <a:t>(</a:t>
+            </a:r>
+            <a:r>
+              <a:rPr lang="en-US" sz="1100" dirty="0" err="1">
+                <a:solidFill>
+                  <a:srgbClr val="0070C0"/>
+                </a:solidFill>
+                <a:latin typeface="Menlo" panose="020B0609030804020204" pitchFamily="49" charset="0"/>
+                <a:ea typeface="Menlo" panose="020B0609030804020204" pitchFamily="49" charset="0"/>
+                <a:cs typeface="Menlo" panose="020B0609030804020204" pitchFamily="49" charset="0"/>
+              </a:rPr>
+              <a:t>N_shuf</a:t>
+            </a:r>
+            <a:r>
+              <a:rPr lang="en-US" sz="1100" dirty="0">
+                <a:solidFill>
+                  <a:srgbClr val="0070C0"/>
+                </a:solidFill>
+                <a:latin typeface="Menlo" panose="020B0609030804020204" pitchFamily="49" charset="0"/>
+                <a:ea typeface="Menlo" panose="020B0609030804020204" pitchFamily="49" charset="0"/>
+                <a:cs typeface="Menlo" panose="020B0609030804020204" pitchFamily="49" charset="0"/>
+              </a:rPr>
+              <a:t>, </a:t>
+            </a:r>
+            <a:r>
+              <a:rPr lang="en-US" sz="1100" dirty="0" err="1">
+                <a:solidFill>
+                  <a:srgbClr val="0070C0"/>
+                </a:solidFill>
+                <a:latin typeface="Menlo" panose="020B0609030804020204" pitchFamily="49" charset="0"/>
+                <a:ea typeface="Menlo" panose="020B0609030804020204" pitchFamily="49" charset="0"/>
+                <a:cs typeface="Menlo" panose="020B0609030804020204" pitchFamily="49" charset="0"/>
+              </a:rPr>
+              <a:t>dtype</a:t>
+            </a:r>
+            <a:r>
+              <a:rPr lang="en-US" sz="1100" dirty="0">
+                <a:solidFill>
+                  <a:srgbClr val="0070C0"/>
+                </a:solidFill>
+                <a:latin typeface="Menlo" panose="020B0609030804020204" pitchFamily="49" charset="0"/>
+                <a:ea typeface="Menlo" panose="020B0609030804020204" pitchFamily="49" charset="0"/>
+                <a:cs typeface="Menlo" panose="020B0609030804020204" pitchFamily="49" charset="0"/>
+              </a:rPr>
+              <a:t>=float)</a:t>
+            </a:r>
+          </a:p>
+          <a:p>
+            <a:r>
+              <a:rPr lang="en-US" sz="1100" dirty="0" err="1">
+                <a:solidFill>
+                  <a:srgbClr val="0070C0"/>
+                </a:solidFill>
+                <a:latin typeface="Menlo" panose="020B0609030804020204" pitchFamily="49" charset="0"/>
+                <a:ea typeface="Menlo" panose="020B0609030804020204" pitchFamily="49" charset="0"/>
+                <a:cs typeface="Menlo" panose="020B0609030804020204" pitchFamily="49" charset="0"/>
+              </a:rPr>
+              <a:t>rng</a:t>
+            </a:r>
+            <a:r>
+              <a:rPr lang="en-US" sz="1100" dirty="0">
+                <a:solidFill>
+                  <a:srgbClr val="0070C0"/>
+                </a:solidFill>
+                <a:latin typeface="Menlo" panose="020B0609030804020204" pitchFamily="49" charset="0"/>
+                <a:ea typeface="Menlo" panose="020B0609030804020204" pitchFamily="49" charset="0"/>
+                <a:cs typeface="Menlo" panose="020B0609030804020204" pitchFamily="49" charset="0"/>
+              </a:rPr>
+              <a:t> = </a:t>
+            </a:r>
+            <a:r>
+              <a:rPr lang="en-US" sz="1100" dirty="0" err="1">
+                <a:solidFill>
+                  <a:srgbClr val="0070C0"/>
+                </a:solidFill>
+                <a:latin typeface="Menlo" panose="020B0609030804020204" pitchFamily="49" charset="0"/>
+                <a:ea typeface="Menlo" panose="020B0609030804020204" pitchFamily="49" charset="0"/>
+                <a:cs typeface="Menlo" panose="020B0609030804020204" pitchFamily="49" charset="0"/>
+              </a:rPr>
+              <a:t>np.random.default_rng</a:t>
+            </a:r>
+            <a:r>
+              <a:rPr lang="en-US" sz="1100" dirty="0">
+                <a:solidFill>
+                  <a:srgbClr val="0070C0"/>
+                </a:solidFill>
+                <a:latin typeface="Menlo" panose="020B0609030804020204" pitchFamily="49" charset="0"/>
+                <a:ea typeface="Menlo" panose="020B0609030804020204" pitchFamily="49" charset="0"/>
+                <a:cs typeface="Menlo" panose="020B0609030804020204" pitchFamily="49" charset="0"/>
+              </a:rPr>
+              <a:t>()</a:t>
+            </a:r>
+          </a:p>
+          <a:p>
+            <a:r>
+              <a:rPr lang="en-US" sz="1100" dirty="0">
+                <a:solidFill>
+                  <a:srgbClr val="0070C0"/>
+                </a:solidFill>
+                <a:latin typeface="Menlo" panose="020B0609030804020204" pitchFamily="49" charset="0"/>
+                <a:ea typeface="Menlo" panose="020B0609030804020204" pitchFamily="49" charset="0"/>
+                <a:cs typeface="Menlo" panose="020B0609030804020204" pitchFamily="49" charset="0"/>
+              </a:rPr>
+              <a:t>for ii in range(</a:t>
+            </a:r>
+            <a:r>
+              <a:rPr lang="en-US" sz="1100" dirty="0" err="1">
+                <a:solidFill>
+                  <a:srgbClr val="0070C0"/>
+                </a:solidFill>
+                <a:latin typeface="Menlo" panose="020B0609030804020204" pitchFamily="49" charset="0"/>
+                <a:ea typeface="Menlo" panose="020B0609030804020204" pitchFamily="49" charset="0"/>
+                <a:cs typeface="Menlo" panose="020B0609030804020204" pitchFamily="49" charset="0"/>
+              </a:rPr>
+              <a:t>N_shuf</a:t>
+            </a:r>
+            <a:r>
+              <a:rPr lang="en-US" sz="1100" dirty="0">
+                <a:solidFill>
+                  <a:srgbClr val="0070C0"/>
+                </a:solidFill>
+                <a:latin typeface="Menlo" panose="020B0609030804020204" pitchFamily="49" charset="0"/>
+                <a:ea typeface="Menlo" panose="020B0609030804020204" pitchFamily="49" charset="0"/>
+                <a:cs typeface="Menlo" panose="020B0609030804020204" pitchFamily="49" charset="0"/>
+              </a:rPr>
+              <a:t>):</a:t>
+            </a:r>
+          </a:p>
+          <a:p>
+            <a:r>
+              <a:rPr lang="en-US" sz="1100" dirty="0">
+                <a:solidFill>
+                  <a:srgbClr val="0070C0"/>
+                </a:solidFill>
+                <a:latin typeface="Menlo" panose="020B0609030804020204" pitchFamily="49" charset="0"/>
+                <a:ea typeface="Menlo" panose="020B0609030804020204" pitchFamily="49" charset="0"/>
+                <a:cs typeface="Menlo" panose="020B0609030804020204" pitchFamily="49" charset="0"/>
+              </a:rPr>
+              <a:t>    </a:t>
+            </a:r>
+            <a:r>
+              <a:rPr lang="en-US" sz="1100" dirty="0" err="1">
+                <a:solidFill>
+                  <a:srgbClr val="0070C0"/>
+                </a:solidFill>
+                <a:latin typeface="Menlo" panose="020B0609030804020204" pitchFamily="49" charset="0"/>
+                <a:ea typeface="Menlo" panose="020B0609030804020204" pitchFamily="49" charset="0"/>
+                <a:cs typeface="Menlo" panose="020B0609030804020204" pitchFamily="49" charset="0"/>
+              </a:rPr>
+              <a:t>rng.shuffle</a:t>
+            </a:r>
+            <a:r>
+              <a:rPr lang="en-US" sz="1100" dirty="0">
+                <a:solidFill>
+                  <a:srgbClr val="0070C0"/>
+                </a:solidFill>
+                <a:latin typeface="Menlo" panose="020B0609030804020204" pitchFamily="49" charset="0"/>
+                <a:ea typeface="Menlo" panose="020B0609030804020204" pitchFamily="49" charset="0"/>
+                <a:cs typeface="Menlo" panose="020B0609030804020204" pitchFamily="49" charset="0"/>
+              </a:rPr>
+              <a:t>(C, axis = 0)</a:t>
+            </a:r>
+          </a:p>
+          <a:p>
+            <a:r>
+              <a:rPr lang="en-US" sz="1100" dirty="0">
+                <a:solidFill>
+                  <a:srgbClr val="0070C0"/>
+                </a:solidFill>
+                <a:latin typeface="Menlo" panose="020B0609030804020204" pitchFamily="49" charset="0"/>
+                <a:ea typeface="Menlo" panose="020B0609030804020204" pitchFamily="49" charset="0"/>
+                <a:cs typeface="Menlo" panose="020B0609030804020204" pitchFamily="49" charset="0"/>
+              </a:rPr>
+              <a:t>    split1 = C[:N]</a:t>
+            </a:r>
+          </a:p>
+          <a:p>
+            <a:r>
+              <a:rPr lang="en-US" sz="1100" dirty="0">
+                <a:solidFill>
+                  <a:srgbClr val="0070C0"/>
+                </a:solidFill>
+                <a:latin typeface="Menlo" panose="020B0609030804020204" pitchFamily="49" charset="0"/>
+                <a:ea typeface="Menlo" panose="020B0609030804020204" pitchFamily="49" charset="0"/>
+                <a:cs typeface="Menlo" panose="020B0609030804020204" pitchFamily="49" charset="0"/>
+              </a:rPr>
+              <a:t>    split2 = C[N:]</a:t>
+            </a:r>
+          </a:p>
+          <a:p>
+            <a:r>
+              <a:rPr lang="en-US" sz="1100" dirty="0">
+                <a:solidFill>
+                  <a:srgbClr val="0070C0"/>
+                </a:solidFill>
+                <a:latin typeface="Menlo" panose="020B0609030804020204" pitchFamily="49" charset="0"/>
+                <a:ea typeface="Menlo" panose="020B0609030804020204" pitchFamily="49" charset="0"/>
+                <a:cs typeface="Menlo" panose="020B0609030804020204" pitchFamily="49" charset="0"/>
+              </a:rPr>
+              <a:t>    diffs[ii] = </a:t>
+            </a:r>
+            <a:r>
+              <a:rPr lang="en-US" sz="1100" dirty="0" err="1">
+                <a:solidFill>
+                  <a:srgbClr val="0070C0"/>
+                </a:solidFill>
+                <a:latin typeface="Menlo" panose="020B0609030804020204" pitchFamily="49" charset="0"/>
+                <a:ea typeface="Menlo" panose="020B0609030804020204" pitchFamily="49" charset="0"/>
+                <a:cs typeface="Menlo" panose="020B0609030804020204" pitchFamily="49" charset="0"/>
+              </a:rPr>
+              <a:t>np.mean</a:t>
+            </a:r>
+            <a:r>
+              <a:rPr lang="en-US" sz="1100" dirty="0">
+                <a:solidFill>
+                  <a:srgbClr val="0070C0"/>
+                </a:solidFill>
+                <a:latin typeface="Menlo" panose="020B0609030804020204" pitchFamily="49" charset="0"/>
+                <a:ea typeface="Menlo" panose="020B0609030804020204" pitchFamily="49" charset="0"/>
+                <a:cs typeface="Menlo" panose="020B0609030804020204" pitchFamily="49" charset="0"/>
+              </a:rPr>
+              <a:t>(split2) - </a:t>
+            </a:r>
+            <a:r>
+              <a:rPr lang="en-US" sz="1100" dirty="0" err="1">
+                <a:solidFill>
+                  <a:srgbClr val="0070C0"/>
+                </a:solidFill>
+                <a:latin typeface="Menlo" panose="020B0609030804020204" pitchFamily="49" charset="0"/>
+                <a:ea typeface="Menlo" panose="020B0609030804020204" pitchFamily="49" charset="0"/>
+                <a:cs typeface="Menlo" panose="020B0609030804020204" pitchFamily="49" charset="0"/>
+              </a:rPr>
+              <a:t>np.mean</a:t>
+            </a:r>
+            <a:r>
+              <a:rPr lang="en-US" sz="1100" dirty="0">
+                <a:solidFill>
+                  <a:srgbClr val="0070C0"/>
+                </a:solidFill>
+                <a:latin typeface="Menlo" panose="020B0609030804020204" pitchFamily="49" charset="0"/>
+                <a:ea typeface="Menlo" panose="020B0609030804020204" pitchFamily="49" charset="0"/>
+                <a:cs typeface="Menlo" panose="020B0609030804020204" pitchFamily="49" charset="0"/>
+              </a:rPr>
+              <a:t>(split1)</a:t>
+            </a:r>
+          </a:p>
+          <a:p>
+            <a:r>
+              <a:rPr lang="en-US" sz="1100" dirty="0">
+                <a:solidFill>
+                  <a:srgbClr val="0070C0"/>
+                </a:solidFill>
+                <a:latin typeface="Menlo" panose="020B0609030804020204" pitchFamily="49" charset="0"/>
+                <a:ea typeface="Menlo" panose="020B0609030804020204" pitchFamily="49" charset="0"/>
+                <a:cs typeface="Menlo" panose="020B0609030804020204" pitchFamily="49" charset="0"/>
+              </a:rPr>
+              <a:t>    if diffs[ii] &lt;= </a:t>
+            </a:r>
+            <a:r>
+              <a:rPr lang="en-US" sz="1100" dirty="0" err="1">
+                <a:solidFill>
+                  <a:srgbClr val="0070C0"/>
+                </a:solidFill>
+                <a:latin typeface="Menlo" panose="020B0609030804020204" pitchFamily="49" charset="0"/>
+                <a:ea typeface="Menlo" panose="020B0609030804020204" pitchFamily="49" charset="0"/>
+                <a:cs typeface="Menlo" panose="020B0609030804020204" pitchFamily="49" charset="0"/>
+              </a:rPr>
+              <a:t>diff_AB</a:t>
+            </a:r>
+            <a:r>
+              <a:rPr lang="en-US" sz="1100" dirty="0">
+                <a:solidFill>
+                  <a:srgbClr val="0070C0"/>
+                </a:solidFill>
+                <a:latin typeface="Menlo" panose="020B0609030804020204" pitchFamily="49" charset="0"/>
+                <a:ea typeface="Menlo" panose="020B0609030804020204" pitchFamily="49" charset="0"/>
+                <a:cs typeface="Menlo" panose="020B0609030804020204" pitchFamily="49" charset="0"/>
+              </a:rPr>
+              <a:t>:</a:t>
+            </a:r>
+          </a:p>
+          <a:p>
+            <a:r>
+              <a:rPr lang="en-US" sz="1100" dirty="0">
+                <a:solidFill>
+                  <a:srgbClr val="0070C0"/>
+                </a:solidFill>
+                <a:latin typeface="Menlo" panose="020B0609030804020204" pitchFamily="49" charset="0"/>
+                <a:ea typeface="Menlo" panose="020B0609030804020204" pitchFamily="49" charset="0"/>
+                <a:cs typeface="Menlo" panose="020B0609030804020204" pitchFamily="49" charset="0"/>
+              </a:rPr>
+              <a:t>        counter += 1</a:t>
+            </a:r>
+          </a:p>
+          <a:p>
+            <a:endParaRPr lang="en-US" sz="1100" dirty="0">
+              <a:solidFill>
+                <a:srgbClr val="0070C0"/>
+              </a:solidFill>
+              <a:latin typeface="Menlo" panose="020B0609030804020204" pitchFamily="49" charset="0"/>
+              <a:ea typeface="Menlo" panose="020B0609030804020204" pitchFamily="49" charset="0"/>
+              <a:cs typeface="Menlo" panose="020B0609030804020204" pitchFamily="49" charset="0"/>
+            </a:endParaRPr>
+          </a:p>
+          <a:p>
+            <a:r>
+              <a:rPr lang="en-US" sz="1100" dirty="0" err="1">
+                <a:solidFill>
+                  <a:srgbClr val="0070C0"/>
+                </a:solidFill>
+                <a:latin typeface="Menlo" panose="020B0609030804020204" pitchFamily="49" charset="0"/>
+                <a:ea typeface="Menlo" panose="020B0609030804020204" pitchFamily="49" charset="0"/>
+                <a:cs typeface="Menlo" panose="020B0609030804020204" pitchFamily="49" charset="0"/>
+              </a:rPr>
+              <a:t>diffs_mean</a:t>
+            </a:r>
+            <a:r>
+              <a:rPr lang="en-US" sz="1100" dirty="0">
+                <a:solidFill>
+                  <a:srgbClr val="0070C0"/>
+                </a:solidFill>
+                <a:latin typeface="Menlo" panose="020B0609030804020204" pitchFamily="49" charset="0"/>
+                <a:ea typeface="Menlo" panose="020B0609030804020204" pitchFamily="49" charset="0"/>
+                <a:cs typeface="Menlo" panose="020B0609030804020204" pitchFamily="49" charset="0"/>
+              </a:rPr>
+              <a:t> = </a:t>
+            </a:r>
+            <a:r>
+              <a:rPr lang="en-US" sz="1100" dirty="0" err="1">
+                <a:solidFill>
+                  <a:srgbClr val="0070C0"/>
+                </a:solidFill>
+                <a:latin typeface="Menlo" panose="020B0609030804020204" pitchFamily="49" charset="0"/>
+                <a:ea typeface="Menlo" panose="020B0609030804020204" pitchFamily="49" charset="0"/>
+                <a:cs typeface="Menlo" panose="020B0609030804020204" pitchFamily="49" charset="0"/>
+              </a:rPr>
+              <a:t>np.mean</a:t>
+            </a:r>
+            <a:r>
+              <a:rPr lang="en-US" sz="1100" dirty="0">
+                <a:solidFill>
+                  <a:srgbClr val="0070C0"/>
+                </a:solidFill>
+                <a:latin typeface="Menlo" panose="020B0609030804020204" pitchFamily="49" charset="0"/>
+                <a:ea typeface="Menlo" panose="020B0609030804020204" pitchFamily="49" charset="0"/>
+                <a:cs typeface="Menlo" panose="020B0609030804020204" pitchFamily="49" charset="0"/>
+              </a:rPr>
+              <a:t>(diffs)   </a:t>
+            </a:r>
+          </a:p>
+          <a:p>
+            <a:r>
+              <a:rPr lang="en-US" sz="1100" dirty="0" err="1">
+                <a:solidFill>
+                  <a:srgbClr val="0070C0"/>
+                </a:solidFill>
+                <a:latin typeface="Menlo" panose="020B0609030804020204" pitchFamily="49" charset="0"/>
+                <a:ea typeface="Menlo" panose="020B0609030804020204" pitchFamily="49" charset="0"/>
+                <a:cs typeface="Menlo" panose="020B0609030804020204" pitchFamily="49" charset="0"/>
+              </a:rPr>
+              <a:t>diffs_std</a:t>
+            </a:r>
+            <a:r>
+              <a:rPr lang="en-US" sz="1100" dirty="0">
+                <a:solidFill>
+                  <a:srgbClr val="0070C0"/>
+                </a:solidFill>
+                <a:latin typeface="Menlo" panose="020B0609030804020204" pitchFamily="49" charset="0"/>
+                <a:ea typeface="Menlo" panose="020B0609030804020204" pitchFamily="49" charset="0"/>
+                <a:cs typeface="Menlo" panose="020B0609030804020204" pitchFamily="49" charset="0"/>
+              </a:rPr>
+              <a:t>  = </a:t>
+            </a:r>
+            <a:r>
+              <a:rPr lang="en-US" sz="1100" dirty="0" err="1">
+                <a:solidFill>
+                  <a:srgbClr val="0070C0"/>
+                </a:solidFill>
+                <a:latin typeface="Menlo" panose="020B0609030804020204" pitchFamily="49" charset="0"/>
+                <a:ea typeface="Menlo" panose="020B0609030804020204" pitchFamily="49" charset="0"/>
+                <a:cs typeface="Menlo" panose="020B0609030804020204" pitchFamily="49" charset="0"/>
+              </a:rPr>
+              <a:t>np.std</a:t>
+            </a:r>
+            <a:r>
+              <a:rPr lang="en-US" sz="1100" dirty="0">
+                <a:solidFill>
+                  <a:srgbClr val="0070C0"/>
+                </a:solidFill>
+                <a:latin typeface="Menlo" panose="020B0609030804020204" pitchFamily="49" charset="0"/>
+                <a:ea typeface="Menlo" panose="020B0609030804020204" pitchFamily="49" charset="0"/>
+                <a:cs typeface="Menlo" panose="020B0609030804020204" pitchFamily="49" charset="0"/>
+              </a:rPr>
+              <a:t>(diffs)</a:t>
+            </a:r>
+          </a:p>
+          <a:p>
+            <a:r>
+              <a:rPr lang="en-US" sz="1100" dirty="0">
+                <a:solidFill>
+                  <a:srgbClr val="0070C0"/>
+                </a:solidFill>
+                <a:latin typeface="Menlo" panose="020B0609030804020204" pitchFamily="49" charset="0"/>
+                <a:ea typeface="Menlo" panose="020B0609030804020204" pitchFamily="49" charset="0"/>
+                <a:cs typeface="Menlo" panose="020B0609030804020204" pitchFamily="49" charset="0"/>
+              </a:rPr>
+              <a:t>print(</a:t>
+            </a:r>
+            <a:r>
+              <a:rPr lang="en-US" sz="1100" dirty="0" err="1">
+                <a:solidFill>
+                  <a:srgbClr val="0070C0"/>
+                </a:solidFill>
+                <a:latin typeface="Menlo" panose="020B0609030804020204" pitchFamily="49" charset="0"/>
+                <a:ea typeface="Menlo" panose="020B0609030804020204" pitchFamily="49" charset="0"/>
+                <a:cs typeface="Menlo" panose="020B0609030804020204" pitchFamily="49" charset="0"/>
+              </a:rPr>
+              <a:t>f"diff_AB</a:t>
+            </a:r>
+            <a:r>
+              <a:rPr lang="en-US" sz="1100" dirty="0">
+                <a:solidFill>
+                  <a:srgbClr val="0070C0"/>
+                </a:solidFill>
+                <a:latin typeface="Menlo" panose="020B0609030804020204" pitchFamily="49" charset="0"/>
+                <a:ea typeface="Menlo" panose="020B0609030804020204" pitchFamily="49" charset="0"/>
+                <a:cs typeface="Menlo" panose="020B0609030804020204" pitchFamily="49" charset="0"/>
+              </a:rPr>
+              <a:t>    = {diff_AB:.5f}")   </a:t>
+            </a:r>
+            <a:r>
+              <a:rPr lang="en-US" sz="1100" dirty="0">
+                <a:solidFill>
+                  <a:srgbClr val="00B050"/>
+                </a:solidFill>
+                <a:latin typeface="Menlo" panose="020B0609030804020204" pitchFamily="49" charset="0"/>
+                <a:ea typeface="Menlo" panose="020B0609030804020204" pitchFamily="49" charset="0"/>
+                <a:cs typeface="Menlo" panose="020B0609030804020204" pitchFamily="49" charset="0"/>
+              </a:rPr>
+              <a:t>  # 0.4</a:t>
+            </a:r>
+          </a:p>
+          <a:p>
+            <a:r>
+              <a:rPr lang="en-US" sz="1100" dirty="0">
+                <a:solidFill>
+                  <a:srgbClr val="0070C0"/>
+                </a:solidFill>
+                <a:latin typeface="Menlo" panose="020B0609030804020204" pitchFamily="49" charset="0"/>
+                <a:ea typeface="Menlo" panose="020B0609030804020204" pitchFamily="49" charset="0"/>
+                <a:cs typeface="Menlo" panose="020B0609030804020204" pitchFamily="49" charset="0"/>
+              </a:rPr>
+              <a:t>print(</a:t>
+            </a:r>
+            <a:r>
+              <a:rPr lang="en-US" sz="1100" dirty="0" err="1">
+                <a:solidFill>
+                  <a:srgbClr val="0070C0"/>
+                </a:solidFill>
+                <a:latin typeface="Menlo" panose="020B0609030804020204" pitchFamily="49" charset="0"/>
+                <a:ea typeface="Menlo" panose="020B0609030804020204" pitchFamily="49" charset="0"/>
+                <a:cs typeface="Menlo" panose="020B0609030804020204" pitchFamily="49" charset="0"/>
+              </a:rPr>
+              <a:t>f"diffs</a:t>
+            </a:r>
+            <a:r>
+              <a:rPr lang="en-US" sz="1100" dirty="0">
+                <a:solidFill>
+                  <a:srgbClr val="0070C0"/>
+                </a:solidFill>
+                <a:latin typeface="Menlo" panose="020B0609030804020204" pitchFamily="49" charset="0"/>
+                <a:ea typeface="Menlo" panose="020B0609030804020204" pitchFamily="49" charset="0"/>
+                <a:cs typeface="Menlo" panose="020B0609030804020204" pitchFamily="49" charset="0"/>
+              </a:rPr>
+              <a:t> mean = {diffs_mean:.5f}")</a:t>
+            </a:r>
+            <a:r>
+              <a:rPr lang="en-US" sz="1100" dirty="0">
+                <a:solidFill>
+                  <a:srgbClr val="00B050"/>
+                </a:solidFill>
+                <a:latin typeface="Menlo" panose="020B0609030804020204" pitchFamily="49" charset="0"/>
+                <a:ea typeface="Menlo" panose="020B0609030804020204" pitchFamily="49" charset="0"/>
+                <a:cs typeface="Menlo" panose="020B0609030804020204" pitchFamily="49" charset="0"/>
+              </a:rPr>
+              <a:t>  # 0</a:t>
+            </a:r>
+          </a:p>
+          <a:p>
+            <a:r>
+              <a:rPr lang="en-US" sz="1100" dirty="0">
+                <a:solidFill>
+                  <a:srgbClr val="0070C0"/>
+                </a:solidFill>
+                <a:latin typeface="Menlo" panose="020B0609030804020204" pitchFamily="49" charset="0"/>
+                <a:ea typeface="Menlo" panose="020B0609030804020204" pitchFamily="49" charset="0"/>
+                <a:cs typeface="Menlo" panose="020B0609030804020204" pitchFamily="49" charset="0"/>
+              </a:rPr>
+              <a:t>print(</a:t>
+            </a:r>
+            <a:r>
+              <a:rPr lang="en-US" sz="1100" dirty="0" err="1">
+                <a:solidFill>
+                  <a:srgbClr val="0070C0"/>
+                </a:solidFill>
+                <a:latin typeface="Menlo" panose="020B0609030804020204" pitchFamily="49" charset="0"/>
+                <a:ea typeface="Menlo" panose="020B0609030804020204" pitchFamily="49" charset="0"/>
+                <a:cs typeface="Menlo" panose="020B0609030804020204" pitchFamily="49" charset="0"/>
+              </a:rPr>
+              <a:t>f"diffs</a:t>
+            </a:r>
+            <a:r>
+              <a:rPr lang="en-US" sz="1100" dirty="0">
+                <a:solidFill>
+                  <a:srgbClr val="0070C0"/>
+                </a:solidFill>
+                <a:latin typeface="Menlo" panose="020B0609030804020204" pitchFamily="49" charset="0"/>
+                <a:ea typeface="Menlo" panose="020B0609030804020204" pitchFamily="49" charset="0"/>
+                <a:cs typeface="Menlo" panose="020B0609030804020204" pitchFamily="49" charset="0"/>
+              </a:rPr>
+              <a:t> std  = {diffs_std:.5f}") </a:t>
+            </a:r>
+            <a:r>
+              <a:rPr lang="en-US" sz="1100" dirty="0">
+                <a:solidFill>
+                  <a:srgbClr val="00B050"/>
+                </a:solidFill>
+                <a:latin typeface="Menlo" panose="020B0609030804020204" pitchFamily="49" charset="0"/>
+                <a:ea typeface="Menlo" panose="020B0609030804020204" pitchFamily="49" charset="0"/>
+                <a:cs typeface="Menlo" panose="020B0609030804020204" pitchFamily="49" charset="0"/>
+              </a:rPr>
+              <a:t>  # 0.03</a:t>
+            </a:r>
+          </a:p>
+          <a:p>
+            <a:r>
+              <a:rPr lang="en-US" sz="1100" dirty="0">
+                <a:solidFill>
+                  <a:srgbClr val="0070C0"/>
+                </a:solidFill>
+                <a:latin typeface="Menlo" panose="020B0609030804020204" pitchFamily="49" charset="0"/>
+                <a:ea typeface="Menlo" panose="020B0609030804020204" pitchFamily="49" charset="0"/>
+                <a:cs typeface="Menlo" panose="020B0609030804020204" pitchFamily="49" charset="0"/>
+              </a:rPr>
+              <a:t>print(</a:t>
+            </a:r>
+            <a:r>
+              <a:rPr lang="en-US" sz="1100" dirty="0" err="1">
+                <a:solidFill>
+                  <a:srgbClr val="0070C0"/>
+                </a:solidFill>
+                <a:latin typeface="Menlo" panose="020B0609030804020204" pitchFamily="49" charset="0"/>
+                <a:ea typeface="Menlo" panose="020B0609030804020204" pitchFamily="49" charset="0"/>
+                <a:cs typeface="Menlo" panose="020B0609030804020204" pitchFamily="49" charset="0"/>
+              </a:rPr>
+              <a:t>f"P</a:t>
+            </a:r>
+            <a:r>
+              <a:rPr lang="en-US" sz="1100" dirty="0">
+                <a:solidFill>
+                  <a:srgbClr val="0070C0"/>
+                </a:solidFill>
+                <a:latin typeface="Menlo" panose="020B0609030804020204" pitchFamily="49" charset="0"/>
+                <a:ea typeface="Menlo" panose="020B0609030804020204" pitchFamily="49" charset="0"/>
+                <a:cs typeface="Menlo" panose="020B0609030804020204" pitchFamily="49" charset="0"/>
+              </a:rPr>
+              <a:t>-value    = {counter/</a:t>
+            </a:r>
+            <a:r>
+              <a:rPr lang="en-US" sz="1100" dirty="0" err="1">
+                <a:solidFill>
+                  <a:srgbClr val="0070C0"/>
+                </a:solidFill>
+                <a:latin typeface="Menlo" panose="020B0609030804020204" pitchFamily="49" charset="0"/>
+                <a:ea typeface="Menlo" panose="020B0609030804020204" pitchFamily="49" charset="0"/>
+                <a:cs typeface="Menlo" panose="020B0609030804020204" pitchFamily="49" charset="0"/>
+              </a:rPr>
+              <a:t>N_shuf</a:t>
+            </a:r>
+            <a:r>
+              <a:rPr lang="en-US" sz="1100" dirty="0">
+                <a:solidFill>
+                  <a:srgbClr val="0070C0"/>
+                </a:solidFill>
+                <a:latin typeface="Menlo" panose="020B0609030804020204" pitchFamily="49" charset="0"/>
+                <a:ea typeface="Menlo" panose="020B0609030804020204" pitchFamily="49" charset="0"/>
+                <a:cs typeface="Menlo" panose="020B0609030804020204" pitchFamily="49" charset="0"/>
+              </a:rPr>
+              <a:t>}") </a:t>
+            </a:r>
+            <a:r>
+              <a:rPr lang="en-US" sz="1100" dirty="0">
+                <a:solidFill>
+                  <a:srgbClr val="00B050"/>
+                </a:solidFill>
+                <a:latin typeface="Menlo" panose="020B0609030804020204" pitchFamily="49" charset="0"/>
+                <a:ea typeface="Menlo" panose="020B0609030804020204" pitchFamily="49" charset="0"/>
+                <a:cs typeface="Menlo" panose="020B0609030804020204" pitchFamily="49" charset="0"/>
+              </a:rPr>
+              <a:t> # 0.0002</a:t>
+            </a:r>
+          </a:p>
+          <a:p>
+            <a:endParaRPr lang="en-US" sz="1100" dirty="0">
+              <a:solidFill>
+                <a:srgbClr val="0070C0"/>
+              </a:solidFill>
+              <a:latin typeface="Menlo" panose="020B0609030804020204" pitchFamily="49" charset="0"/>
+              <a:ea typeface="Menlo" panose="020B0609030804020204" pitchFamily="49" charset="0"/>
+              <a:cs typeface="Menlo" panose="020B0609030804020204" pitchFamily="49" charset="0"/>
+            </a:endParaRPr>
+          </a:p>
+          <a:p>
+            <a:r>
+              <a:rPr lang="en-US" sz="1100" dirty="0" err="1">
+                <a:solidFill>
+                  <a:srgbClr val="0070C0"/>
+                </a:solidFill>
+                <a:latin typeface="Menlo" panose="020B0609030804020204" pitchFamily="49" charset="0"/>
+                <a:ea typeface="Menlo" panose="020B0609030804020204" pitchFamily="49" charset="0"/>
+                <a:cs typeface="Menlo" panose="020B0609030804020204" pitchFamily="49" charset="0"/>
+              </a:rPr>
+              <a:t>plt.rcParams</a:t>
+            </a:r>
+            <a:r>
+              <a:rPr lang="en-US" sz="1100" dirty="0">
+                <a:solidFill>
+                  <a:srgbClr val="0070C0"/>
+                </a:solidFill>
+                <a:latin typeface="Menlo" panose="020B0609030804020204" pitchFamily="49" charset="0"/>
+                <a:ea typeface="Menlo" panose="020B0609030804020204" pitchFamily="49" charset="0"/>
+                <a:cs typeface="Menlo" panose="020B0609030804020204" pitchFamily="49" charset="0"/>
+              </a:rPr>
+              <a:t>["</a:t>
+            </a:r>
+            <a:r>
+              <a:rPr lang="en-US" sz="1100" dirty="0" err="1">
+                <a:solidFill>
+                  <a:srgbClr val="0070C0"/>
+                </a:solidFill>
+                <a:latin typeface="Menlo" panose="020B0609030804020204" pitchFamily="49" charset="0"/>
+                <a:ea typeface="Menlo" panose="020B0609030804020204" pitchFamily="49" charset="0"/>
+                <a:cs typeface="Menlo" panose="020B0609030804020204" pitchFamily="49" charset="0"/>
+              </a:rPr>
+              <a:t>figure.figsize</a:t>
+            </a:r>
+            <a:r>
+              <a:rPr lang="en-US" sz="1100" dirty="0">
+                <a:solidFill>
+                  <a:srgbClr val="0070C0"/>
+                </a:solidFill>
+                <a:latin typeface="Menlo" panose="020B0609030804020204" pitchFamily="49" charset="0"/>
+                <a:ea typeface="Menlo" panose="020B0609030804020204" pitchFamily="49" charset="0"/>
+                <a:cs typeface="Menlo" panose="020B0609030804020204" pitchFamily="49" charset="0"/>
+              </a:rPr>
+              <a:t>"] = (8, 4) </a:t>
+            </a:r>
+            <a:r>
+              <a:rPr lang="en-US" sz="1100" dirty="0">
+                <a:solidFill>
+                  <a:srgbClr val="00B050"/>
+                </a:solidFill>
+                <a:latin typeface="Menlo" panose="020B0609030804020204" pitchFamily="49" charset="0"/>
+                <a:ea typeface="Menlo" panose="020B0609030804020204" pitchFamily="49" charset="0"/>
+                <a:cs typeface="Menlo" panose="020B0609030804020204" pitchFamily="49" charset="0"/>
+              </a:rPr>
+              <a:t># (width, height)</a:t>
+            </a:r>
+          </a:p>
+          <a:p>
+            <a:r>
+              <a:rPr lang="en-US" sz="1100" dirty="0">
+                <a:solidFill>
+                  <a:srgbClr val="0070C0"/>
+                </a:solidFill>
+                <a:latin typeface="Menlo" panose="020B0609030804020204" pitchFamily="49" charset="0"/>
+                <a:ea typeface="Menlo" panose="020B0609030804020204" pitchFamily="49" charset="0"/>
+                <a:cs typeface="Menlo" panose="020B0609030804020204" pitchFamily="49" charset="0"/>
+              </a:rPr>
+              <a:t>fig, ax = </a:t>
+            </a:r>
+            <a:r>
+              <a:rPr lang="en-US" sz="1100" dirty="0" err="1">
+                <a:solidFill>
+                  <a:srgbClr val="0070C0"/>
+                </a:solidFill>
+                <a:latin typeface="Menlo" panose="020B0609030804020204" pitchFamily="49" charset="0"/>
+                <a:ea typeface="Menlo" panose="020B0609030804020204" pitchFamily="49" charset="0"/>
+                <a:cs typeface="Menlo" panose="020B0609030804020204" pitchFamily="49" charset="0"/>
+              </a:rPr>
+              <a:t>plt.subplots</a:t>
+            </a:r>
+            <a:r>
+              <a:rPr lang="en-US" sz="1100" dirty="0">
+                <a:solidFill>
+                  <a:srgbClr val="0070C0"/>
+                </a:solidFill>
+                <a:latin typeface="Menlo" panose="020B0609030804020204" pitchFamily="49" charset="0"/>
+                <a:ea typeface="Menlo" panose="020B0609030804020204" pitchFamily="49" charset="0"/>
+                <a:cs typeface="Menlo" panose="020B0609030804020204" pitchFamily="49" charset="0"/>
+              </a:rPr>
+              <a:t>(</a:t>
+            </a:r>
+            <a:r>
+              <a:rPr lang="en-US" sz="1100" dirty="0" err="1">
+                <a:solidFill>
+                  <a:srgbClr val="0070C0"/>
+                </a:solidFill>
+                <a:latin typeface="Menlo" panose="020B0609030804020204" pitchFamily="49" charset="0"/>
+                <a:ea typeface="Menlo" panose="020B0609030804020204" pitchFamily="49" charset="0"/>
+                <a:cs typeface="Menlo" panose="020B0609030804020204" pitchFamily="49" charset="0"/>
+              </a:rPr>
+              <a:t>nrows</a:t>
+            </a:r>
+            <a:r>
+              <a:rPr lang="en-US" sz="1100" dirty="0">
+                <a:solidFill>
+                  <a:srgbClr val="0070C0"/>
+                </a:solidFill>
+                <a:latin typeface="Menlo" panose="020B0609030804020204" pitchFamily="49" charset="0"/>
+                <a:ea typeface="Menlo" panose="020B0609030804020204" pitchFamily="49" charset="0"/>
+                <a:cs typeface="Menlo" panose="020B0609030804020204" pitchFamily="49" charset="0"/>
+              </a:rPr>
+              <a:t>=1, </a:t>
+            </a:r>
+            <a:r>
+              <a:rPr lang="en-US" sz="1100" dirty="0" err="1">
+                <a:solidFill>
+                  <a:srgbClr val="0070C0"/>
+                </a:solidFill>
+                <a:latin typeface="Menlo" panose="020B0609030804020204" pitchFamily="49" charset="0"/>
+                <a:ea typeface="Menlo" panose="020B0609030804020204" pitchFamily="49" charset="0"/>
+                <a:cs typeface="Menlo" panose="020B0609030804020204" pitchFamily="49" charset="0"/>
+              </a:rPr>
+              <a:t>ncols</a:t>
+            </a:r>
+            <a:r>
+              <a:rPr lang="en-US" sz="1100" dirty="0">
+                <a:solidFill>
+                  <a:srgbClr val="0070C0"/>
+                </a:solidFill>
+                <a:latin typeface="Menlo" panose="020B0609030804020204" pitchFamily="49" charset="0"/>
+                <a:ea typeface="Menlo" panose="020B0609030804020204" pitchFamily="49" charset="0"/>
+                <a:cs typeface="Menlo" panose="020B0609030804020204" pitchFamily="49" charset="0"/>
+              </a:rPr>
+              <a:t>=1)</a:t>
+            </a:r>
+          </a:p>
+          <a:p>
+            <a:r>
+              <a:rPr lang="en-US" sz="1100" dirty="0" err="1">
+                <a:solidFill>
+                  <a:srgbClr val="0070C0"/>
+                </a:solidFill>
+                <a:latin typeface="Menlo" panose="020B0609030804020204" pitchFamily="49" charset="0"/>
+                <a:ea typeface="Menlo" panose="020B0609030804020204" pitchFamily="49" charset="0"/>
+                <a:cs typeface="Menlo" panose="020B0609030804020204" pitchFamily="49" charset="0"/>
+              </a:rPr>
+              <a:t>ax.hist</a:t>
+            </a:r>
+            <a:r>
+              <a:rPr lang="en-US" sz="1100" dirty="0">
+                <a:solidFill>
+                  <a:srgbClr val="0070C0"/>
+                </a:solidFill>
+                <a:latin typeface="Menlo" panose="020B0609030804020204" pitchFamily="49" charset="0"/>
+                <a:ea typeface="Menlo" panose="020B0609030804020204" pitchFamily="49" charset="0"/>
+                <a:cs typeface="Menlo" panose="020B0609030804020204" pitchFamily="49" charset="0"/>
+              </a:rPr>
+              <a:t>(</a:t>
+            </a:r>
+            <a:r>
+              <a:rPr lang="en-US" sz="1100" dirty="0" err="1">
+                <a:solidFill>
+                  <a:srgbClr val="0070C0"/>
+                </a:solidFill>
+                <a:latin typeface="Menlo" panose="020B0609030804020204" pitchFamily="49" charset="0"/>
+                <a:ea typeface="Menlo" panose="020B0609030804020204" pitchFamily="49" charset="0"/>
+                <a:cs typeface="Menlo" panose="020B0609030804020204" pitchFamily="49" charset="0"/>
+              </a:rPr>
+              <a:t>diffs,bins</a:t>
+            </a:r>
+            <a:r>
+              <a:rPr lang="en-US" sz="1100" dirty="0">
+                <a:solidFill>
+                  <a:srgbClr val="0070C0"/>
+                </a:solidFill>
+                <a:latin typeface="Menlo" panose="020B0609030804020204" pitchFamily="49" charset="0"/>
+                <a:ea typeface="Menlo" panose="020B0609030804020204" pitchFamily="49" charset="0"/>
+                <a:cs typeface="Menlo" panose="020B0609030804020204" pitchFamily="49" charset="0"/>
+              </a:rPr>
+              <a:t>=100)</a:t>
+            </a:r>
+          </a:p>
+          <a:p>
+            <a:r>
+              <a:rPr lang="en-US" sz="1100" dirty="0" err="1">
+                <a:solidFill>
+                  <a:srgbClr val="0070C0"/>
+                </a:solidFill>
+                <a:latin typeface="Menlo" panose="020B0609030804020204" pitchFamily="49" charset="0"/>
+                <a:ea typeface="Menlo" panose="020B0609030804020204" pitchFamily="49" charset="0"/>
+                <a:cs typeface="Menlo" panose="020B0609030804020204" pitchFamily="49" charset="0"/>
+              </a:rPr>
+              <a:t>ax.set_xlim</a:t>
+            </a:r>
+            <a:r>
+              <a:rPr lang="en-US" sz="1100" dirty="0">
+                <a:solidFill>
+                  <a:srgbClr val="0070C0"/>
+                </a:solidFill>
+                <a:latin typeface="Menlo" panose="020B0609030804020204" pitchFamily="49" charset="0"/>
+                <a:ea typeface="Menlo" panose="020B0609030804020204" pitchFamily="49" charset="0"/>
+                <a:cs typeface="Menlo" panose="020B0609030804020204" pitchFamily="49" charset="0"/>
+              </a:rPr>
+              <a:t>(left=0,right=0.2)</a:t>
+            </a:r>
+          </a:p>
+          <a:p>
+            <a:r>
+              <a:rPr lang="en-US" sz="1100" dirty="0" err="1">
+                <a:solidFill>
+                  <a:srgbClr val="0070C0"/>
+                </a:solidFill>
+                <a:latin typeface="Menlo" panose="020B0609030804020204" pitchFamily="49" charset="0"/>
+                <a:ea typeface="Menlo" panose="020B0609030804020204" pitchFamily="49" charset="0"/>
+                <a:cs typeface="Menlo" panose="020B0609030804020204" pitchFamily="49" charset="0"/>
+              </a:rPr>
+              <a:t>plt.show</a:t>
+            </a:r>
+            <a:r>
+              <a:rPr lang="en-US" sz="1100" dirty="0">
+                <a:solidFill>
+                  <a:srgbClr val="0070C0"/>
+                </a:solidFill>
+                <a:latin typeface="Menlo" panose="020B0609030804020204" pitchFamily="49" charset="0"/>
+                <a:ea typeface="Menlo" panose="020B0609030804020204" pitchFamily="49" charset="0"/>
+                <a:cs typeface="Menlo" panose="020B0609030804020204" pitchFamily="49" charset="0"/>
+              </a:rPr>
+              <a:t>();</a:t>
+            </a:r>
+          </a:p>
+        </p:txBody>
+      </p:sp>
+      <p:pic>
+        <p:nvPicPr>
+          <p:cNvPr id="11" name="Picture 10">
+            <a:extLst>
+              <a:ext uri="{FF2B5EF4-FFF2-40B4-BE49-F238E27FC236}">
+                <a16:creationId xmlns:a16="http://schemas.microsoft.com/office/drawing/2014/main" id="{819CECB9-FA40-2B4A-8E80-911C091D3BD6}"/>
+              </a:ext>
+            </a:extLst>
+          </p:cNvPr>
+          <p:cNvPicPr>
+            <a:picLocks noChangeAspect="1"/>
+          </p:cNvPicPr>
+          <p:nvPr/>
+        </p:nvPicPr>
+        <p:blipFill>
+          <a:blip r:embed="rId4" cstate="email">
+            <a:extLst>
+              <a:ext uri="{28A0092B-C50C-407E-A947-70E740481C1C}">
+                <a14:useLocalDpi xmlns:a14="http://schemas.microsoft.com/office/drawing/2010/main"/>
+              </a:ext>
+            </a:extLst>
+          </a:blip>
+          <a:stretch>
+            <a:fillRect/>
+          </a:stretch>
+        </p:blipFill>
+        <p:spPr>
+          <a:xfrm>
+            <a:off x="1707699" y="3579188"/>
+            <a:ext cx="2130703" cy="1072566"/>
+          </a:xfrm>
+          <a:prstGeom prst="rect">
+            <a:avLst/>
+          </a:prstGeom>
+        </p:spPr>
+      </p:pic>
+      <p:sp>
+        <p:nvSpPr>
+          <p:cNvPr id="12" name="TextBox 11">
+            <a:extLst>
+              <a:ext uri="{FF2B5EF4-FFF2-40B4-BE49-F238E27FC236}">
+                <a16:creationId xmlns:a16="http://schemas.microsoft.com/office/drawing/2014/main" id="{99770D08-03F1-D24C-A73C-37974E179C5F}"/>
+              </a:ext>
+            </a:extLst>
+          </p:cNvPr>
+          <p:cNvSpPr txBox="1"/>
+          <p:nvPr/>
+        </p:nvSpPr>
+        <p:spPr>
+          <a:xfrm>
+            <a:off x="977854" y="3242523"/>
+            <a:ext cx="3566009" cy="307777"/>
+          </a:xfrm>
+          <a:prstGeom prst="rect">
+            <a:avLst/>
+          </a:prstGeom>
+          <a:noFill/>
+        </p:spPr>
+        <p:txBody>
+          <a:bodyPr wrap="square" rtlCol="0">
+            <a:spAutoFit/>
+          </a:bodyPr>
+          <a:lstStyle/>
+          <a:p>
+            <a:pPr algn="ctr"/>
+            <a:r>
+              <a:rPr lang="en-US" dirty="0">
+                <a:solidFill>
+                  <a:srgbClr val="0070C0"/>
+                </a:solidFill>
+                <a:latin typeface="+mj-lt"/>
+                <a:ea typeface="Menlo" panose="020B0609030804020204" pitchFamily="49" charset="0"/>
+                <a:cs typeface="Menlo" panose="020B0609030804020204" pitchFamily="49" charset="0"/>
+              </a:rPr>
+              <a:t>Distribution of diffs of shuffled parts</a:t>
+            </a:r>
+          </a:p>
+        </p:txBody>
+      </p:sp>
+      <p:sp>
+        <p:nvSpPr>
+          <p:cNvPr id="13" name="TextBox 12">
+            <a:extLst>
+              <a:ext uri="{FF2B5EF4-FFF2-40B4-BE49-F238E27FC236}">
+                <a16:creationId xmlns:a16="http://schemas.microsoft.com/office/drawing/2014/main" id="{86023C08-35C4-CF4E-B4AF-CFB2312D7594}"/>
+              </a:ext>
+            </a:extLst>
+          </p:cNvPr>
+          <p:cNvSpPr txBox="1"/>
+          <p:nvPr/>
+        </p:nvSpPr>
+        <p:spPr>
+          <a:xfrm>
+            <a:off x="5520585" y="4322989"/>
+            <a:ext cx="1625766" cy="461665"/>
+          </a:xfrm>
+          <a:prstGeom prst="rect">
+            <a:avLst/>
+          </a:prstGeom>
+          <a:noFill/>
+        </p:spPr>
+        <p:txBody>
+          <a:bodyPr wrap="none" rtlCol="0">
+            <a:spAutoFit/>
+          </a:bodyPr>
+          <a:lstStyle/>
+          <a:p>
+            <a:r>
+              <a:rPr lang="en-US" sz="1200" dirty="0">
+                <a:solidFill>
+                  <a:srgbClr val="00B050"/>
+                </a:solidFill>
+              </a:rPr>
+              <a:t>P-value is estimated </a:t>
+            </a:r>
+          </a:p>
+          <a:p>
+            <a:r>
+              <a:rPr lang="en-US" sz="1200" dirty="0">
+                <a:solidFill>
+                  <a:srgbClr val="00B050"/>
+                </a:solidFill>
+              </a:rPr>
+              <a:t>by counting</a:t>
+            </a:r>
+          </a:p>
+        </p:txBody>
+      </p:sp>
+      <p:sp>
+        <p:nvSpPr>
+          <p:cNvPr id="14" name="Right Arrow 13">
+            <a:extLst>
+              <a:ext uri="{FF2B5EF4-FFF2-40B4-BE49-F238E27FC236}">
+                <a16:creationId xmlns:a16="http://schemas.microsoft.com/office/drawing/2014/main" id="{36A8D943-90BE-FB4B-B711-182B969661B6}"/>
+              </a:ext>
+            </a:extLst>
+          </p:cNvPr>
+          <p:cNvSpPr/>
+          <p:nvPr/>
+        </p:nvSpPr>
+        <p:spPr>
+          <a:xfrm>
+            <a:off x="6946317" y="4443055"/>
+            <a:ext cx="457532" cy="178375"/>
+          </a:xfrm>
+          <a:prstGeom prst="rightArrow">
+            <a:avLst/>
+          </a:prstGeom>
+          <a:solidFill>
+            <a:srgbClr val="00B050"/>
+          </a:solidFill>
+          <a:ln>
+            <a:solidFill>
+              <a:srgbClr val="00B050"/>
+            </a:solidFill>
+          </a:ln>
+        </p:spPr>
+        <p:style>
+          <a:lnRef idx="2">
+            <a:schemeClr val="accent1">
+              <a:shade val="50000"/>
+            </a:schemeClr>
+          </a:lnRef>
+          <a:fillRef idx="1">
+            <a:schemeClr val="accent1"/>
+          </a:fillRef>
+          <a:effectRef idx="0">
+            <a:schemeClr val="accent1"/>
+          </a:effectRef>
+          <a:fontRef idx="minor">
+            <a:schemeClr val="lt1"/>
+          </a:fontRef>
+        </p:style>
+        <p:txBody>
+          <a:bodyPr rtlCol="0" anchor="ctr"/>
+          <a:lstStyle/>
+          <a:p>
+            <a:pPr algn="ctr"/>
+            <a:endParaRPr lang="en-US"/>
+          </a:p>
+        </p:txBody>
+      </p:sp>
+      <p:sp>
+        <p:nvSpPr>
+          <p:cNvPr id="15" name="TextBox 14">
+            <a:extLst>
+              <a:ext uri="{FF2B5EF4-FFF2-40B4-BE49-F238E27FC236}">
+                <a16:creationId xmlns:a16="http://schemas.microsoft.com/office/drawing/2014/main" id="{5A62F9F1-3396-C540-ACEF-C2F3ECF4FAA2}"/>
+              </a:ext>
+            </a:extLst>
+          </p:cNvPr>
+          <p:cNvSpPr txBox="1"/>
+          <p:nvPr/>
+        </p:nvSpPr>
+        <p:spPr>
+          <a:xfrm>
+            <a:off x="85344" y="4734342"/>
+            <a:ext cx="4904156" cy="2123658"/>
+          </a:xfrm>
+          <a:prstGeom prst="rect">
+            <a:avLst/>
+          </a:prstGeom>
+          <a:noFill/>
+        </p:spPr>
+        <p:txBody>
+          <a:bodyPr wrap="square" rtlCol="0">
+            <a:spAutoFit/>
+          </a:bodyPr>
+          <a:lstStyle/>
+          <a:p>
+            <a:r>
+              <a:rPr lang="en-US" sz="1100" dirty="0">
+                <a:solidFill>
+                  <a:srgbClr val="0070C0"/>
+                </a:solidFill>
+                <a:latin typeface="Menlo" panose="020B0609030804020204" pitchFamily="49" charset="0"/>
+                <a:ea typeface="Menlo" panose="020B0609030804020204" pitchFamily="49" charset="0"/>
+                <a:cs typeface="Menlo" panose="020B0609030804020204" pitchFamily="49" charset="0"/>
+              </a:rPr>
+              <a:t>import </a:t>
+            </a:r>
+            <a:r>
+              <a:rPr lang="en-US" sz="1100" dirty="0" err="1">
+                <a:solidFill>
+                  <a:srgbClr val="0070C0"/>
+                </a:solidFill>
+                <a:latin typeface="Menlo" panose="020B0609030804020204" pitchFamily="49" charset="0"/>
+                <a:ea typeface="Menlo" panose="020B0609030804020204" pitchFamily="49" charset="0"/>
+                <a:cs typeface="Menlo" panose="020B0609030804020204" pitchFamily="49" charset="0"/>
+              </a:rPr>
+              <a:t>numpy</a:t>
+            </a:r>
+            <a:r>
+              <a:rPr lang="en-US" sz="1100" dirty="0">
+                <a:solidFill>
+                  <a:srgbClr val="0070C0"/>
+                </a:solidFill>
+                <a:latin typeface="Menlo" panose="020B0609030804020204" pitchFamily="49" charset="0"/>
+                <a:ea typeface="Menlo" panose="020B0609030804020204" pitchFamily="49" charset="0"/>
+                <a:cs typeface="Menlo" panose="020B0609030804020204" pitchFamily="49" charset="0"/>
+              </a:rPr>
+              <a:t> as np </a:t>
+            </a:r>
+          </a:p>
+          <a:p>
+            <a:r>
+              <a:rPr lang="en-US" sz="1100" dirty="0">
+                <a:solidFill>
+                  <a:srgbClr val="0070C0"/>
+                </a:solidFill>
+                <a:latin typeface="Menlo" panose="020B0609030804020204" pitchFamily="49" charset="0"/>
+                <a:ea typeface="Menlo" panose="020B0609030804020204" pitchFamily="49" charset="0"/>
+                <a:cs typeface="Menlo" panose="020B0609030804020204" pitchFamily="49" charset="0"/>
+              </a:rPr>
+              <a:t>from </a:t>
+            </a:r>
+            <a:r>
+              <a:rPr lang="en-US" sz="1100" dirty="0" err="1">
+                <a:solidFill>
+                  <a:srgbClr val="0070C0"/>
+                </a:solidFill>
+                <a:latin typeface="Menlo" panose="020B0609030804020204" pitchFamily="49" charset="0"/>
+                <a:ea typeface="Menlo" panose="020B0609030804020204" pitchFamily="49" charset="0"/>
+                <a:cs typeface="Menlo" panose="020B0609030804020204" pitchFamily="49" charset="0"/>
+              </a:rPr>
+              <a:t>sklearn.model_selection</a:t>
+            </a:r>
+            <a:r>
+              <a:rPr lang="en-US" sz="1100" dirty="0">
+                <a:solidFill>
+                  <a:srgbClr val="0070C0"/>
+                </a:solidFill>
+                <a:latin typeface="Menlo" panose="020B0609030804020204" pitchFamily="49" charset="0"/>
+                <a:ea typeface="Menlo" panose="020B0609030804020204" pitchFamily="49" charset="0"/>
+                <a:cs typeface="Menlo" panose="020B0609030804020204" pitchFamily="49" charset="0"/>
+              </a:rPr>
+              <a:t> import </a:t>
+            </a:r>
+            <a:r>
+              <a:rPr lang="en-US" sz="1100" dirty="0" err="1">
+                <a:solidFill>
+                  <a:srgbClr val="0070C0"/>
+                </a:solidFill>
+                <a:latin typeface="Menlo" panose="020B0609030804020204" pitchFamily="49" charset="0"/>
+                <a:ea typeface="Menlo" panose="020B0609030804020204" pitchFamily="49" charset="0"/>
+                <a:cs typeface="Menlo" panose="020B0609030804020204" pitchFamily="49" charset="0"/>
+              </a:rPr>
+              <a:t>train_test_split</a:t>
+            </a:r>
+            <a:r>
+              <a:rPr lang="en-US" sz="1100" dirty="0">
+                <a:solidFill>
+                  <a:srgbClr val="0070C0"/>
+                </a:solidFill>
+                <a:latin typeface="Menlo" panose="020B0609030804020204" pitchFamily="49" charset="0"/>
+                <a:ea typeface="Menlo" panose="020B0609030804020204" pitchFamily="49" charset="0"/>
+                <a:cs typeface="Menlo" panose="020B0609030804020204" pitchFamily="49" charset="0"/>
+              </a:rPr>
+              <a:t> </a:t>
+            </a:r>
+          </a:p>
+          <a:p>
+            <a:r>
+              <a:rPr lang="en-US" sz="1100" dirty="0">
+                <a:solidFill>
+                  <a:srgbClr val="0070C0"/>
+                </a:solidFill>
+                <a:latin typeface="Menlo" panose="020B0609030804020204" pitchFamily="49" charset="0"/>
+                <a:ea typeface="Menlo" panose="020B0609030804020204" pitchFamily="49" charset="0"/>
+                <a:cs typeface="Menlo" panose="020B0609030804020204" pitchFamily="49" charset="0"/>
+              </a:rPr>
+              <a:t>data = </a:t>
+            </a:r>
+            <a:r>
+              <a:rPr lang="en-US" sz="1100" dirty="0" err="1">
+                <a:solidFill>
+                  <a:srgbClr val="0070C0"/>
+                </a:solidFill>
+                <a:latin typeface="Menlo" panose="020B0609030804020204" pitchFamily="49" charset="0"/>
+                <a:ea typeface="Menlo" panose="020B0609030804020204" pitchFamily="49" charset="0"/>
+                <a:cs typeface="Menlo" panose="020B0609030804020204" pitchFamily="49" charset="0"/>
+              </a:rPr>
+              <a:t>np.random.random</a:t>
+            </a:r>
+            <a:r>
+              <a:rPr lang="en-US" sz="1100" dirty="0">
+                <a:solidFill>
+                  <a:srgbClr val="0070C0"/>
+                </a:solidFill>
+                <a:latin typeface="Menlo" panose="020B0609030804020204" pitchFamily="49" charset="0"/>
+                <a:ea typeface="Menlo" panose="020B0609030804020204" pitchFamily="49" charset="0"/>
+                <a:cs typeface="Menlo" panose="020B0609030804020204" pitchFamily="49" charset="0"/>
+              </a:rPr>
+              <a:t>(2*N)</a:t>
+            </a:r>
+          </a:p>
+          <a:p>
+            <a:endParaRPr lang="en-US" sz="1100" dirty="0">
+              <a:solidFill>
+                <a:srgbClr val="0070C0"/>
+              </a:solidFill>
+              <a:latin typeface="Menlo" panose="020B0609030804020204" pitchFamily="49" charset="0"/>
+              <a:ea typeface="Menlo" panose="020B0609030804020204" pitchFamily="49" charset="0"/>
+              <a:cs typeface="Menlo" panose="020B0609030804020204" pitchFamily="49" charset="0"/>
+            </a:endParaRPr>
+          </a:p>
+          <a:p>
+            <a:r>
+              <a:rPr lang="en-US" sz="1100" dirty="0">
+                <a:solidFill>
+                  <a:srgbClr val="00B050"/>
+                </a:solidFill>
+                <a:latin typeface="Menlo" panose="020B0609030804020204" pitchFamily="49" charset="0"/>
+                <a:ea typeface="Menlo" panose="020B0609030804020204" pitchFamily="49" charset="0"/>
+                <a:cs typeface="Menlo" panose="020B0609030804020204" pitchFamily="49" charset="0"/>
+              </a:rPr>
+              <a:t># how to shuffle using </a:t>
+            </a:r>
+            <a:r>
+              <a:rPr lang="en-US" sz="1100" dirty="0" err="1">
+                <a:solidFill>
+                  <a:srgbClr val="00B050"/>
+                </a:solidFill>
+                <a:latin typeface="Menlo" panose="020B0609030804020204" pitchFamily="49" charset="0"/>
+                <a:ea typeface="Menlo" panose="020B0609030804020204" pitchFamily="49" charset="0"/>
+                <a:cs typeface="Menlo" panose="020B0609030804020204" pitchFamily="49" charset="0"/>
+              </a:rPr>
+              <a:t>sklearn</a:t>
+            </a:r>
+            <a:r>
+              <a:rPr lang="en-US" sz="1100" dirty="0">
+                <a:solidFill>
+                  <a:srgbClr val="00B050"/>
+                </a:solidFill>
+                <a:latin typeface="Menlo" panose="020B0609030804020204" pitchFamily="49" charset="0"/>
+                <a:ea typeface="Menlo" panose="020B0609030804020204" pitchFamily="49" charset="0"/>
+                <a:cs typeface="Menlo" panose="020B0609030804020204" pitchFamily="49" charset="0"/>
+              </a:rPr>
+              <a:t> </a:t>
+            </a:r>
+            <a:r>
+              <a:rPr lang="en-US" sz="1100" dirty="0" err="1">
+                <a:solidFill>
+                  <a:srgbClr val="00B050"/>
+                </a:solidFill>
+                <a:latin typeface="Menlo" panose="020B0609030804020204" pitchFamily="49" charset="0"/>
+                <a:ea typeface="Menlo" panose="020B0609030804020204" pitchFamily="49" charset="0"/>
+                <a:cs typeface="Menlo" panose="020B0609030804020204" pitchFamily="49" charset="0"/>
+              </a:rPr>
+              <a:t>train_test_split</a:t>
+            </a:r>
+            <a:r>
+              <a:rPr lang="en-US" sz="1100" dirty="0">
+                <a:solidFill>
+                  <a:srgbClr val="00B050"/>
+                </a:solidFill>
+                <a:latin typeface="Menlo" panose="020B0609030804020204" pitchFamily="49" charset="0"/>
+                <a:ea typeface="Menlo" panose="020B0609030804020204" pitchFamily="49" charset="0"/>
+                <a:cs typeface="Menlo" panose="020B0609030804020204" pitchFamily="49" charset="0"/>
+              </a:rPr>
+              <a:t>()</a:t>
+            </a:r>
+          </a:p>
+          <a:p>
+            <a:r>
+              <a:rPr lang="en-US" sz="1100" dirty="0">
+                <a:solidFill>
+                  <a:srgbClr val="0070C0"/>
+                </a:solidFill>
+                <a:latin typeface="Menlo" panose="020B0609030804020204" pitchFamily="49" charset="0"/>
+                <a:ea typeface="Menlo" panose="020B0609030804020204" pitchFamily="49" charset="0"/>
+                <a:cs typeface="Menlo" panose="020B0609030804020204" pitchFamily="49" charset="0"/>
+              </a:rPr>
+              <a:t>X1, X2 = </a:t>
+            </a:r>
+            <a:r>
+              <a:rPr lang="en-US" sz="1100" dirty="0" err="1">
+                <a:solidFill>
+                  <a:srgbClr val="0070C0"/>
+                </a:solidFill>
+                <a:latin typeface="Menlo" panose="020B0609030804020204" pitchFamily="49" charset="0"/>
+                <a:ea typeface="Menlo" panose="020B0609030804020204" pitchFamily="49" charset="0"/>
+                <a:cs typeface="Menlo" panose="020B0609030804020204" pitchFamily="49" charset="0"/>
+              </a:rPr>
+              <a:t>train_test_split</a:t>
+            </a:r>
+            <a:r>
+              <a:rPr lang="en-US" sz="1100" dirty="0">
+                <a:solidFill>
+                  <a:srgbClr val="0070C0"/>
+                </a:solidFill>
+                <a:latin typeface="Menlo" panose="020B0609030804020204" pitchFamily="49" charset="0"/>
+                <a:ea typeface="Menlo" panose="020B0609030804020204" pitchFamily="49" charset="0"/>
+                <a:cs typeface="Menlo" panose="020B0609030804020204" pitchFamily="49" charset="0"/>
+              </a:rPr>
+              <a:t>(data, </a:t>
+            </a:r>
+            <a:r>
+              <a:rPr lang="en-US" sz="1100" dirty="0" err="1">
+                <a:solidFill>
+                  <a:srgbClr val="0070C0"/>
+                </a:solidFill>
+                <a:latin typeface="Menlo" panose="020B0609030804020204" pitchFamily="49" charset="0"/>
+                <a:ea typeface="Menlo" panose="020B0609030804020204" pitchFamily="49" charset="0"/>
+                <a:cs typeface="Menlo" panose="020B0609030804020204" pitchFamily="49" charset="0"/>
+              </a:rPr>
+              <a:t>test_size</a:t>
+            </a:r>
+            <a:r>
+              <a:rPr lang="en-US" sz="1100" dirty="0">
+                <a:solidFill>
+                  <a:srgbClr val="0070C0"/>
+                </a:solidFill>
+                <a:latin typeface="Menlo" panose="020B0609030804020204" pitchFamily="49" charset="0"/>
+                <a:ea typeface="Menlo" panose="020B0609030804020204" pitchFamily="49" charset="0"/>
+                <a:cs typeface="Menlo" panose="020B0609030804020204" pitchFamily="49" charset="0"/>
+              </a:rPr>
+              <a:t>=N)</a:t>
+            </a:r>
+          </a:p>
+          <a:p>
+            <a:endParaRPr lang="en-US" sz="1100" dirty="0">
+              <a:solidFill>
+                <a:srgbClr val="0070C0"/>
+              </a:solidFill>
+              <a:latin typeface="Menlo" panose="020B0609030804020204" pitchFamily="49" charset="0"/>
+              <a:ea typeface="Menlo" panose="020B0609030804020204" pitchFamily="49" charset="0"/>
+              <a:cs typeface="Menlo" panose="020B0609030804020204" pitchFamily="49" charset="0"/>
+            </a:endParaRPr>
+          </a:p>
+          <a:p>
+            <a:r>
+              <a:rPr lang="en-US" sz="1100" dirty="0">
+                <a:solidFill>
+                  <a:srgbClr val="00B050"/>
+                </a:solidFill>
+                <a:latin typeface="Menlo" panose="020B0609030804020204" pitchFamily="49" charset="0"/>
+                <a:ea typeface="Menlo" panose="020B0609030804020204" pitchFamily="49" charset="0"/>
+                <a:cs typeface="Menlo" panose="020B0609030804020204" pitchFamily="49" charset="0"/>
+              </a:rPr>
+              <a:t># how to shuffle using only </a:t>
+            </a:r>
+            <a:r>
+              <a:rPr lang="en-US" sz="1100" dirty="0" err="1">
+                <a:solidFill>
+                  <a:srgbClr val="00B050"/>
+                </a:solidFill>
+                <a:latin typeface="Menlo" panose="020B0609030804020204" pitchFamily="49" charset="0"/>
+                <a:ea typeface="Menlo" panose="020B0609030804020204" pitchFamily="49" charset="0"/>
+                <a:cs typeface="Menlo" panose="020B0609030804020204" pitchFamily="49" charset="0"/>
+              </a:rPr>
+              <a:t>Numpy</a:t>
+            </a:r>
+            <a:r>
+              <a:rPr lang="en-US" sz="1100" dirty="0">
+                <a:solidFill>
+                  <a:srgbClr val="00B050"/>
+                </a:solidFill>
+                <a:latin typeface="Menlo" panose="020B0609030804020204" pitchFamily="49" charset="0"/>
+                <a:ea typeface="Menlo" panose="020B0609030804020204" pitchFamily="49" charset="0"/>
+                <a:cs typeface="Menlo" panose="020B0609030804020204" pitchFamily="49" charset="0"/>
+              </a:rPr>
+              <a:t>:</a:t>
+            </a:r>
+          </a:p>
+          <a:p>
+            <a:r>
+              <a:rPr lang="en-US" sz="1100" dirty="0">
+                <a:solidFill>
+                  <a:srgbClr val="0070C0"/>
+                </a:solidFill>
+                <a:latin typeface="Menlo" panose="020B0609030804020204" pitchFamily="49" charset="0"/>
+                <a:ea typeface="Menlo" panose="020B0609030804020204" pitchFamily="49" charset="0"/>
+                <a:cs typeface="Menlo" panose="020B0609030804020204" pitchFamily="49" charset="0"/>
+              </a:rPr>
+              <a:t>s1 = </a:t>
+            </a:r>
+            <a:r>
+              <a:rPr lang="en-US" sz="1100" dirty="0" err="1">
+                <a:solidFill>
+                  <a:srgbClr val="0070C0"/>
+                </a:solidFill>
+                <a:latin typeface="Menlo" panose="020B0609030804020204" pitchFamily="49" charset="0"/>
+                <a:ea typeface="Menlo" panose="020B0609030804020204" pitchFamily="49" charset="0"/>
+                <a:cs typeface="Menlo" panose="020B0609030804020204" pitchFamily="49" charset="0"/>
+              </a:rPr>
+              <a:t>np.random.choice</a:t>
+            </a:r>
+            <a:r>
+              <a:rPr lang="en-US" sz="1100" dirty="0">
+                <a:solidFill>
+                  <a:srgbClr val="0070C0"/>
+                </a:solidFill>
+                <a:latin typeface="Menlo" panose="020B0609030804020204" pitchFamily="49" charset="0"/>
+                <a:ea typeface="Menlo" panose="020B0609030804020204" pitchFamily="49" charset="0"/>
+                <a:cs typeface="Menlo" panose="020B0609030804020204" pitchFamily="49" charset="0"/>
+              </a:rPr>
+              <a:t>(2*N, N, replace=False)</a:t>
+            </a:r>
+          </a:p>
+          <a:p>
+            <a:r>
+              <a:rPr lang="en-US" sz="1100" dirty="0">
+                <a:solidFill>
+                  <a:srgbClr val="0070C0"/>
+                </a:solidFill>
+                <a:latin typeface="Menlo" panose="020B0609030804020204" pitchFamily="49" charset="0"/>
+                <a:ea typeface="Menlo" panose="020B0609030804020204" pitchFamily="49" charset="0"/>
+                <a:cs typeface="Menlo" panose="020B0609030804020204" pitchFamily="49" charset="0"/>
+              </a:rPr>
+              <a:t>s2 = list( set(range(2*N)) - set(s1) )</a:t>
+            </a:r>
+          </a:p>
+          <a:p>
+            <a:r>
+              <a:rPr lang="en-US" sz="1100" dirty="0">
+                <a:solidFill>
+                  <a:srgbClr val="0070C0"/>
+                </a:solidFill>
+                <a:latin typeface="Menlo" panose="020B0609030804020204" pitchFamily="49" charset="0"/>
+                <a:ea typeface="Menlo" panose="020B0609030804020204" pitchFamily="49" charset="0"/>
+                <a:cs typeface="Menlo" panose="020B0609030804020204" pitchFamily="49" charset="0"/>
+              </a:rPr>
+              <a:t>split1 = data[s1]</a:t>
+            </a:r>
+          </a:p>
+          <a:p>
+            <a:r>
+              <a:rPr lang="en-US" sz="1100" dirty="0">
+                <a:solidFill>
+                  <a:srgbClr val="0070C0"/>
+                </a:solidFill>
+                <a:latin typeface="Menlo" panose="020B0609030804020204" pitchFamily="49" charset="0"/>
+                <a:ea typeface="Menlo" panose="020B0609030804020204" pitchFamily="49" charset="0"/>
+                <a:cs typeface="Menlo" panose="020B0609030804020204" pitchFamily="49" charset="0"/>
+              </a:rPr>
+              <a:t>split2 = data[s2]</a:t>
             </a:r>
           </a:p>
         </p:txBody>
@@ -8539,7 +10305,7 @@
     </p:spTree>
     <p:extLst>
       <p:ext uri="{BB962C8B-B14F-4D97-AF65-F5344CB8AC3E}">
-        <p14:creationId xmlns:p14="http://schemas.microsoft.com/office/powerpoint/2010/main" val="418583824"/>
+        <p14:creationId xmlns:p14="http://schemas.microsoft.com/office/powerpoint/2010/main" val="274343235"/>
       </p:ext>
     </p:extLst>
   </p:cSld>
@@ -8568,10 +10334,10 @@
       </p:grpSpPr>
       <p:sp>
         <p:nvSpPr>
-          <p:cNvPr id="5" name="TextBox 4">
+          <p:cNvPr id="2" name="TextBox 1">
             <a:extLst>
               <a:ext uri="{FF2B5EF4-FFF2-40B4-BE49-F238E27FC236}">
-                <a16:creationId xmlns:a16="http://schemas.microsoft.com/office/drawing/2014/main" id="{9ECF6344-25D1-214F-A75E-373DADD0E10F}"/>
+                <a16:creationId xmlns:a16="http://schemas.microsoft.com/office/drawing/2014/main" id="{E3BE1FBD-C5C8-E14F-8F2D-9F5BCABFDD7C}"/>
               </a:ext>
             </a:extLst>
           </p:cNvPr>
@@ -8580,40 +10346,8 @@
         </p:nvSpPr>
         <p:spPr>
           <a:xfrm>
-            <a:off x="13846629" y="6673929"/>
-            <a:ext cx="184731" cy="369332"/>
-          </a:xfrm>
-          <a:prstGeom prst="rect">
-            <a:avLst/>
-          </a:prstGeom>
-          <a:noFill/>
-        </p:spPr>
-        <p:txBody>
-          <a:bodyPr wrap="none" rtlCol="0">
-            <a:spAutoFit/>
-          </a:bodyPr>
-          <a:lstStyle/>
-          <a:p>
-            <a:endParaRPr lang="en-US" dirty="0"/>
-          </a:p>
-        </p:txBody>
-      </p:sp>
-      <p:sp>
-        <p:nvSpPr>
-          <p:cNvPr id="8" name="TextBox 7">
-            <a:extLst>
-              <a:ext uri="{FF2B5EF4-FFF2-40B4-BE49-F238E27FC236}">
-                <a16:creationId xmlns:a16="http://schemas.microsoft.com/office/drawing/2014/main" id="{3790BE65-37E1-E345-AB83-E3F456BE5694}"/>
-              </a:ext>
-            </a:extLst>
-          </p:cNvPr>
-          <p:cNvSpPr txBox="1"/>
-          <p:nvPr/>
-        </p:nvSpPr>
-        <p:spPr>
-          <a:xfrm>
-            <a:off x="29980" y="31432"/>
-            <a:ext cx="1019332" cy="523220"/>
+            <a:off x="605642" y="1459230"/>
+            <a:ext cx="7445828" cy="3939540"/>
           </a:xfrm>
           <a:prstGeom prst="rect">
             <a:avLst/>
@@ -8626,19 +10360,152 @@
           </a:bodyPr>
           <a:lstStyle/>
           <a:p>
-            <a:r>
-              <a:rPr lang="en-US" sz="2800" b="1" dirty="0"/>
-              <a:t>Bias</a:t>
+            <a:pPr marL="342900" indent="-342900">
+              <a:buFont typeface="+mj-lt"/>
+              <a:buAutoNum type="arabicPeriod"/>
+            </a:pPr>
+            <a:r>
+              <a:rPr lang="en-US" sz="1600" dirty="0"/>
+              <a:t>Ending the experiment prematurely (not getting enough data points)</a:t>
+            </a:r>
+          </a:p>
+          <a:p>
+            <a:pPr marL="342900" indent="-342900">
+              <a:buFont typeface="+mj-lt"/>
+              <a:buAutoNum type="arabicPeriod"/>
+            </a:pPr>
+            <a:r>
+              <a:rPr lang="en-US" sz="1600" dirty="0"/>
+              <a:t>Non-consistent (not truly random) cluster assignment</a:t>
+            </a:r>
+          </a:p>
+          <a:p>
+            <a:pPr marL="342900" indent="-342900">
+              <a:buFont typeface="+mj-lt"/>
+              <a:buAutoNum type="arabicPeriod"/>
+            </a:pPr>
+            <a:r>
+              <a:rPr lang="en-US" sz="1600" dirty="0"/>
+              <a:t>A random assignment fails to distribute heavy users equally. </a:t>
+            </a:r>
+            <a:br>
+              <a:rPr lang="en-US" sz="1600" dirty="0"/>
+            </a:br>
+            <a:r>
+              <a:rPr lang="en-US" sz="1600" dirty="0"/>
+              <a:t>A/A test to check consistency</a:t>
+            </a:r>
+          </a:p>
+          <a:p>
+            <a:pPr marL="342900" indent="-342900">
+              <a:buFont typeface="+mj-lt"/>
+              <a:buAutoNum type="arabicPeriod"/>
+            </a:pPr>
+            <a:r>
+              <a:rPr lang="en-US" sz="1600" dirty="0"/>
+              <a:t>Fail to check the Ceteris Paribus assumption ("all other things being equal" – Latin)</a:t>
+            </a:r>
+          </a:p>
+          <a:p>
+            <a:pPr marL="342900" indent="-342900">
+              <a:buFont typeface="+mj-lt"/>
+              <a:buAutoNum type="arabicPeriod"/>
+            </a:pPr>
+            <a:r>
+              <a:rPr lang="en-US" sz="1600" dirty="0"/>
+              <a:t>Cross-contamination between the treatment and control groups</a:t>
+            </a:r>
+          </a:p>
+          <a:p>
+            <a:pPr marL="342900" indent="-342900">
+              <a:buFont typeface="+mj-lt"/>
+              <a:buAutoNum type="arabicPeriod"/>
+            </a:pPr>
+            <a:r>
+              <a:rPr lang="en-US" sz="1600" dirty="0"/>
+              <a:t>Get fouled by False Positives while making multiple comparisons </a:t>
+            </a:r>
+            <a:br>
+              <a:rPr lang="en-US" sz="1600" dirty="0"/>
+            </a:br>
+            <a:r>
+              <a:rPr lang="en-US" sz="1600" dirty="0"/>
+              <a:t>(use the Bonferroni correction to correct)</a:t>
+            </a:r>
+          </a:p>
+          <a:p>
+            <a:pPr marL="342900" indent="-342900">
+              <a:buFont typeface="+mj-lt"/>
+              <a:buAutoNum type="arabicPeriod"/>
+            </a:pPr>
+            <a:r>
+              <a:rPr lang="en-US" sz="1600" dirty="0"/>
+              <a:t>Individual and aggregated patterns look different for ramp-up experiments</a:t>
+            </a:r>
+            <a:br>
+              <a:rPr lang="en-US" sz="1600" dirty="0"/>
+            </a:br>
+            <a:r>
+              <a:rPr lang="en-US" sz="1600" dirty="0"/>
+              <a:t>(</a:t>
+            </a:r>
+            <a:r>
+              <a:rPr lang="en-US" sz="1600" b="1" dirty="0">
+                <a:solidFill>
+                  <a:srgbClr val="FF0000"/>
+                </a:solidFill>
+              </a:rPr>
+              <a:t>Simpson's paradox</a:t>
+            </a:r>
+            <a:r>
+              <a:rPr lang="en-US" sz="1600" dirty="0"/>
+              <a:t>). Three solutions: (1) use paired t-tests (test before and after); (2) use the weighted sum to adjust for the different ratios; (3) throw away the data from the ramp-up period. </a:t>
+            </a:r>
+          </a:p>
+          <a:p>
+            <a:pPr marL="342900" indent="-342900">
+              <a:buFont typeface="+mj-lt"/>
+              <a:buAutoNum type="arabicPeriod"/>
+            </a:pPr>
+            <a:r>
+              <a:rPr lang="en-US" sz="1600" dirty="0"/>
+              <a:t>Fail to check the primacy and novelty effects</a:t>
+            </a:r>
+          </a:p>
+          <a:p>
+            <a:pPr marL="342900" indent="-342900">
+              <a:buFont typeface="+mj-lt"/>
+              <a:buAutoNum type="arabicPeriod"/>
+            </a:pPr>
+            <a:endParaRPr lang="en-US" dirty="0"/>
+          </a:p>
+          <a:p>
+            <a:pPr marL="342900" indent="-342900">
+              <a:buFont typeface="+mj-lt"/>
+              <a:buAutoNum type="arabicPeriod"/>
+            </a:pPr>
+            <a:endParaRPr lang="en-US" sz="1200" dirty="0"/>
+          </a:p>
+          <a:p>
+            <a:r>
+              <a:rPr lang="en-US" sz="1200" dirty="0">
+                <a:hlinkClick r:id="rId2"/>
+              </a:rPr>
+              <a:t>https://towardsdatascience.com/online-controlled-experiment-8-common-pitfalls-and-solutions-ea4488e5a82e</a:t>
+            </a:r>
+            <a:r>
+              <a:rPr lang="en-US" sz="1200" dirty="0"/>
+              <a:t> </a:t>
             </a:r>
           </a:p>
         </p:txBody>
       </p:sp>
       <p:sp>
         <p:nvSpPr>
-          <p:cNvPr id="11" name="TextBox 10">
+          <p:cNvPr id="3" name="TextBox 2">
             <a:extLst>
               <a:ext uri="{FF2B5EF4-FFF2-40B4-BE49-F238E27FC236}">
-                <a16:creationId xmlns:a16="http://schemas.microsoft.com/office/drawing/2014/main" id="{55D514B8-788D-4A47-B18D-E513192EAA1B}"/>
+                <a16:creationId xmlns:a16="http://schemas.microsoft.com/office/drawing/2014/main" id="{9D2F077A-2E03-EB49-8EF9-9D436252504D}"/>
               </a:ext>
             </a:extLst>
           </p:cNvPr>
@@ -8647,8 +10514,8 @@
         </p:nvSpPr>
         <p:spPr>
           <a:xfrm>
-            <a:off x="1156190" y="800424"/>
-            <a:ext cx="8104422" cy="2031325"/>
+            <a:off x="0" y="119559"/>
+            <a:ext cx="5985164" cy="523220"/>
           </a:xfrm>
           <a:prstGeom prst="rect">
             <a:avLst/>
@@ -8661,74 +10528,19 @@
           </a:bodyPr>
           <a:lstStyle/>
           <a:p>
-            <a:pPr marL="285750" indent="-285750">
-              <a:buFont typeface="Arial" panose="020B0604020202020204" pitchFamily="34" charset="0"/>
-              <a:buChar char="•"/>
-            </a:pPr>
-            <a:r>
-              <a:rPr lang="en-US" dirty="0"/>
-              <a:t>You need to make sure you are comparing "apples to apples".</a:t>
-            </a:r>
-          </a:p>
-          <a:p>
-            <a:pPr marL="285750" indent="-285750">
-              <a:buFont typeface="Arial" panose="020B0604020202020204" pitchFamily="34" charset="0"/>
-              <a:buChar char="•"/>
-            </a:pPr>
-            <a:endParaRPr lang="en-US" dirty="0"/>
-          </a:p>
-          <a:p>
-            <a:pPr marL="285750" indent="-285750">
-              <a:buFont typeface="Arial" panose="020B0604020202020204" pitchFamily="34" charset="0"/>
-              <a:buChar char="•"/>
-            </a:pPr>
-            <a:r>
-              <a:rPr lang="en-US" dirty="0"/>
-              <a:t>Buckets should be same size, same composition.</a:t>
-            </a:r>
-          </a:p>
-          <a:p>
-            <a:pPr marL="285750" indent="-285750">
-              <a:buFont typeface="Arial" panose="020B0604020202020204" pitchFamily="34" charset="0"/>
-              <a:buChar char="•"/>
-            </a:pPr>
-            <a:endParaRPr lang="en-US" dirty="0"/>
-          </a:p>
-          <a:p>
-            <a:pPr marL="285750" indent="-285750">
-              <a:buFont typeface="Arial" panose="020B0604020202020204" pitchFamily="34" charset="0"/>
-              <a:buChar char="•"/>
-            </a:pPr>
-            <a:r>
-              <a:rPr lang="en-US" dirty="0"/>
-              <a:t>Only include people who could've been affected.</a:t>
-            </a:r>
-          </a:p>
-          <a:p>
-            <a:pPr marL="285750" indent="-285750">
-              <a:buFont typeface="Arial" panose="020B0604020202020204" pitchFamily="34" charset="0"/>
-              <a:buChar char="•"/>
-            </a:pPr>
-            <a:endParaRPr lang="en-US" dirty="0"/>
-          </a:p>
-          <a:p>
-            <a:pPr marL="285750" indent="-285750">
-              <a:buFont typeface="Arial" panose="020B0604020202020204" pitchFamily="34" charset="0"/>
-              <a:buChar char="•"/>
-            </a:pPr>
-            <a:r>
-              <a:rPr lang="en-US" dirty="0"/>
-              <a:t>A/B split test may give different or opposite results for different segments.</a:t>
+            <a:r>
+              <a:rPr lang="en-US" sz="2800" b="1" dirty="0"/>
+              <a:t>8 Common Pitfalls of A/B Split Testing</a:t>
             </a:r>
           </a:p>
         </p:txBody>
       </p:sp>
       <p:pic>
         <p:nvPicPr>
-          <p:cNvPr id="1026" name="Picture 2" descr="Bias AB testing">
+          <p:cNvPr id="2050" name="Picture 2">
             <a:extLst>
               <a:ext uri="{FF2B5EF4-FFF2-40B4-BE49-F238E27FC236}">
-                <a16:creationId xmlns:a16="http://schemas.microsoft.com/office/drawing/2014/main" id="{2D950953-48A6-B744-88C6-768ACA4DA70D}"/>
+                <a16:creationId xmlns:a16="http://schemas.microsoft.com/office/drawing/2014/main" id="{5F9B9272-7B54-3945-AAF1-0264787029C6}"/>
               </a:ext>
             </a:extLst>
           </p:cNvPr>
@@ -8738,7 +10550,7 @@
           <p:nvPr/>
         </p:nvPicPr>
         <p:blipFill>
-          <a:blip r:embed="rId2">
+          <a:blip r:embed="rId3">
             <a:extLst>
               <a:ext uri="{28A0092B-C50C-407E-A947-70E740481C1C}">
                 <a14:useLocalDpi xmlns:a14="http://schemas.microsoft.com/office/drawing/2010/main"/>
@@ -8752,8 +10564,8 @@
         </p:blipFill>
         <p:spPr bwMode="auto">
           <a:xfrm>
-            <a:off x="2727325" y="3819107"/>
-            <a:ext cx="6737350" cy="2617316"/>
+            <a:off x="9092869" y="1339438"/>
+            <a:ext cx="2794000" cy="1866900"/>
           </a:xfrm>
           <a:prstGeom prst="rect">
             <a:avLst/>
@@ -8770,10 +10582,53 @@
           </a:extLst>
         </p:spPr>
       </p:pic>
+      <p:sp>
+        <p:nvSpPr>
+          <p:cNvPr id="4" name="TextBox 3">
+            <a:extLst>
+              <a:ext uri="{FF2B5EF4-FFF2-40B4-BE49-F238E27FC236}">
+                <a16:creationId xmlns:a16="http://schemas.microsoft.com/office/drawing/2014/main" id="{68BA55EB-04A6-594B-B052-252EF52A6171}"/>
+              </a:ext>
+            </a:extLst>
+          </p:cNvPr>
+          <p:cNvSpPr txBox="1"/>
+          <p:nvPr/>
+        </p:nvSpPr>
+        <p:spPr>
+          <a:xfrm>
+            <a:off x="9429008" y="3206338"/>
+            <a:ext cx="2624116" cy="1569660"/>
+          </a:xfrm>
+          <a:prstGeom prst="rect">
+            <a:avLst/>
+          </a:prstGeom>
+          <a:noFill/>
+        </p:spPr>
+        <p:txBody>
+          <a:bodyPr wrap="square" rtlCol="0">
+            <a:spAutoFit/>
+          </a:bodyPr>
+          <a:lstStyle/>
+          <a:p>
+            <a:r>
+              <a:rPr lang="en-US" sz="1600" b="1" dirty="0">
+                <a:solidFill>
+                  <a:srgbClr val="FF0000"/>
+                </a:solidFill>
+              </a:rPr>
+              <a:t>Simpson's paradox</a:t>
+            </a:r>
+            <a:r>
+              <a:rPr lang="en-US" sz="1600" dirty="0"/>
+              <a:t>: a positive trend appears for two separate groups, whereas a negative trend appears when the groups are combined.</a:t>
+            </a:r>
+          </a:p>
+        </p:txBody>
+      </p:sp>
     </p:spTree>
     <p:extLst>
       <p:ext uri="{BB962C8B-B14F-4D97-AF65-F5344CB8AC3E}">
-        <p14:creationId xmlns:p14="http://schemas.microsoft.com/office/powerpoint/2010/main" val="934612104"/>
+        <p14:creationId xmlns:p14="http://schemas.microsoft.com/office/powerpoint/2010/main" val="418583824"/>
       </p:ext>
     </p:extLst>
   </p:cSld>
@@ -8834,10 +10689,10 @@
       </p:sp>
       <p:sp>
         <p:nvSpPr>
-          <p:cNvPr id="10" name="TextBox 9">
+          <p:cNvPr id="8" name="TextBox 7">
             <a:extLst>
               <a:ext uri="{FF2B5EF4-FFF2-40B4-BE49-F238E27FC236}">
-                <a16:creationId xmlns:a16="http://schemas.microsoft.com/office/drawing/2014/main" id="{F715B8E9-39AB-D945-BE08-302996794FCE}"/>
+                <a16:creationId xmlns:a16="http://schemas.microsoft.com/office/drawing/2014/main" id="{3790BE65-37E1-E345-AB83-E3F456BE5694}"/>
               </a:ext>
             </a:extLst>
           </p:cNvPr>
@@ -8846,8 +10701,8 @@
         </p:nvSpPr>
         <p:spPr>
           <a:xfrm>
-            <a:off x="74950" y="743510"/>
-            <a:ext cx="6257925" cy="4832092"/>
+            <a:off x="29980" y="31432"/>
+            <a:ext cx="1019332" cy="523220"/>
           </a:xfrm>
           <a:prstGeom prst="rect">
             <a:avLst/>
@@ -8861,141 +10716,18 @@
           <a:lstStyle/>
           <a:p>
             <a:r>
-              <a:rPr lang="en-US" sz="1400" dirty="0"/>
-              <a:t>We randomly select users for A &amp; B groups.</a:t>
-            </a:r>
-          </a:p>
-          <a:p>
-            <a:r>
-              <a:rPr lang="en-US" sz="1400" dirty="0"/>
-              <a:t>We expect each user is independent and no interference between A &amp; B.</a:t>
-            </a:r>
-          </a:p>
-          <a:p>
-            <a:r>
-              <a:rPr lang="en-US" sz="1400" dirty="0"/>
-              <a:t>But in some situations there may be interference.</a:t>
-            </a:r>
-          </a:p>
-          <a:p>
-            <a:r>
-              <a:rPr lang="en-US" sz="1400" dirty="0"/>
-              <a:t>For example, for social media like Facebook, </a:t>
-            </a:r>
-            <a:r>
-              <a:rPr lang="en-US" sz="1400" dirty="0" err="1"/>
-              <a:t>Linkedin</a:t>
-            </a:r>
-            <a:r>
-              <a:rPr lang="en-US" sz="1400" dirty="0"/>
-              <a:t>, and Twitter,</a:t>
-            </a:r>
-          </a:p>
-          <a:p>
-            <a:r>
-              <a:rPr lang="en-US" sz="1400" dirty="0"/>
-              <a:t>or two-sided markets like Uber, Lyft, and Airbnb</a:t>
-            </a:r>
-          </a:p>
-          <a:p>
-            <a:endParaRPr lang="en-US" sz="1400" dirty="0"/>
-          </a:p>
-          <a:p>
-            <a:r>
-              <a:rPr lang="en-US" sz="1400" b="1" dirty="0">
-                <a:solidFill>
-                  <a:srgbClr val="FF0000"/>
-                </a:solidFill>
-              </a:rPr>
-              <a:t>One-sided markets</a:t>
-            </a:r>
-          </a:p>
-          <a:p>
-            <a:r>
-              <a:rPr lang="en-US" sz="1400" dirty="0"/>
-              <a:t>For example, if you testing a new feature on Facebook, and get 1% difference between A &amp; B,</a:t>
-            </a:r>
-          </a:p>
-          <a:p>
-            <a:r>
-              <a:rPr lang="en-US" sz="1400" dirty="0"/>
-              <a:t>what do you expect to happen after the new feature is launched to all users? </a:t>
-            </a:r>
-          </a:p>
-          <a:p>
-            <a:r>
-              <a:rPr lang="en-US" sz="1400" dirty="0"/>
-              <a:t>You can actually expect a value larger than 1%, because users’ behavior may be</a:t>
-            </a:r>
-          </a:p>
-          <a:p>
-            <a:r>
-              <a:rPr lang="en-US" sz="1400" dirty="0"/>
-              <a:t>impacted by that of people in their social circles. That is called a network effect. </a:t>
-            </a:r>
-          </a:p>
-          <a:p>
-            <a:r>
-              <a:rPr lang="en-US" sz="1400" dirty="0"/>
-              <a:t>It is "cooperation" effect.</a:t>
-            </a:r>
-          </a:p>
-          <a:p>
-            <a:endParaRPr lang="en-US" sz="1400" dirty="0"/>
-          </a:p>
-          <a:p>
-            <a:r>
-              <a:rPr lang="en-US" sz="1400" b="1" dirty="0">
-                <a:solidFill>
-                  <a:srgbClr val="FF0000"/>
-                </a:solidFill>
-              </a:rPr>
-              <a:t>For two-sided markets</a:t>
-            </a:r>
-          </a:p>
-          <a:p>
-            <a:r>
-              <a:rPr lang="en-US" sz="1400" dirty="0"/>
-              <a:t>(Uber, Lyft, </a:t>
-            </a:r>
-            <a:r>
-              <a:rPr lang="en-US" sz="1400" dirty="0" err="1"/>
-              <a:t>ebay</a:t>
-            </a:r>
-            <a:r>
-              <a:rPr lang="en-US" sz="1400" dirty="0"/>
-              <a:t>, and Airbnb) the effect may be opposite ("competition" effect).</a:t>
-            </a:r>
-          </a:p>
-          <a:p>
-            <a:r>
-              <a:rPr lang="en-US" sz="1400" dirty="0"/>
-              <a:t>This is because resources are shared among control and treatment groups, </a:t>
-            </a:r>
-          </a:p>
-          <a:p>
-            <a:r>
-              <a:rPr lang="en-US" sz="1400" dirty="0"/>
-              <a:t>meaning that control and treatment groups will compete for the same resources.</a:t>
-            </a:r>
-          </a:p>
-          <a:p>
-            <a:endParaRPr lang="en-US" sz="1400" dirty="0"/>
-          </a:p>
-          <a:p>
-            <a:r>
-              <a:rPr lang="en-US" sz="1400" dirty="0"/>
-              <a:t>Unlike social networks where the treatment effect underestimates the real benefit of a new product, in two-sided markets, the treatment effect overestimates the actual effect.</a:t>
+              <a:rPr lang="en-US" sz="2800" b="1" dirty="0"/>
+              <a:t>Bias</a:t>
             </a:r>
           </a:p>
         </p:txBody>
       </p:sp>
       <p:sp>
         <p:nvSpPr>
-          <p:cNvPr id="6" name="TextBox 5">
+          <p:cNvPr id="11" name="TextBox 10">
             <a:extLst>
               <a:ext uri="{FF2B5EF4-FFF2-40B4-BE49-F238E27FC236}">
-                <a16:creationId xmlns:a16="http://schemas.microsoft.com/office/drawing/2014/main" id="{B04F5605-7E99-674E-BDB8-617462202A59}"/>
+                <a16:creationId xmlns:a16="http://schemas.microsoft.com/office/drawing/2014/main" id="{55D514B8-788D-4A47-B18D-E513192EAA1B}"/>
               </a:ext>
             </a:extLst>
           </p:cNvPr>
@@ -9004,8 +10736,8 @@
         </p:nvSpPr>
         <p:spPr>
           <a:xfrm>
-            <a:off x="0" y="0"/>
-            <a:ext cx="4404239" cy="523220"/>
+            <a:off x="1156190" y="800424"/>
+            <a:ext cx="8104422" cy="2031325"/>
           </a:xfrm>
           <a:prstGeom prst="rect">
             <a:avLst/>
@@ -9018,210 +10750,119 @@
           </a:bodyPr>
           <a:lstStyle/>
           <a:p>
-            <a:r>
-              <a:rPr lang="en-US" sz="2800" b="1" dirty="0"/>
-              <a:t>Interference between A &amp; B</a:t>
+            <a:pPr marL="285750" indent="-285750">
+              <a:buFont typeface="Arial" panose="020B0604020202020204" pitchFamily="34" charset="0"/>
+              <a:buChar char="•"/>
+            </a:pPr>
+            <a:r>
+              <a:rPr lang="en-US" dirty="0"/>
+              <a:t>You need to make sure you are comparing "apples to apples".</a:t>
+            </a:r>
+          </a:p>
+          <a:p>
+            <a:pPr marL="285750" indent="-285750">
+              <a:buFont typeface="Arial" panose="020B0604020202020204" pitchFamily="34" charset="0"/>
+              <a:buChar char="•"/>
+            </a:pPr>
+            <a:endParaRPr lang="en-US" dirty="0"/>
+          </a:p>
+          <a:p>
+            <a:pPr marL="285750" indent="-285750">
+              <a:buFont typeface="Arial" panose="020B0604020202020204" pitchFamily="34" charset="0"/>
+              <a:buChar char="•"/>
+            </a:pPr>
+            <a:r>
+              <a:rPr lang="en-US" dirty="0"/>
+              <a:t>Buckets should be same size, same composition.</a:t>
+            </a:r>
+          </a:p>
+          <a:p>
+            <a:pPr marL="285750" indent="-285750">
+              <a:buFont typeface="Arial" panose="020B0604020202020204" pitchFamily="34" charset="0"/>
+              <a:buChar char="•"/>
+            </a:pPr>
+            <a:endParaRPr lang="en-US" dirty="0"/>
+          </a:p>
+          <a:p>
+            <a:pPr marL="285750" indent="-285750">
+              <a:buFont typeface="Arial" panose="020B0604020202020204" pitchFamily="34" charset="0"/>
+              <a:buChar char="•"/>
+            </a:pPr>
+            <a:r>
+              <a:rPr lang="en-US" dirty="0"/>
+              <a:t>Only include people who could've been affected.</a:t>
+            </a:r>
+          </a:p>
+          <a:p>
+            <a:pPr marL="285750" indent="-285750">
+              <a:buFont typeface="Arial" panose="020B0604020202020204" pitchFamily="34" charset="0"/>
+              <a:buChar char="•"/>
+            </a:pPr>
+            <a:endParaRPr lang="en-US" dirty="0"/>
+          </a:p>
+          <a:p>
+            <a:pPr marL="285750" indent="-285750">
+              <a:buFont typeface="Arial" panose="020B0604020202020204" pitchFamily="34" charset="0"/>
+              <a:buChar char="•"/>
+            </a:pPr>
+            <a:r>
+              <a:rPr lang="en-US" dirty="0"/>
+              <a:t>A/B split test may give different or opposite results for different segments.</a:t>
             </a:r>
           </a:p>
         </p:txBody>
       </p:sp>
-      <p:sp>
-        <p:nvSpPr>
-          <p:cNvPr id="7" name="TextBox 6">
+      <p:pic>
+        <p:nvPicPr>
+          <p:cNvPr id="1026" name="Picture 2" descr="Bias AB testing">
             <a:extLst>
               <a:ext uri="{FF2B5EF4-FFF2-40B4-BE49-F238E27FC236}">
-                <a16:creationId xmlns:a16="http://schemas.microsoft.com/office/drawing/2014/main" id="{A8ADE1E5-660F-B646-9B16-50348AFCB746}"/>
+                <a16:creationId xmlns:a16="http://schemas.microsoft.com/office/drawing/2014/main" id="{2D950953-48A6-B744-88C6-768ACA4DA70D}"/>
               </a:ext>
             </a:extLst>
           </p:cNvPr>
-          <p:cNvSpPr txBox="1"/>
+          <p:cNvPicPr>
+            <a:picLocks noChangeAspect="1" noChangeArrowheads="1"/>
+          </p:cNvPicPr>
           <p:nvPr/>
-        </p:nvSpPr>
-        <p:spPr>
+        </p:nvPicPr>
+        <p:blipFill>
+          <a:blip r:embed="rId2">
+            <a:extLst>
+              <a:ext uri="{28A0092B-C50C-407E-A947-70E740481C1C}">
+                <a14:useLocalDpi xmlns:a14="http://schemas.microsoft.com/office/drawing/2010/main"/>
+              </a:ext>
+            </a:extLst>
+          </a:blip>
+          <a:srcRect/>
+          <a:stretch>
+            <a:fillRect/>
+          </a:stretch>
+        </p:blipFill>
+        <p:spPr bwMode="auto">
           <a:xfrm>
-            <a:off x="7052405" y="1005056"/>
-            <a:ext cx="4404239" cy="830997"/>
+            <a:off x="2727325" y="3819107"/>
+            <a:ext cx="6737350" cy="2617316"/>
           </a:xfrm>
           <a:prstGeom prst="rect">
             <a:avLst/>
           </a:prstGeom>
           <a:noFill/>
+          <a:extLst>
+            <a:ext uri="{909E8E84-426E-40DD-AFC4-6F175D3DCCD1}">
+              <a14:hiddenFill xmlns:a14="http://schemas.microsoft.com/office/drawing/2010/main">
+                <a:solidFill>
+                  <a:srgbClr val="FFFFFF"/>
+                </a:solidFill>
+              </a14:hiddenFill>
+            </a:ext>
+          </a:extLst>
         </p:spPr>
-        <p:txBody>
-          <a:bodyPr wrap="square" rtlCol="0">
-            <a:spAutoFit/>
-          </a:bodyPr>
-          <a:lstStyle/>
-          <a:p>
-            <a:r>
-              <a:rPr lang="en-US" sz="2400" dirty="0"/>
-              <a:t>How to avoid interference? </a:t>
-            </a:r>
-          </a:p>
-          <a:p>
-            <a:r>
-              <a:rPr lang="en-US" sz="2400" dirty="0"/>
-              <a:t>How to avoid spillover?</a:t>
-            </a:r>
-          </a:p>
-        </p:txBody>
-      </p:sp>
-      <p:sp>
-        <p:nvSpPr>
-          <p:cNvPr id="8" name="TextBox 7">
-            <a:extLst>
-              <a:ext uri="{FF2B5EF4-FFF2-40B4-BE49-F238E27FC236}">
-                <a16:creationId xmlns:a16="http://schemas.microsoft.com/office/drawing/2014/main" id="{D89364DC-BBFC-A44C-A7F3-F9A0F21D1E95}"/>
-              </a:ext>
-            </a:extLst>
-          </p:cNvPr>
-          <p:cNvSpPr txBox="1"/>
-          <p:nvPr/>
-        </p:nvSpPr>
-        <p:spPr>
-          <a:xfrm>
-            <a:off x="6925457" y="2243073"/>
-            <a:ext cx="5146623" cy="1600438"/>
-          </a:xfrm>
-          <a:prstGeom prst="rect">
-            <a:avLst/>
-          </a:prstGeom>
-          <a:noFill/>
-        </p:spPr>
-        <p:txBody>
-          <a:bodyPr wrap="square" rtlCol="0">
-            <a:spAutoFit/>
-          </a:bodyPr>
-          <a:lstStyle/>
-          <a:p>
-            <a:pPr marL="285750" indent="-285750">
-              <a:buFont typeface="Arial" panose="020B0604020202020204" pitchFamily="34" charset="0"/>
-              <a:buChar char="•"/>
-            </a:pPr>
-            <a:r>
-              <a:rPr lang="en-US" sz="1400" dirty="0"/>
-              <a:t>Identify </a:t>
-            </a:r>
-            <a:r>
-              <a:rPr lang="en-US" sz="1400" b="1" dirty="0">
-                <a:solidFill>
-                  <a:srgbClr val="FF0000"/>
-                </a:solidFill>
-              </a:rPr>
-              <a:t>groups (clusters)</a:t>
-            </a:r>
-            <a:r>
-              <a:rPr lang="en-US" sz="1400" dirty="0"/>
-              <a:t> of users who are more likely to interact only withing the group. Split into A &amp; B groups.</a:t>
-            </a:r>
-          </a:p>
-          <a:p>
-            <a:endParaRPr lang="en-US" sz="1400" dirty="0"/>
-          </a:p>
-          <a:p>
-            <a:pPr marL="285750" indent="-285750">
-              <a:buFont typeface="Arial" panose="020B0604020202020204" pitchFamily="34" charset="0"/>
-              <a:buChar char="•"/>
-            </a:pPr>
-            <a:r>
-              <a:rPr lang="en-US" sz="1400" b="1" dirty="0">
-                <a:solidFill>
-                  <a:srgbClr val="FF0000"/>
-                </a:solidFill>
-              </a:rPr>
-              <a:t>Ego-cluster randomization </a:t>
-            </a:r>
-            <a:r>
-              <a:rPr lang="en-US" sz="1400" dirty="0"/>
-              <a:t>(</a:t>
-            </a:r>
-            <a:r>
-              <a:rPr lang="en-US" sz="1400" dirty="0" err="1"/>
-              <a:t>Linkedin</a:t>
-            </a:r>
-            <a:r>
-              <a:rPr lang="en-US" sz="1400" dirty="0"/>
-              <a:t>). Measuring the one-out network effect, meaning the effect of a user’s immediate connection’s treatment on that user, then each user either has the feature or does not.</a:t>
-            </a:r>
-          </a:p>
-        </p:txBody>
-      </p:sp>
-      <p:sp>
-        <p:nvSpPr>
-          <p:cNvPr id="2" name="TextBox 1">
-            <a:extLst>
-              <a:ext uri="{FF2B5EF4-FFF2-40B4-BE49-F238E27FC236}">
-                <a16:creationId xmlns:a16="http://schemas.microsoft.com/office/drawing/2014/main" id="{10DA02E6-5C7C-F347-B61D-9911EA3FE9CD}"/>
-              </a:ext>
-            </a:extLst>
-          </p:cNvPr>
-          <p:cNvSpPr txBox="1"/>
-          <p:nvPr/>
-        </p:nvSpPr>
-        <p:spPr>
-          <a:xfrm>
-            <a:off x="6925457" y="4037062"/>
-            <a:ext cx="5146623" cy="2031325"/>
-          </a:xfrm>
-          <a:prstGeom prst="rect">
-            <a:avLst/>
-          </a:prstGeom>
-          <a:noFill/>
-        </p:spPr>
-        <p:txBody>
-          <a:bodyPr wrap="square" rtlCol="0">
-            <a:spAutoFit/>
-          </a:bodyPr>
-          <a:lstStyle/>
-          <a:p>
-            <a:pPr marL="285750" indent="-285750">
-              <a:buFont typeface="Arial" panose="020B0604020202020204" pitchFamily="34" charset="0"/>
-              <a:buChar char="•"/>
-            </a:pPr>
-            <a:r>
-              <a:rPr lang="en-US" sz="1400" b="1" dirty="0">
-                <a:solidFill>
-                  <a:srgbClr val="FF0000"/>
-                </a:solidFill>
-              </a:rPr>
-              <a:t>Geo-based randomization</a:t>
-            </a:r>
-            <a:r>
-              <a:rPr lang="en-US" sz="1400" dirty="0"/>
-              <a:t>. For example A – in New York, B – in San Francisco Bay Area. This pitfall of this approach - each market is unique in certain ways through things such as the customer’s behavior, competitors, etc.</a:t>
-            </a:r>
-          </a:p>
-          <a:p>
-            <a:pPr marL="285750" indent="-285750">
-              <a:buFont typeface="Arial" panose="020B0604020202020204" pitchFamily="34" charset="0"/>
-              <a:buChar char="•"/>
-            </a:pPr>
-            <a:endParaRPr lang="en-US" sz="1400" dirty="0"/>
-          </a:p>
-          <a:p>
-            <a:pPr marL="285750" indent="-285750">
-              <a:buFont typeface="Arial" panose="020B0604020202020204" pitchFamily="34" charset="0"/>
-              <a:buChar char="•"/>
-            </a:pPr>
-            <a:r>
-              <a:rPr lang="en-US" sz="1400" b="1" dirty="0">
-                <a:solidFill>
-                  <a:srgbClr val="FF0000"/>
-                </a:solidFill>
-              </a:rPr>
-              <a:t>Time-based randomization</a:t>
-            </a:r>
-            <a:r>
-              <a:rPr lang="en-US" sz="1400" dirty="0"/>
-              <a:t>. We select a random time, for example, a day of a week, and assign all users to either A or B. It works when the treatment effect only lasts for a short amount of time. </a:t>
-            </a:r>
-          </a:p>
-        </p:txBody>
-      </p:sp>
+      </p:pic>
     </p:spTree>
     <p:extLst>
       <p:ext uri="{BB962C8B-B14F-4D97-AF65-F5344CB8AC3E}">
-        <p14:creationId xmlns:p14="http://schemas.microsoft.com/office/powerpoint/2010/main" val="2296993253"/>
+        <p14:creationId xmlns:p14="http://schemas.microsoft.com/office/powerpoint/2010/main" val="934612104"/>
       </p:ext>
     </p:extLst>
   </p:cSld>
@@ -9294,8 +10935,8 @@
         </p:nvSpPr>
         <p:spPr>
           <a:xfrm>
-            <a:off x="869427" y="743510"/>
-            <a:ext cx="6235909" cy="5755422"/>
+            <a:off x="74950" y="743510"/>
+            <a:ext cx="6257925" cy="4832092"/>
           </a:xfrm>
           <a:prstGeom prst="rect">
             <a:avLst/>
@@ -9310,43 +10951,121 @@
           <a:p>
             <a:r>
               <a:rPr lang="en-US" sz="1400" dirty="0"/>
-              <a:t>When there’s a change in the product, people react differently:</a:t>
+              <a:t>We randomly select users for A &amp; B groups.</a:t>
+            </a:r>
+          </a:p>
+          <a:p>
+            <a:r>
+              <a:rPr lang="en-US" sz="1400" dirty="0"/>
+              <a:t>We expect each user is independent and no interference between A &amp; B.</a:t>
+            </a:r>
+          </a:p>
+          <a:p>
+            <a:r>
+              <a:rPr lang="en-US" sz="1400" dirty="0"/>
+              <a:t>But in some situations there may be interference.</a:t>
+            </a:r>
+          </a:p>
+          <a:p>
+            <a:r>
+              <a:rPr lang="en-US" sz="1400" dirty="0"/>
+              <a:t>For example, for social media like Facebook, </a:t>
+            </a:r>
+            <a:r>
+              <a:rPr lang="en-US" sz="1400" dirty="0" err="1"/>
+              <a:t>Linkedin</a:t>
+            </a:r>
+            <a:r>
+              <a:rPr lang="en-US" sz="1400" dirty="0"/>
+              <a:t>, and Twitter,</a:t>
+            </a:r>
+          </a:p>
+          <a:p>
+            <a:r>
+              <a:rPr lang="en-US" sz="1400" dirty="0"/>
+              <a:t>or two-sided markets like Uber, Lyft, and Airbnb</a:t>
             </a:r>
           </a:p>
           <a:p>
             <a:endParaRPr lang="en-US" sz="1400" dirty="0"/>
           </a:p>
           <a:p>
-            <a:pPr marL="285750" indent="-285750">
-              <a:buFont typeface="Arial" panose="020B0604020202020204" pitchFamily="34" charset="0"/>
-              <a:buChar char="•"/>
-            </a:pPr>
+            <a:r>
+              <a:rPr lang="en-US" sz="1400" b="1" dirty="0">
+                <a:solidFill>
+                  <a:srgbClr val="FF0000"/>
+                </a:solidFill>
+              </a:rPr>
+              <a:t>One-sided markets</a:t>
+            </a:r>
+          </a:p>
+          <a:p>
             <a:r>
               <a:rPr lang="en-US" sz="1400" dirty="0"/>
-              <a:t>some people welcome changes (novelty effect) </a:t>
-            </a:r>
-          </a:p>
-          <a:p>
-            <a:pPr marL="285750" indent="-285750">
-              <a:buFont typeface="Arial" panose="020B0604020202020204" pitchFamily="34" charset="0"/>
-              <a:buChar char="•"/>
-            </a:pPr>
+              <a:t>For example, if you testing a new feature on Facebook, and get 1% difference between A &amp; B,</a:t>
+            </a:r>
+          </a:p>
+          <a:p>
             <a:r>
               <a:rPr lang="en-US" sz="1400" dirty="0"/>
-              <a:t>some people don't like change (primacy effect or change aversion)</a:t>
-            </a:r>
-          </a:p>
-          <a:p>
-            <a:pPr marL="285750" indent="-285750">
-              <a:buFont typeface="Arial" panose="020B0604020202020204" pitchFamily="34" charset="0"/>
-              <a:buChar char="•"/>
-            </a:pPr>
+              <a:t>what do you expect to happen after the new feature is launched to all users? </a:t>
+            </a:r>
+          </a:p>
+          <a:p>
+            <a:r>
+              <a:rPr lang="en-US" sz="1400" dirty="0"/>
+              <a:t>You can actually expect a value larger than 1%, because users’ behavior may be</a:t>
+            </a:r>
+          </a:p>
+          <a:p>
+            <a:r>
+              <a:rPr lang="en-US" sz="1400" dirty="0"/>
+              <a:t>impacted by that of people in their social circles. That is called a network effect. </a:t>
+            </a:r>
+          </a:p>
+          <a:p>
+            <a:r>
+              <a:rPr lang="en-US" sz="1400" dirty="0"/>
+              <a:t>It is "cooperation" effect.</a:t>
+            </a:r>
+          </a:p>
+          <a:p>
             <a:endParaRPr lang="en-US" sz="1400" dirty="0"/>
           </a:p>
           <a:p>
             <a:r>
+              <a:rPr lang="en-US" sz="1400" b="1" dirty="0">
+                <a:solidFill>
+                  <a:srgbClr val="FF0000"/>
+                </a:solidFill>
+              </a:rPr>
+              <a:t>For two-sided markets</a:t>
+            </a:r>
+          </a:p>
+          <a:p>
+            <a:r>
               <a:rPr lang="en-US" sz="1400" dirty="0"/>
-              <a:t>For example, the test may show positive effect simply because of the novelty effect (or exclusivity). The effect may completely disappear over time after rolling it out to everyone.</a:t>
+              <a:t>(Uber, Lyft, </a:t>
+            </a:r>
+            <a:r>
+              <a:rPr lang="en-US" sz="1400" dirty="0" err="1"/>
+              <a:t>ebay</a:t>
+            </a:r>
+            <a:r>
+              <a:rPr lang="en-US" sz="1400" dirty="0"/>
+              <a:t>, and Airbnb) the effect may be opposite ("competition" effect).</a:t>
+            </a:r>
+          </a:p>
+          <a:p>
+            <a:r>
+              <a:rPr lang="en-US" sz="1400" dirty="0"/>
+              <a:t>This is because resources are shared among control and treatment groups, </a:t>
+            </a:r>
+          </a:p>
+          <a:p>
+            <a:r>
+              <a:rPr lang="en-US" sz="1400" dirty="0"/>
+              <a:t>meaning that control and treatment groups will compete for the same resources.</a:t>
             </a:r>
           </a:p>
           <a:p>
@@ -9355,403 +11074,8 @@
           <a:p>
             <a:r>
               <a:rPr lang="en-US" sz="1400" dirty="0"/>
-              <a:t>How to deal with effects?</a:t>
-            </a:r>
-          </a:p>
-          <a:p>
-            <a:endParaRPr lang="en-US" sz="1400" dirty="0"/>
-          </a:p>
-          <a:p>
-            <a:r>
-              <a:rPr lang="en-US" sz="1400" dirty="0"/>
-              <a:t>Novelty effect and primacy effect only apply to existing users who react to change.</a:t>
-            </a:r>
-          </a:p>
-          <a:p>
-            <a:r>
-              <a:rPr lang="en-US" sz="1400" dirty="0"/>
-              <a:t>So we could run tests only on new users - to them these effects do not apply.</a:t>
-            </a:r>
-          </a:p>
-          <a:p>
-            <a:endParaRPr lang="en-US" sz="1400" dirty="0"/>
-          </a:p>
-          <a:p>
-            <a:r>
-              <a:rPr lang="en-US" sz="1400" dirty="0"/>
-              <a:t>Or we can compare "new" and "old" separately:</a:t>
-            </a:r>
-          </a:p>
-          <a:p>
-            <a:endParaRPr lang="en-US" sz="1400" dirty="0"/>
-          </a:p>
-          <a:p>
-            <a:r>
-              <a:rPr lang="en-US" sz="1200" dirty="0" err="1">
-                <a:solidFill>
-                  <a:srgbClr val="0070C0"/>
-                </a:solidFill>
-                <a:latin typeface="Menlo" panose="020B0609030804020204" pitchFamily="49" charset="0"/>
-                <a:ea typeface="Menlo" panose="020B0609030804020204" pitchFamily="49" charset="0"/>
-                <a:cs typeface="Menlo" panose="020B0609030804020204" pitchFamily="49" charset="0"/>
-              </a:rPr>
-              <a:t>A_new</a:t>
-            </a:r>
-            <a:r>
-              <a:rPr lang="en-US" sz="1200" dirty="0">
-                <a:solidFill>
-                  <a:srgbClr val="0070C0"/>
-                </a:solidFill>
-                <a:latin typeface="Menlo" panose="020B0609030804020204" pitchFamily="49" charset="0"/>
-                <a:ea typeface="Menlo" panose="020B0609030804020204" pitchFamily="49" charset="0"/>
-                <a:cs typeface="Menlo" panose="020B0609030804020204" pitchFamily="49" charset="0"/>
-              </a:rPr>
-              <a:t>       </a:t>
-            </a:r>
-            <a:r>
-              <a:rPr lang="en-US" sz="1200" dirty="0" err="1">
-                <a:solidFill>
-                  <a:srgbClr val="0070C0"/>
-                </a:solidFill>
-                <a:latin typeface="Menlo" panose="020B0609030804020204" pitchFamily="49" charset="0"/>
-                <a:ea typeface="Menlo" panose="020B0609030804020204" pitchFamily="49" charset="0"/>
-                <a:cs typeface="Menlo" panose="020B0609030804020204" pitchFamily="49" charset="0"/>
-              </a:rPr>
-              <a:t>B_new</a:t>
-            </a:r>
-            <a:endParaRPr lang="en-US" sz="1200" dirty="0">
-              <a:solidFill>
-                <a:srgbClr val="0070C0"/>
-              </a:solidFill>
-              <a:latin typeface="Menlo" panose="020B0609030804020204" pitchFamily="49" charset="0"/>
-              <a:ea typeface="Menlo" panose="020B0609030804020204" pitchFamily="49" charset="0"/>
-              <a:cs typeface="Menlo" panose="020B0609030804020204" pitchFamily="49" charset="0"/>
-            </a:endParaRPr>
-          </a:p>
-          <a:p>
-            <a:r>
-              <a:rPr lang="en-US" sz="1200" dirty="0" err="1">
-                <a:solidFill>
-                  <a:srgbClr val="0070C0"/>
-                </a:solidFill>
-                <a:latin typeface="Menlo" panose="020B0609030804020204" pitchFamily="49" charset="0"/>
-                <a:ea typeface="Menlo" panose="020B0609030804020204" pitchFamily="49" charset="0"/>
-                <a:cs typeface="Menlo" panose="020B0609030804020204" pitchFamily="49" charset="0"/>
-              </a:rPr>
-              <a:t>A_old</a:t>
-            </a:r>
-            <a:r>
-              <a:rPr lang="en-US" sz="1200" dirty="0">
-                <a:solidFill>
-                  <a:srgbClr val="0070C0"/>
-                </a:solidFill>
-                <a:latin typeface="Menlo" panose="020B0609030804020204" pitchFamily="49" charset="0"/>
-                <a:ea typeface="Menlo" panose="020B0609030804020204" pitchFamily="49" charset="0"/>
-                <a:cs typeface="Menlo" panose="020B0609030804020204" pitchFamily="49" charset="0"/>
-              </a:rPr>
-              <a:t>       </a:t>
-            </a:r>
-            <a:r>
-              <a:rPr lang="en-US" sz="1200" dirty="0" err="1">
-                <a:solidFill>
-                  <a:srgbClr val="0070C0"/>
-                </a:solidFill>
-                <a:latin typeface="Menlo" panose="020B0609030804020204" pitchFamily="49" charset="0"/>
-                <a:ea typeface="Menlo" panose="020B0609030804020204" pitchFamily="49" charset="0"/>
-                <a:cs typeface="Menlo" panose="020B0609030804020204" pitchFamily="49" charset="0"/>
-              </a:rPr>
-              <a:t>B_old</a:t>
-            </a:r>
-            <a:endParaRPr lang="en-US" sz="1200" dirty="0">
-              <a:solidFill>
-                <a:srgbClr val="0070C0"/>
-              </a:solidFill>
-              <a:latin typeface="Menlo" panose="020B0609030804020204" pitchFamily="49" charset="0"/>
-              <a:ea typeface="Menlo" panose="020B0609030804020204" pitchFamily="49" charset="0"/>
-              <a:cs typeface="Menlo" panose="020B0609030804020204" pitchFamily="49" charset="0"/>
-            </a:endParaRPr>
-          </a:p>
-          <a:p>
-            <a:endParaRPr lang="en-US" sz="1200" dirty="0">
-              <a:solidFill>
-                <a:srgbClr val="0070C0"/>
-              </a:solidFill>
-              <a:latin typeface="Menlo" panose="020B0609030804020204" pitchFamily="49" charset="0"/>
-              <a:ea typeface="Menlo" panose="020B0609030804020204" pitchFamily="49" charset="0"/>
-              <a:cs typeface="Menlo" panose="020B0609030804020204" pitchFamily="49" charset="0"/>
-            </a:endParaRPr>
-          </a:p>
-          <a:p>
-            <a:r>
-              <a:rPr lang="en-US" sz="1200" dirty="0">
-                <a:solidFill>
-                  <a:srgbClr val="0070C0"/>
-                </a:solidFill>
-                <a:latin typeface="Menlo" panose="020B0609030804020204" pitchFamily="49" charset="0"/>
-                <a:ea typeface="Menlo" panose="020B0609030804020204" pitchFamily="49" charset="0"/>
-                <a:cs typeface="Menlo" panose="020B0609030804020204" pitchFamily="49" charset="0"/>
-              </a:rPr>
-              <a:t>We can compare:</a:t>
-            </a:r>
-          </a:p>
-          <a:p>
-            <a:endParaRPr lang="en-US" sz="1200" dirty="0">
-              <a:solidFill>
-                <a:srgbClr val="0070C0"/>
-              </a:solidFill>
-              <a:latin typeface="Menlo" panose="020B0609030804020204" pitchFamily="49" charset="0"/>
-              <a:ea typeface="Menlo" panose="020B0609030804020204" pitchFamily="49" charset="0"/>
-              <a:cs typeface="Menlo" panose="020B0609030804020204" pitchFamily="49" charset="0"/>
-            </a:endParaRPr>
-          </a:p>
-          <a:p>
-            <a:r>
-              <a:rPr lang="en-US" sz="1200" dirty="0">
-                <a:solidFill>
-                  <a:srgbClr val="0070C0"/>
-                </a:solidFill>
-                <a:latin typeface="Menlo" panose="020B0609030804020204" pitchFamily="49" charset="0"/>
-                <a:ea typeface="Menlo" panose="020B0609030804020204" pitchFamily="49" charset="0"/>
-                <a:cs typeface="Menlo" panose="020B0609030804020204" pitchFamily="49" charset="0"/>
-              </a:rPr>
-              <a:t>   A      :  B</a:t>
-            </a:r>
-          </a:p>
-          <a:p>
-            <a:endParaRPr lang="en-US" sz="1200" dirty="0">
-              <a:solidFill>
-                <a:srgbClr val="0070C0"/>
-              </a:solidFill>
-              <a:latin typeface="Menlo" panose="020B0609030804020204" pitchFamily="49" charset="0"/>
-              <a:ea typeface="Menlo" panose="020B0609030804020204" pitchFamily="49" charset="0"/>
-              <a:cs typeface="Menlo" panose="020B0609030804020204" pitchFamily="49" charset="0"/>
-            </a:endParaRPr>
-          </a:p>
-          <a:p>
-            <a:r>
-              <a:rPr lang="en-US" sz="1200" dirty="0">
-                <a:solidFill>
-                  <a:srgbClr val="0070C0"/>
-                </a:solidFill>
-                <a:latin typeface="Menlo" panose="020B0609030804020204" pitchFamily="49" charset="0"/>
-                <a:ea typeface="Menlo" panose="020B0609030804020204" pitchFamily="49" charset="0"/>
-                <a:cs typeface="Menlo" panose="020B0609030804020204" pitchFamily="49" charset="0"/>
-              </a:rPr>
-              <a:t>   </a:t>
-            </a:r>
-            <a:r>
-              <a:rPr lang="en-US" sz="1200" dirty="0" err="1">
-                <a:solidFill>
-                  <a:srgbClr val="0070C0"/>
-                </a:solidFill>
-                <a:latin typeface="Menlo" panose="020B0609030804020204" pitchFamily="49" charset="0"/>
-                <a:ea typeface="Menlo" panose="020B0609030804020204" pitchFamily="49" charset="0"/>
-                <a:cs typeface="Menlo" panose="020B0609030804020204" pitchFamily="49" charset="0"/>
-              </a:rPr>
-              <a:t>A_new</a:t>
-            </a:r>
-            <a:r>
-              <a:rPr lang="en-US" sz="1200" dirty="0">
-                <a:solidFill>
-                  <a:srgbClr val="0070C0"/>
-                </a:solidFill>
-                <a:latin typeface="Menlo" panose="020B0609030804020204" pitchFamily="49" charset="0"/>
-                <a:ea typeface="Menlo" panose="020B0609030804020204" pitchFamily="49" charset="0"/>
-                <a:cs typeface="Menlo" panose="020B0609030804020204" pitchFamily="49" charset="0"/>
-              </a:rPr>
-              <a:t>  :  </a:t>
-            </a:r>
-            <a:r>
-              <a:rPr lang="en-US" sz="1200" dirty="0" err="1">
-                <a:solidFill>
-                  <a:srgbClr val="0070C0"/>
-                </a:solidFill>
-                <a:latin typeface="Menlo" panose="020B0609030804020204" pitchFamily="49" charset="0"/>
-                <a:ea typeface="Menlo" panose="020B0609030804020204" pitchFamily="49" charset="0"/>
-                <a:cs typeface="Menlo" panose="020B0609030804020204" pitchFamily="49" charset="0"/>
-              </a:rPr>
-              <a:t>B_new</a:t>
-            </a:r>
-            <a:endParaRPr lang="en-US" sz="1200" dirty="0">
-              <a:solidFill>
-                <a:srgbClr val="0070C0"/>
-              </a:solidFill>
-              <a:latin typeface="Menlo" panose="020B0609030804020204" pitchFamily="49" charset="0"/>
-              <a:ea typeface="Menlo" panose="020B0609030804020204" pitchFamily="49" charset="0"/>
-              <a:cs typeface="Menlo" panose="020B0609030804020204" pitchFamily="49" charset="0"/>
-            </a:endParaRPr>
-          </a:p>
-          <a:p>
-            <a:r>
-              <a:rPr lang="en-US" sz="1200" dirty="0">
-                <a:solidFill>
-                  <a:srgbClr val="0070C0"/>
-                </a:solidFill>
-                <a:latin typeface="Menlo" panose="020B0609030804020204" pitchFamily="49" charset="0"/>
-                <a:ea typeface="Menlo" panose="020B0609030804020204" pitchFamily="49" charset="0"/>
-                <a:cs typeface="Menlo" panose="020B0609030804020204" pitchFamily="49" charset="0"/>
-              </a:rPr>
-              <a:t>   </a:t>
-            </a:r>
-            <a:r>
-              <a:rPr lang="en-US" sz="1200" dirty="0" err="1">
-                <a:solidFill>
-                  <a:srgbClr val="0070C0"/>
-                </a:solidFill>
-                <a:latin typeface="Menlo" panose="020B0609030804020204" pitchFamily="49" charset="0"/>
-                <a:ea typeface="Menlo" panose="020B0609030804020204" pitchFamily="49" charset="0"/>
-                <a:cs typeface="Menlo" panose="020B0609030804020204" pitchFamily="49" charset="0"/>
-              </a:rPr>
-              <a:t>A_old</a:t>
-            </a:r>
-            <a:r>
-              <a:rPr lang="en-US" sz="1200" dirty="0">
-                <a:solidFill>
-                  <a:srgbClr val="0070C0"/>
-                </a:solidFill>
-                <a:latin typeface="Menlo" panose="020B0609030804020204" pitchFamily="49" charset="0"/>
-                <a:ea typeface="Menlo" panose="020B0609030804020204" pitchFamily="49" charset="0"/>
-                <a:cs typeface="Menlo" panose="020B0609030804020204" pitchFamily="49" charset="0"/>
-              </a:rPr>
-              <a:t>  :  </a:t>
-            </a:r>
-            <a:r>
-              <a:rPr lang="en-US" sz="1200" dirty="0" err="1">
-                <a:solidFill>
-                  <a:srgbClr val="0070C0"/>
-                </a:solidFill>
-                <a:latin typeface="Menlo" panose="020B0609030804020204" pitchFamily="49" charset="0"/>
-                <a:ea typeface="Menlo" panose="020B0609030804020204" pitchFamily="49" charset="0"/>
-                <a:cs typeface="Menlo" panose="020B0609030804020204" pitchFamily="49" charset="0"/>
-              </a:rPr>
-              <a:t>B_old</a:t>
-            </a:r>
-            <a:endParaRPr lang="en-US" sz="1200" dirty="0">
-              <a:solidFill>
-                <a:srgbClr val="0070C0"/>
-              </a:solidFill>
-              <a:latin typeface="Menlo" panose="020B0609030804020204" pitchFamily="49" charset="0"/>
-              <a:ea typeface="Menlo" panose="020B0609030804020204" pitchFamily="49" charset="0"/>
-              <a:cs typeface="Menlo" panose="020B0609030804020204" pitchFamily="49" charset="0"/>
-            </a:endParaRPr>
-          </a:p>
-          <a:p>
-            <a:endParaRPr lang="en-US" sz="1200" dirty="0">
-              <a:solidFill>
-                <a:srgbClr val="0070C0"/>
-              </a:solidFill>
-              <a:latin typeface="Menlo" panose="020B0609030804020204" pitchFamily="49" charset="0"/>
-              <a:ea typeface="Menlo" panose="020B0609030804020204" pitchFamily="49" charset="0"/>
-              <a:cs typeface="Menlo" panose="020B0609030804020204" pitchFamily="49" charset="0"/>
-            </a:endParaRPr>
-          </a:p>
-          <a:p>
-            <a:r>
-              <a:rPr lang="en-US" sz="1200" dirty="0">
-                <a:solidFill>
-                  <a:srgbClr val="0070C0"/>
-                </a:solidFill>
-                <a:latin typeface="Menlo" panose="020B0609030804020204" pitchFamily="49" charset="0"/>
-                <a:ea typeface="Menlo" panose="020B0609030804020204" pitchFamily="49" charset="0"/>
-                <a:cs typeface="Menlo" panose="020B0609030804020204" pitchFamily="49" charset="0"/>
-              </a:rPr>
-              <a:t>   </a:t>
-            </a:r>
-            <a:r>
-              <a:rPr lang="en-US" sz="1200" dirty="0" err="1">
-                <a:solidFill>
-                  <a:srgbClr val="0070C0"/>
-                </a:solidFill>
-                <a:latin typeface="Menlo" panose="020B0609030804020204" pitchFamily="49" charset="0"/>
-                <a:ea typeface="Menlo" panose="020B0609030804020204" pitchFamily="49" charset="0"/>
-                <a:cs typeface="Menlo" panose="020B0609030804020204" pitchFamily="49" charset="0"/>
-              </a:rPr>
-              <a:t>A_new</a:t>
-            </a:r>
-            <a:r>
-              <a:rPr lang="en-US" sz="1200" dirty="0">
-                <a:solidFill>
-                  <a:srgbClr val="0070C0"/>
-                </a:solidFill>
-                <a:latin typeface="Menlo" panose="020B0609030804020204" pitchFamily="49" charset="0"/>
-                <a:ea typeface="Menlo" panose="020B0609030804020204" pitchFamily="49" charset="0"/>
-                <a:cs typeface="Menlo" panose="020B0609030804020204" pitchFamily="49" charset="0"/>
-              </a:rPr>
-              <a:t>  :  </a:t>
-            </a:r>
-            <a:r>
-              <a:rPr lang="en-US" sz="1200" dirty="0" err="1">
-                <a:solidFill>
-                  <a:srgbClr val="0070C0"/>
-                </a:solidFill>
-                <a:latin typeface="Menlo" panose="020B0609030804020204" pitchFamily="49" charset="0"/>
-                <a:ea typeface="Menlo" panose="020B0609030804020204" pitchFamily="49" charset="0"/>
-                <a:cs typeface="Menlo" panose="020B0609030804020204" pitchFamily="49" charset="0"/>
-              </a:rPr>
-              <a:t>A_old</a:t>
-            </a:r>
-            <a:endParaRPr lang="en-US" sz="1200" dirty="0">
-              <a:solidFill>
-                <a:srgbClr val="0070C0"/>
-              </a:solidFill>
-              <a:latin typeface="Menlo" panose="020B0609030804020204" pitchFamily="49" charset="0"/>
-              <a:ea typeface="Menlo" panose="020B0609030804020204" pitchFamily="49" charset="0"/>
-              <a:cs typeface="Menlo" panose="020B0609030804020204" pitchFamily="49" charset="0"/>
-            </a:endParaRPr>
-          </a:p>
-          <a:p>
-            <a:r>
-              <a:rPr lang="en-US" sz="1200" dirty="0">
-                <a:solidFill>
-                  <a:srgbClr val="0070C0"/>
-                </a:solidFill>
-                <a:latin typeface="Menlo" panose="020B0609030804020204" pitchFamily="49" charset="0"/>
-                <a:ea typeface="Menlo" panose="020B0609030804020204" pitchFamily="49" charset="0"/>
-                <a:cs typeface="Menlo" panose="020B0609030804020204" pitchFamily="49" charset="0"/>
-              </a:rPr>
-              <a:t>   </a:t>
-            </a:r>
-            <a:r>
-              <a:rPr lang="en-US" sz="1200" dirty="0" err="1">
-                <a:solidFill>
-                  <a:srgbClr val="0070C0"/>
-                </a:solidFill>
-                <a:latin typeface="Menlo" panose="020B0609030804020204" pitchFamily="49" charset="0"/>
-                <a:ea typeface="Menlo" panose="020B0609030804020204" pitchFamily="49" charset="0"/>
-                <a:cs typeface="Menlo" panose="020B0609030804020204" pitchFamily="49" charset="0"/>
-              </a:rPr>
-              <a:t>B_new</a:t>
-            </a:r>
-            <a:r>
-              <a:rPr lang="en-US" sz="1200" dirty="0">
-                <a:solidFill>
-                  <a:srgbClr val="0070C0"/>
-                </a:solidFill>
-                <a:latin typeface="Menlo" panose="020B0609030804020204" pitchFamily="49" charset="0"/>
-                <a:ea typeface="Menlo" panose="020B0609030804020204" pitchFamily="49" charset="0"/>
-                <a:cs typeface="Menlo" panose="020B0609030804020204" pitchFamily="49" charset="0"/>
-              </a:rPr>
-              <a:t>  :  </a:t>
-            </a:r>
-            <a:r>
-              <a:rPr lang="en-US" sz="1200" dirty="0" err="1">
-                <a:solidFill>
-                  <a:srgbClr val="0070C0"/>
-                </a:solidFill>
-                <a:latin typeface="Menlo" panose="020B0609030804020204" pitchFamily="49" charset="0"/>
-                <a:ea typeface="Menlo" panose="020B0609030804020204" pitchFamily="49" charset="0"/>
-                <a:cs typeface="Menlo" panose="020B0609030804020204" pitchFamily="49" charset="0"/>
-              </a:rPr>
-              <a:t>B_old</a:t>
-            </a:r>
-            <a:endParaRPr lang="en-US" sz="1200" dirty="0">
-              <a:solidFill>
-                <a:srgbClr val="0070C0"/>
-              </a:solidFill>
-              <a:latin typeface="Menlo" panose="020B0609030804020204" pitchFamily="49" charset="0"/>
-              <a:ea typeface="Menlo" panose="020B0609030804020204" pitchFamily="49" charset="0"/>
-              <a:cs typeface="Menlo" panose="020B0609030804020204" pitchFamily="49" charset="0"/>
-            </a:endParaRPr>
+              <a:t>Unlike social networks where the treatment effect underestimates the real benefit of a new product, in two-sided markets, the treatment effect overestimates the actual effect.</a:t>
+            </a:r>
           </a:p>
         </p:txBody>
       </p:sp>
@@ -9785,6 +11109,771 @@
           <a:p>
             <a:r>
               <a:rPr lang="en-US" sz="2800" b="1" dirty="0"/>
+              <a:t>Interference between A &amp; B</a:t>
+            </a:r>
+          </a:p>
+        </p:txBody>
+      </p:sp>
+      <p:sp>
+        <p:nvSpPr>
+          <p:cNvPr id="7" name="TextBox 6">
+            <a:extLst>
+              <a:ext uri="{FF2B5EF4-FFF2-40B4-BE49-F238E27FC236}">
+                <a16:creationId xmlns:a16="http://schemas.microsoft.com/office/drawing/2014/main" id="{A8ADE1E5-660F-B646-9B16-50348AFCB746}"/>
+              </a:ext>
+            </a:extLst>
+          </p:cNvPr>
+          <p:cNvSpPr txBox="1"/>
+          <p:nvPr/>
+        </p:nvSpPr>
+        <p:spPr>
+          <a:xfrm>
+            <a:off x="7052405" y="1005056"/>
+            <a:ext cx="4404239" cy="830997"/>
+          </a:xfrm>
+          <a:prstGeom prst="rect">
+            <a:avLst/>
+          </a:prstGeom>
+          <a:noFill/>
+        </p:spPr>
+        <p:txBody>
+          <a:bodyPr wrap="square" rtlCol="0">
+            <a:spAutoFit/>
+          </a:bodyPr>
+          <a:lstStyle/>
+          <a:p>
+            <a:r>
+              <a:rPr lang="en-US" sz="2400" dirty="0"/>
+              <a:t>How to avoid interference? </a:t>
+            </a:r>
+          </a:p>
+          <a:p>
+            <a:r>
+              <a:rPr lang="en-US" sz="2400" dirty="0"/>
+              <a:t>How to avoid spillover?</a:t>
+            </a:r>
+          </a:p>
+        </p:txBody>
+      </p:sp>
+      <p:sp>
+        <p:nvSpPr>
+          <p:cNvPr id="8" name="TextBox 7">
+            <a:extLst>
+              <a:ext uri="{FF2B5EF4-FFF2-40B4-BE49-F238E27FC236}">
+                <a16:creationId xmlns:a16="http://schemas.microsoft.com/office/drawing/2014/main" id="{D89364DC-BBFC-A44C-A7F3-F9A0F21D1E95}"/>
+              </a:ext>
+            </a:extLst>
+          </p:cNvPr>
+          <p:cNvSpPr txBox="1"/>
+          <p:nvPr/>
+        </p:nvSpPr>
+        <p:spPr>
+          <a:xfrm>
+            <a:off x="6925457" y="2243073"/>
+            <a:ext cx="5146623" cy="1600438"/>
+          </a:xfrm>
+          <a:prstGeom prst="rect">
+            <a:avLst/>
+          </a:prstGeom>
+          <a:noFill/>
+        </p:spPr>
+        <p:txBody>
+          <a:bodyPr wrap="square" rtlCol="0">
+            <a:spAutoFit/>
+          </a:bodyPr>
+          <a:lstStyle/>
+          <a:p>
+            <a:pPr marL="285750" indent="-285750">
+              <a:buFont typeface="Arial" panose="020B0604020202020204" pitchFamily="34" charset="0"/>
+              <a:buChar char="•"/>
+            </a:pPr>
+            <a:r>
+              <a:rPr lang="en-US" sz="1400" dirty="0"/>
+              <a:t>Identify </a:t>
+            </a:r>
+            <a:r>
+              <a:rPr lang="en-US" sz="1400" b="1" dirty="0">
+                <a:solidFill>
+                  <a:srgbClr val="FF0000"/>
+                </a:solidFill>
+              </a:rPr>
+              <a:t>groups (clusters)</a:t>
+            </a:r>
+            <a:r>
+              <a:rPr lang="en-US" sz="1400" dirty="0"/>
+              <a:t> of users who are more likely to interact only withing the group. Split into A &amp; B groups.</a:t>
+            </a:r>
+          </a:p>
+          <a:p>
+            <a:endParaRPr lang="en-US" sz="1400" dirty="0"/>
+          </a:p>
+          <a:p>
+            <a:pPr marL="285750" indent="-285750">
+              <a:buFont typeface="Arial" panose="020B0604020202020204" pitchFamily="34" charset="0"/>
+              <a:buChar char="•"/>
+            </a:pPr>
+            <a:r>
+              <a:rPr lang="en-US" sz="1400" b="1" dirty="0">
+                <a:solidFill>
+                  <a:srgbClr val="FF0000"/>
+                </a:solidFill>
+              </a:rPr>
+              <a:t>Ego-cluster randomization </a:t>
+            </a:r>
+            <a:r>
+              <a:rPr lang="en-US" sz="1400" dirty="0"/>
+              <a:t>(</a:t>
+            </a:r>
+            <a:r>
+              <a:rPr lang="en-US" sz="1400" dirty="0" err="1"/>
+              <a:t>Linkedin</a:t>
+            </a:r>
+            <a:r>
+              <a:rPr lang="en-US" sz="1400" dirty="0"/>
+              <a:t>). Measuring the one-out network effect, meaning the effect of a user’s immediate connection’s treatment on that user, then each user either has the feature or does not.</a:t>
+            </a:r>
+          </a:p>
+        </p:txBody>
+      </p:sp>
+      <p:sp>
+        <p:nvSpPr>
+          <p:cNvPr id="2" name="TextBox 1">
+            <a:extLst>
+              <a:ext uri="{FF2B5EF4-FFF2-40B4-BE49-F238E27FC236}">
+                <a16:creationId xmlns:a16="http://schemas.microsoft.com/office/drawing/2014/main" id="{10DA02E6-5C7C-F347-B61D-9911EA3FE9CD}"/>
+              </a:ext>
+            </a:extLst>
+          </p:cNvPr>
+          <p:cNvSpPr txBox="1"/>
+          <p:nvPr/>
+        </p:nvSpPr>
+        <p:spPr>
+          <a:xfrm>
+            <a:off x="6925457" y="4037062"/>
+            <a:ext cx="5146623" cy="2031325"/>
+          </a:xfrm>
+          <a:prstGeom prst="rect">
+            <a:avLst/>
+          </a:prstGeom>
+          <a:noFill/>
+        </p:spPr>
+        <p:txBody>
+          <a:bodyPr wrap="square" rtlCol="0">
+            <a:spAutoFit/>
+          </a:bodyPr>
+          <a:lstStyle/>
+          <a:p>
+            <a:pPr marL="285750" indent="-285750">
+              <a:buFont typeface="Arial" panose="020B0604020202020204" pitchFamily="34" charset="0"/>
+              <a:buChar char="•"/>
+            </a:pPr>
+            <a:r>
+              <a:rPr lang="en-US" sz="1400" b="1" dirty="0">
+                <a:solidFill>
+                  <a:srgbClr val="FF0000"/>
+                </a:solidFill>
+              </a:rPr>
+              <a:t>Geo-based randomization</a:t>
+            </a:r>
+            <a:r>
+              <a:rPr lang="en-US" sz="1400" dirty="0"/>
+              <a:t>. For example A – in New York, B – in San Francisco Bay Area. This pitfall of this approach - each market is unique in certain ways through things such as the customer’s behavior, competitors, etc.</a:t>
+            </a:r>
+          </a:p>
+          <a:p>
+            <a:pPr marL="285750" indent="-285750">
+              <a:buFont typeface="Arial" panose="020B0604020202020204" pitchFamily="34" charset="0"/>
+              <a:buChar char="•"/>
+            </a:pPr>
+            <a:endParaRPr lang="en-US" sz="1400" dirty="0"/>
+          </a:p>
+          <a:p>
+            <a:pPr marL="285750" indent="-285750">
+              <a:buFont typeface="Arial" panose="020B0604020202020204" pitchFamily="34" charset="0"/>
+              <a:buChar char="•"/>
+            </a:pPr>
+            <a:r>
+              <a:rPr lang="en-US" sz="1400" b="1" dirty="0">
+                <a:solidFill>
+                  <a:srgbClr val="FF0000"/>
+                </a:solidFill>
+              </a:rPr>
+              <a:t>Time-based randomization</a:t>
+            </a:r>
+            <a:r>
+              <a:rPr lang="en-US" sz="1400" dirty="0"/>
+              <a:t>. We select a random time, for example, a day of a week, and assign all users to either A or B. It works when the treatment effect only lasts for a short amount of time. </a:t>
+            </a:r>
+          </a:p>
+        </p:txBody>
+      </p:sp>
+    </p:spTree>
+    <p:extLst>
+      <p:ext uri="{BB962C8B-B14F-4D97-AF65-F5344CB8AC3E}">
+        <p14:creationId xmlns:p14="http://schemas.microsoft.com/office/powerpoint/2010/main" val="2296993253"/>
+      </p:ext>
+    </p:extLst>
+  </p:cSld>
+  <p:clrMapOvr>
+    <a:masterClrMapping/>
+  </p:clrMapOvr>
+</p:sld>
+</file>
+
+<file path=ppt/slides/slide8.xml><?xml version="1.0" encoding="utf-8"?>
+<p:sld xmlns:a="http://schemas.openxmlformats.org/drawingml/2006/main" xmlns:r="http://schemas.openxmlformats.org/officeDocument/2006/relationships" xmlns:p="http://schemas.openxmlformats.org/presentationml/2006/main">
+  <p:cSld>
+    <p:spTree>
+      <p:nvGrpSpPr>
+        <p:cNvPr id="1" name=""/>
+        <p:cNvGrpSpPr/>
+        <p:nvPr/>
+      </p:nvGrpSpPr>
+      <p:grpSpPr>
+        <a:xfrm>
+          <a:off x="0" y="0"/>
+          <a:ext cx="0" cy="0"/>
+          <a:chOff x="0" y="0"/>
+          <a:chExt cx="0" cy="0"/>
+        </a:xfrm>
+      </p:grpSpPr>
+      <p:sp>
+        <p:nvSpPr>
+          <p:cNvPr id="5" name="TextBox 4">
+            <a:extLst>
+              <a:ext uri="{FF2B5EF4-FFF2-40B4-BE49-F238E27FC236}">
+                <a16:creationId xmlns:a16="http://schemas.microsoft.com/office/drawing/2014/main" id="{9ECF6344-25D1-214F-A75E-373DADD0E10F}"/>
+              </a:ext>
+            </a:extLst>
+          </p:cNvPr>
+          <p:cNvSpPr txBox="1"/>
+          <p:nvPr/>
+        </p:nvSpPr>
+        <p:spPr>
+          <a:xfrm>
+            <a:off x="13846629" y="6673929"/>
+            <a:ext cx="184731" cy="369332"/>
+          </a:xfrm>
+          <a:prstGeom prst="rect">
+            <a:avLst/>
+          </a:prstGeom>
+          <a:noFill/>
+        </p:spPr>
+        <p:txBody>
+          <a:bodyPr wrap="none" rtlCol="0">
+            <a:spAutoFit/>
+          </a:bodyPr>
+          <a:lstStyle/>
+          <a:p>
+            <a:endParaRPr lang="en-US" dirty="0"/>
+          </a:p>
+        </p:txBody>
+      </p:sp>
+      <p:sp>
+        <p:nvSpPr>
+          <p:cNvPr id="10" name="TextBox 9">
+            <a:extLst>
+              <a:ext uri="{FF2B5EF4-FFF2-40B4-BE49-F238E27FC236}">
+                <a16:creationId xmlns:a16="http://schemas.microsoft.com/office/drawing/2014/main" id="{F715B8E9-39AB-D945-BE08-302996794FCE}"/>
+              </a:ext>
+            </a:extLst>
+          </p:cNvPr>
+          <p:cNvSpPr txBox="1"/>
+          <p:nvPr/>
+        </p:nvSpPr>
+        <p:spPr>
+          <a:xfrm>
+            <a:off x="869427" y="743510"/>
+            <a:ext cx="6235909" cy="5755422"/>
+          </a:xfrm>
+          <a:prstGeom prst="rect">
+            <a:avLst/>
+          </a:prstGeom>
+          <a:noFill/>
+        </p:spPr>
+        <p:txBody>
+          <a:bodyPr wrap="square" rtlCol="0">
+            <a:spAutoFit/>
+          </a:bodyPr>
+          <a:lstStyle/>
+          <a:p>
+            <a:r>
+              <a:rPr lang="en-US" sz="1400" dirty="0"/>
+              <a:t>When there’s a change in the product, people react differently:</a:t>
+            </a:r>
+          </a:p>
+          <a:p>
+            <a:endParaRPr lang="en-US" sz="1400" dirty="0"/>
+          </a:p>
+          <a:p>
+            <a:pPr marL="285750" indent="-285750">
+              <a:buFont typeface="Arial" panose="020B0604020202020204" pitchFamily="34" charset="0"/>
+              <a:buChar char="•"/>
+            </a:pPr>
+            <a:r>
+              <a:rPr lang="en-US" sz="1400" dirty="0"/>
+              <a:t>some people welcome changes (novelty effect) </a:t>
+            </a:r>
+          </a:p>
+          <a:p>
+            <a:pPr marL="285750" indent="-285750">
+              <a:buFont typeface="Arial" panose="020B0604020202020204" pitchFamily="34" charset="0"/>
+              <a:buChar char="•"/>
+            </a:pPr>
+            <a:r>
+              <a:rPr lang="en-US" sz="1400" dirty="0"/>
+              <a:t>some people don't like change (primacy effect or change aversion)</a:t>
+            </a:r>
+          </a:p>
+          <a:p>
+            <a:pPr marL="285750" indent="-285750">
+              <a:buFont typeface="Arial" panose="020B0604020202020204" pitchFamily="34" charset="0"/>
+              <a:buChar char="•"/>
+            </a:pPr>
+            <a:endParaRPr lang="en-US" sz="1400" dirty="0"/>
+          </a:p>
+          <a:p>
+            <a:r>
+              <a:rPr lang="en-US" sz="1400" dirty="0"/>
+              <a:t>For example, the test may show positive effect simply because of the novelty effect (or exclusivity). The effect may completely disappear over time after rolling it out to everyone.</a:t>
+            </a:r>
+          </a:p>
+          <a:p>
+            <a:endParaRPr lang="en-US" sz="1400" dirty="0"/>
+          </a:p>
+          <a:p>
+            <a:r>
+              <a:rPr lang="en-US" sz="1400" dirty="0"/>
+              <a:t>How to deal with effects?</a:t>
+            </a:r>
+          </a:p>
+          <a:p>
+            <a:endParaRPr lang="en-US" sz="1400" dirty="0"/>
+          </a:p>
+          <a:p>
+            <a:r>
+              <a:rPr lang="en-US" sz="1400" dirty="0"/>
+              <a:t>Novelty effect and primacy effect only apply to existing users who react to change.</a:t>
+            </a:r>
+          </a:p>
+          <a:p>
+            <a:r>
+              <a:rPr lang="en-US" sz="1400" dirty="0"/>
+              <a:t>So we could run tests only on new users - to them these effects do not apply.</a:t>
+            </a:r>
+          </a:p>
+          <a:p>
+            <a:endParaRPr lang="en-US" sz="1400" dirty="0"/>
+          </a:p>
+          <a:p>
+            <a:r>
+              <a:rPr lang="en-US" sz="1400" dirty="0"/>
+              <a:t>Or we can compare "new" and "old" separately:</a:t>
+            </a:r>
+          </a:p>
+          <a:p>
+            <a:endParaRPr lang="en-US" sz="1400" dirty="0"/>
+          </a:p>
+          <a:p>
+            <a:r>
+              <a:rPr lang="en-US" sz="1200" dirty="0" err="1">
+                <a:solidFill>
+                  <a:srgbClr val="0070C0"/>
+                </a:solidFill>
+                <a:latin typeface="Menlo" panose="020B0609030804020204" pitchFamily="49" charset="0"/>
+                <a:ea typeface="Menlo" panose="020B0609030804020204" pitchFamily="49" charset="0"/>
+                <a:cs typeface="Menlo" panose="020B0609030804020204" pitchFamily="49" charset="0"/>
+              </a:rPr>
+              <a:t>A_new</a:t>
+            </a:r>
+            <a:r>
+              <a:rPr lang="en-US" sz="1200" dirty="0">
+                <a:solidFill>
+                  <a:srgbClr val="0070C0"/>
+                </a:solidFill>
+                <a:latin typeface="Menlo" panose="020B0609030804020204" pitchFamily="49" charset="0"/>
+                <a:ea typeface="Menlo" panose="020B0609030804020204" pitchFamily="49" charset="0"/>
+                <a:cs typeface="Menlo" panose="020B0609030804020204" pitchFamily="49" charset="0"/>
+              </a:rPr>
+              <a:t>       </a:t>
+            </a:r>
+            <a:r>
+              <a:rPr lang="en-US" sz="1200" dirty="0" err="1">
+                <a:solidFill>
+                  <a:srgbClr val="0070C0"/>
+                </a:solidFill>
+                <a:latin typeface="Menlo" panose="020B0609030804020204" pitchFamily="49" charset="0"/>
+                <a:ea typeface="Menlo" panose="020B0609030804020204" pitchFamily="49" charset="0"/>
+                <a:cs typeface="Menlo" panose="020B0609030804020204" pitchFamily="49" charset="0"/>
+              </a:rPr>
+              <a:t>B_new</a:t>
+            </a:r>
+            <a:endParaRPr lang="en-US" sz="1200" dirty="0">
+              <a:solidFill>
+                <a:srgbClr val="0070C0"/>
+              </a:solidFill>
+              <a:latin typeface="Menlo" panose="020B0609030804020204" pitchFamily="49" charset="0"/>
+              <a:ea typeface="Menlo" panose="020B0609030804020204" pitchFamily="49" charset="0"/>
+              <a:cs typeface="Menlo" panose="020B0609030804020204" pitchFamily="49" charset="0"/>
+            </a:endParaRPr>
+          </a:p>
+          <a:p>
+            <a:r>
+              <a:rPr lang="en-US" sz="1200" dirty="0" err="1">
+                <a:solidFill>
+                  <a:srgbClr val="0070C0"/>
+                </a:solidFill>
+                <a:latin typeface="Menlo" panose="020B0609030804020204" pitchFamily="49" charset="0"/>
+                <a:ea typeface="Menlo" panose="020B0609030804020204" pitchFamily="49" charset="0"/>
+                <a:cs typeface="Menlo" panose="020B0609030804020204" pitchFamily="49" charset="0"/>
+              </a:rPr>
+              <a:t>A_old</a:t>
+            </a:r>
+            <a:r>
+              <a:rPr lang="en-US" sz="1200" dirty="0">
+                <a:solidFill>
+                  <a:srgbClr val="0070C0"/>
+                </a:solidFill>
+                <a:latin typeface="Menlo" panose="020B0609030804020204" pitchFamily="49" charset="0"/>
+                <a:ea typeface="Menlo" panose="020B0609030804020204" pitchFamily="49" charset="0"/>
+                <a:cs typeface="Menlo" panose="020B0609030804020204" pitchFamily="49" charset="0"/>
+              </a:rPr>
+              <a:t>       </a:t>
+            </a:r>
+            <a:r>
+              <a:rPr lang="en-US" sz="1200" dirty="0" err="1">
+                <a:solidFill>
+                  <a:srgbClr val="0070C0"/>
+                </a:solidFill>
+                <a:latin typeface="Menlo" panose="020B0609030804020204" pitchFamily="49" charset="0"/>
+                <a:ea typeface="Menlo" panose="020B0609030804020204" pitchFamily="49" charset="0"/>
+                <a:cs typeface="Menlo" panose="020B0609030804020204" pitchFamily="49" charset="0"/>
+              </a:rPr>
+              <a:t>B_old</a:t>
+            </a:r>
+            <a:endParaRPr lang="en-US" sz="1200" dirty="0">
+              <a:solidFill>
+                <a:srgbClr val="0070C0"/>
+              </a:solidFill>
+              <a:latin typeface="Menlo" panose="020B0609030804020204" pitchFamily="49" charset="0"/>
+              <a:ea typeface="Menlo" panose="020B0609030804020204" pitchFamily="49" charset="0"/>
+              <a:cs typeface="Menlo" panose="020B0609030804020204" pitchFamily="49" charset="0"/>
+            </a:endParaRPr>
+          </a:p>
+          <a:p>
+            <a:endParaRPr lang="en-US" sz="1200" dirty="0">
+              <a:solidFill>
+                <a:srgbClr val="0070C0"/>
+              </a:solidFill>
+              <a:latin typeface="Menlo" panose="020B0609030804020204" pitchFamily="49" charset="0"/>
+              <a:ea typeface="Menlo" panose="020B0609030804020204" pitchFamily="49" charset="0"/>
+              <a:cs typeface="Menlo" panose="020B0609030804020204" pitchFamily="49" charset="0"/>
+            </a:endParaRPr>
+          </a:p>
+          <a:p>
+            <a:r>
+              <a:rPr lang="en-US" sz="1200" dirty="0">
+                <a:solidFill>
+                  <a:srgbClr val="0070C0"/>
+                </a:solidFill>
+                <a:latin typeface="Menlo" panose="020B0609030804020204" pitchFamily="49" charset="0"/>
+                <a:ea typeface="Menlo" panose="020B0609030804020204" pitchFamily="49" charset="0"/>
+                <a:cs typeface="Menlo" panose="020B0609030804020204" pitchFamily="49" charset="0"/>
+              </a:rPr>
+              <a:t>We can compare:</a:t>
+            </a:r>
+          </a:p>
+          <a:p>
+            <a:endParaRPr lang="en-US" sz="1200" dirty="0">
+              <a:solidFill>
+                <a:srgbClr val="0070C0"/>
+              </a:solidFill>
+              <a:latin typeface="Menlo" panose="020B0609030804020204" pitchFamily="49" charset="0"/>
+              <a:ea typeface="Menlo" panose="020B0609030804020204" pitchFamily="49" charset="0"/>
+              <a:cs typeface="Menlo" panose="020B0609030804020204" pitchFamily="49" charset="0"/>
+            </a:endParaRPr>
+          </a:p>
+          <a:p>
+            <a:r>
+              <a:rPr lang="en-US" sz="1200" dirty="0">
+                <a:solidFill>
+                  <a:srgbClr val="0070C0"/>
+                </a:solidFill>
+                <a:latin typeface="Menlo" panose="020B0609030804020204" pitchFamily="49" charset="0"/>
+                <a:ea typeface="Menlo" panose="020B0609030804020204" pitchFamily="49" charset="0"/>
+                <a:cs typeface="Menlo" panose="020B0609030804020204" pitchFamily="49" charset="0"/>
+              </a:rPr>
+              <a:t>   A      :  B</a:t>
+            </a:r>
+          </a:p>
+          <a:p>
+            <a:endParaRPr lang="en-US" sz="1200" dirty="0">
+              <a:solidFill>
+                <a:srgbClr val="0070C0"/>
+              </a:solidFill>
+              <a:latin typeface="Menlo" panose="020B0609030804020204" pitchFamily="49" charset="0"/>
+              <a:ea typeface="Menlo" panose="020B0609030804020204" pitchFamily="49" charset="0"/>
+              <a:cs typeface="Menlo" panose="020B0609030804020204" pitchFamily="49" charset="0"/>
+            </a:endParaRPr>
+          </a:p>
+          <a:p>
+            <a:r>
+              <a:rPr lang="en-US" sz="1200" dirty="0">
+                <a:solidFill>
+                  <a:srgbClr val="0070C0"/>
+                </a:solidFill>
+                <a:latin typeface="Menlo" panose="020B0609030804020204" pitchFamily="49" charset="0"/>
+                <a:ea typeface="Menlo" panose="020B0609030804020204" pitchFamily="49" charset="0"/>
+                <a:cs typeface="Menlo" panose="020B0609030804020204" pitchFamily="49" charset="0"/>
+              </a:rPr>
+              <a:t>   </a:t>
+            </a:r>
+            <a:r>
+              <a:rPr lang="en-US" sz="1200" dirty="0" err="1">
+                <a:solidFill>
+                  <a:srgbClr val="0070C0"/>
+                </a:solidFill>
+                <a:latin typeface="Menlo" panose="020B0609030804020204" pitchFamily="49" charset="0"/>
+                <a:ea typeface="Menlo" panose="020B0609030804020204" pitchFamily="49" charset="0"/>
+                <a:cs typeface="Menlo" panose="020B0609030804020204" pitchFamily="49" charset="0"/>
+              </a:rPr>
+              <a:t>A_new</a:t>
+            </a:r>
+            <a:r>
+              <a:rPr lang="en-US" sz="1200" dirty="0">
+                <a:solidFill>
+                  <a:srgbClr val="0070C0"/>
+                </a:solidFill>
+                <a:latin typeface="Menlo" panose="020B0609030804020204" pitchFamily="49" charset="0"/>
+                <a:ea typeface="Menlo" panose="020B0609030804020204" pitchFamily="49" charset="0"/>
+                <a:cs typeface="Menlo" panose="020B0609030804020204" pitchFamily="49" charset="0"/>
+              </a:rPr>
+              <a:t>  :  </a:t>
+            </a:r>
+            <a:r>
+              <a:rPr lang="en-US" sz="1200" dirty="0" err="1">
+                <a:solidFill>
+                  <a:srgbClr val="0070C0"/>
+                </a:solidFill>
+                <a:latin typeface="Menlo" panose="020B0609030804020204" pitchFamily="49" charset="0"/>
+                <a:ea typeface="Menlo" panose="020B0609030804020204" pitchFamily="49" charset="0"/>
+                <a:cs typeface="Menlo" panose="020B0609030804020204" pitchFamily="49" charset="0"/>
+              </a:rPr>
+              <a:t>B_new</a:t>
+            </a:r>
+            <a:endParaRPr lang="en-US" sz="1200" dirty="0">
+              <a:solidFill>
+                <a:srgbClr val="0070C0"/>
+              </a:solidFill>
+              <a:latin typeface="Menlo" panose="020B0609030804020204" pitchFamily="49" charset="0"/>
+              <a:ea typeface="Menlo" panose="020B0609030804020204" pitchFamily="49" charset="0"/>
+              <a:cs typeface="Menlo" panose="020B0609030804020204" pitchFamily="49" charset="0"/>
+            </a:endParaRPr>
+          </a:p>
+          <a:p>
+            <a:r>
+              <a:rPr lang="en-US" sz="1200" dirty="0">
+                <a:solidFill>
+                  <a:srgbClr val="0070C0"/>
+                </a:solidFill>
+                <a:latin typeface="Menlo" panose="020B0609030804020204" pitchFamily="49" charset="0"/>
+                <a:ea typeface="Menlo" panose="020B0609030804020204" pitchFamily="49" charset="0"/>
+                <a:cs typeface="Menlo" panose="020B0609030804020204" pitchFamily="49" charset="0"/>
+              </a:rPr>
+              <a:t>   </a:t>
+            </a:r>
+            <a:r>
+              <a:rPr lang="en-US" sz="1200" dirty="0" err="1">
+                <a:solidFill>
+                  <a:srgbClr val="0070C0"/>
+                </a:solidFill>
+                <a:latin typeface="Menlo" panose="020B0609030804020204" pitchFamily="49" charset="0"/>
+                <a:ea typeface="Menlo" panose="020B0609030804020204" pitchFamily="49" charset="0"/>
+                <a:cs typeface="Menlo" panose="020B0609030804020204" pitchFamily="49" charset="0"/>
+              </a:rPr>
+              <a:t>A_old</a:t>
+            </a:r>
+            <a:r>
+              <a:rPr lang="en-US" sz="1200" dirty="0">
+                <a:solidFill>
+                  <a:srgbClr val="0070C0"/>
+                </a:solidFill>
+                <a:latin typeface="Menlo" panose="020B0609030804020204" pitchFamily="49" charset="0"/>
+                <a:ea typeface="Menlo" panose="020B0609030804020204" pitchFamily="49" charset="0"/>
+                <a:cs typeface="Menlo" panose="020B0609030804020204" pitchFamily="49" charset="0"/>
+              </a:rPr>
+              <a:t>  :  </a:t>
+            </a:r>
+            <a:r>
+              <a:rPr lang="en-US" sz="1200" dirty="0" err="1">
+                <a:solidFill>
+                  <a:srgbClr val="0070C0"/>
+                </a:solidFill>
+                <a:latin typeface="Menlo" panose="020B0609030804020204" pitchFamily="49" charset="0"/>
+                <a:ea typeface="Menlo" panose="020B0609030804020204" pitchFamily="49" charset="0"/>
+                <a:cs typeface="Menlo" panose="020B0609030804020204" pitchFamily="49" charset="0"/>
+              </a:rPr>
+              <a:t>B_old</a:t>
+            </a:r>
+            <a:endParaRPr lang="en-US" sz="1200" dirty="0">
+              <a:solidFill>
+                <a:srgbClr val="0070C0"/>
+              </a:solidFill>
+              <a:latin typeface="Menlo" panose="020B0609030804020204" pitchFamily="49" charset="0"/>
+              <a:ea typeface="Menlo" panose="020B0609030804020204" pitchFamily="49" charset="0"/>
+              <a:cs typeface="Menlo" panose="020B0609030804020204" pitchFamily="49" charset="0"/>
+            </a:endParaRPr>
+          </a:p>
+          <a:p>
+            <a:endParaRPr lang="en-US" sz="1200" dirty="0">
+              <a:solidFill>
+                <a:srgbClr val="0070C0"/>
+              </a:solidFill>
+              <a:latin typeface="Menlo" panose="020B0609030804020204" pitchFamily="49" charset="0"/>
+              <a:ea typeface="Menlo" panose="020B0609030804020204" pitchFamily="49" charset="0"/>
+              <a:cs typeface="Menlo" panose="020B0609030804020204" pitchFamily="49" charset="0"/>
+            </a:endParaRPr>
+          </a:p>
+          <a:p>
+            <a:r>
+              <a:rPr lang="en-US" sz="1200" dirty="0">
+                <a:solidFill>
+                  <a:srgbClr val="0070C0"/>
+                </a:solidFill>
+                <a:latin typeface="Menlo" panose="020B0609030804020204" pitchFamily="49" charset="0"/>
+                <a:ea typeface="Menlo" panose="020B0609030804020204" pitchFamily="49" charset="0"/>
+                <a:cs typeface="Menlo" panose="020B0609030804020204" pitchFamily="49" charset="0"/>
+              </a:rPr>
+              <a:t>   </a:t>
+            </a:r>
+            <a:r>
+              <a:rPr lang="en-US" sz="1200" dirty="0" err="1">
+                <a:solidFill>
+                  <a:srgbClr val="0070C0"/>
+                </a:solidFill>
+                <a:latin typeface="Menlo" panose="020B0609030804020204" pitchFamily="49" charset="0"/>
+                <a:ea typeface="Menlo" panose="020B0609030804020204" pitchFamily="49" charset="0"/>
+                <a:cs typeface="Menlo" panose="020B0609030804020204" pitchFamily="49" charset="0"/>
+              </a:rPr>
+              <a:t>A_new</a:t>
+            </a:r>
+            <a:r>
+              <a:rPr lang="en-US" sz="1200" dirty="0">
+                <a:solidFill>
+                  <a:srgbClr val="0070C0"/>
+                </a:solidFill>
+                <a:latin typeface="Menlo" panose="020B0609030804020204" pitchFamily="49" charset="0"/>
+                <a:ea typeface="Menlo" panose="020B0609030804020204" pitchFamily="49" charset="0"/>
+                <a:cs typeface="Menlo" panose="020B0609030804020204" pitchFamily="49" charset="0"/>
+              </a:rPr>
+              <a:t>  :  </a:t>
+            </a:r>
+            <a:r>
+              <a:rPr lang="en-US" sz="1200" dirty="0" err="1">
+                <a:solidFill>
+                  <a:srgbClr val="0070C0"/>
+                </a:solidFill>
+                <a:latin typeface="Menlo" panose="020B0609030804020204" pitchFamily="49" charset="0"/>
+                <a:ea typeface="Menlo" panose="020B0609030804020204" pitchFamily="49" charset="0"/>
+                <a:cs typeface="Menlo" panose="020B0609030804020204" pitchFamily="49" charset="0"/>
+              </a:rPr>
+              <a:t>A_old</a:t>
+            </a:r>
+            <a:endParaRPr lang="en-US" sz="1200" dirty="0">
+              <a:solidFill>
+                <a:srgbClr val="0070C0"/>
+              </a:solidFill>
+              <a:latin typeface="Menlo" panose="020B0609030804020204" pitchFamily="49" charset="0"/>
+              <a:ea typeface="Menlo" panose="020B0609030804020204" pitchFamily="49" charset="0"/>
+              <a:cs typeface="Menlo" panose="020B0609030804020204" pitchFamily="49" charset="0"/>
+            </a:endParaRPr>
+          </a:p>
+          <a:p>
+            <a:r>
+              <a:rPr lang="en-US" sz="1200" dirty="0">
+                <a:solidFill>
+                  <a:srgbClr val="0070C0"/>
+                </a:solidFill>
+                <a:latin typeface="Menlo" panose="020B0609030804020204" pitchFamily="49" charset="0"/>
+                <a:ea typeface="Menlo" panose="020B0609030804020204" pitchFamily="49" charset="0"/>
+                <a:cs typeface="Menlo" panose="020B0609030804020204" pitchFamily="49" charset="0"/>
+              </a:rPr>
+              <a:t>   </a:t>
+            </a:r>
+            <a:r>
+              <a:rPr lang="en-US" sz="1200" dirty="0" err="1">
+                <a:solidFill>
+                  <a:srgbClr val="0070C0"/>
+                </a:solidFill>
+                <a:latin typeface="Menlo" panose="020B0609030804020204" pitchFamily="49" charset="0"/>
+                <a:ea typeface="Menlo" panose="020B0609030804020204" pitchFamily="49" charset="0"/>
+                <a:cs typeface="Menlo" panose="020B0609030804020204" pitchFamily="49" charset="0"/>
+              </a:rPr>
+              <a:t>B_new</a:t>
+            </a:r>
+            <a:r>
+              <a:rPr lang="en-US" sz="1200" dirty="0">
+                <a:solidFill>
+                  <a:srgbClr val="0070C0"/>
+                </a:solidFill>
+                <a:latin typeface="Menlo" panose="020B0609030804020204" pitchFamily="49" charset="0"/>
+                <a:ea typeface="Menlo" panose="020B0609030804020204" pitchFamily="49" charset="0"/>
+                <a:cs typeface="Menlo" panose="020B0609030804020204" pitchFamily="49" charset="0"/>
+              </a:rPr>
+              <a:t>  :  </a:t>
+            </a:r>
+            <a:r>
+              <a:rPr lang="en-US" sz="1200" dirty="0" err="1">
+                <a:solidFill>
+                  <a:srgbClr val="0070C0"/>
+                </a:solidFill>
+                <a:latin typeface="Menlo" panose="020B0609030804020204" pitchFamily="49" charset="0"/>
+                <a:ea typeface="Menlo" panose="020B0609030804020204" pitchFamily="49" charset="0"/>
+                <a:cs typeface="Menlo" panose="020B0609030804020204" pitchFamily="49" charset="0"/>
+              </a:rPr>
+              <a:t>B_old</a:t>
+            </a:r>
+            <a:endParaRPr lang="en-US" sz="1200" dirty="0">
+              <a:solidFill>
+                <a:srgbClr val="0070C0"/>
+              </a:solidFill>
+              <a:latin typeface="Menlo" panose="020B0609030804020204" pitchFamily="49" charset="0"/>
+              <a:ea typeface="Menlo" panose="020B0609030804020204" pitchFamily="49" charset="0"/>
+              <a:cs typeface="Menlo" panose="020B0609030804020204" pitchFamily="49" charset="0"/>
+            </a:endParaRPr>
+          </a:p>
+        </p:txBody>
+      </p:sp>
+      <p:sp>
+        <p:nvSpPr>
+          <p:cNvPr id="6" name="TextBox 5">
+            <a:extLst>
+              <a:ext uri="{FF2B5EF4-FFF2-40B4-BE49-F238E27FC236}">
+                <a16:creationId xmlns:a16="http://schemas.microsoft.com/office/drawing/2014/main" id="{B04F5605-7E99-674E-BDB8-617462202A59}"/>
+              </a:ext>
+            </a:extLst>
+          </p:cNvPr>
+          <p:cNvSpPr txBox="1"/>
+          <p:nvPr/>
+        </p:nvSpPr>
+        <p:spPr>
+          <a:xfrm>
+            <a:off x="0" y="0"/>
+            <a:ext cx="4404239" cy="523220"/>
+          </a:xfrm>
+          <a:prstGeom prst="rect">
+            <a:avLst/>
+          </a:prstGeom>
+          <a:noFill/>
+        </p:spPr>
+        <p:txBody>
+          <a:bodyPr wrap="square" rtlCol="0">
+            <a:spAutoFit/>
+          </a:bodyPr>
+          <a:lstStyle/>
+          <a:p>
+            <a:r>
+              <a:rPr lang="en-US" sz="2800" b="1" dirty="0"/>
               <a:t>Novelty and Primacy Effects</a:t>
             </a:r>
           </a:p>
@@ -9803,7 +11892,7 @@
 </p:sld>
 </file>
 
-<file path=ppt/slides/slide8.xml><?xml version="1.0" encoding="utf-8"?>
+<file path=ppt/slides/slide9.xml><?xml version="1.0" encoding="utf-8"?>
 <p:sld xmlns:a="http://schemas.openxmlformats.org/drawingml/2006/main" xmlns:r="http://schemas.openxmlformats.org/officeDocument/2006/relationships" xmlns:p="http://schemas.openxmlformats.org/presentationml/2006/main">
   <p:cSld>
     <p:spTree>
